--- a/Day2/2-paev-andmetarkus-esitlus.pptx
+++ b/Day2/2-paev-andmetarkus-esitlus.pptx
@@ -13,14 +13,14 @@
   <p:sldIdLst>
     <p:sldId id="417" r:id="rId5"/>
     <p:sldId id="433" r:id="rId6"/>
-    <p:sldId id="438" r:id="rId7"/>
+    <p:sldId id="634" r:id="rId7"/>
     <p:sldId id="443" r:id="rId8"/>
     <p:sldId id="444" r:id="rId9"/>
     <p:sldId id="445" r:id="rId10"/>
-    <p:sldId id="442" r:id="rId11"/>
+    <p:sldId id="635" r:id="rId11"/>
     <p:sldId id="535" r:id="rId12"/>
-    <p:sldId id="585" r:id="rId13"/>
-    <p:sldId id="446" r:id="rId14"/>
+    <p:sldId id="446" r:id="rId13"/>
+    <p:sldId id="585" r:id="rId14"/>
     <p:sldId id="586" r:id="rId15"/>
     <p:sldId id="536" r:id="rId16"/>
     <p:sldId id="584" r:id="rId17"/>
@@ -49,15 +49,17 @@
       <p:font typeface="Inter" panose="020B0604020202020204" charset="0"/>
       <p:regular r:id="rId34"/>
       <p:bold r:id="rId35"/>
+      <p:italic r:id="rId36"/>
+      <p:boldItalic r:id="rId37"/>
     </p:embeddedFont>
     <p:embeddedFont>
       <p:font typeface="Inter Bold" panose="020B0604020202020204" charset="0"/>
-      <p:bold r:id="rId36"/>
+      <p:bold r:id="rId38"/>
     </p:embeddedFont>
     <p:embeddedFont>
       <p:font typeface="Poppins SemiBold" panose="00000700000000000000" pitchFamily="2" charset="0"/>
-      <p:bold r:id="rId37"/>
-      <p:boldItalic r:id="rId38"/>
+      <p:bold r:id="rId39"/>
+      <p:boldItalic r:id="rId40"/>
     </p:embeddedFont>
   </p:embeddedFontLst>
   <p:defaultTextStyle>
@@ -169,11 +171,146 @@
 <file path=ppt/revisionInfo.xml><?xml version="1.0" encoding="utf-8"?>
 <p1510:revInfo xmlns:a="http://schemas.openxmlformats.org/drawingml/2006/main" xmlns:r="http://schemas.openxmlformats.org/officeDocument/2006/relationships" xmlns:p1510="http://schemas.microsoft.com/office/powerpoint/2015/10/main">
   <p1510:revLst>
-    <p1510:client id="{8F6E3AAF-566A-5D51-B119-77279892CBC3}" v="105" dt="2025-08-24T13:23:56.524"/>
-    <p1510:client id="{A8601F25-6AF6-9169-3466-87404BF55397}" v="262" dt="2025-08-25T15:32:10.434"/>
-    <p1510:client id="{B8491133-D6B9-C97F-FC73-8668DC74C4BC}" v="617" dt="2025-08-25T15:10:28.446"/>
+    <p1510:client id="{5E46152F-CBC7-47C0-AE8F-8590F8E26B72}" v="26" dt="2026-03-30T18:33:29.077"/>
   </p1510:revLst>
 </p1510:revInfo>
+</file>
+
+<file path=ppt/changesInfos/changesInfo1.xml><?xml version="1.0" encoding="utf-8"?>
+<pc:chgInfo xmlns:a="http://schemas.openxmlformats.org/drawingml/2006/main" xmlns:r="http://schemas.openxmlformats.org/officeDocument/2006/relationships" xmlns:ac="http://schemas.microsoft.com/office/drawing/2013/main/command" xmlns:pc="http://schemas.microsoft.com/office/powerpoint/2013/main/command">
+  <pc:docChgLst>
+    <pc:chgData name="Virve Räni" userId="161a7437-7ef4-49ec-91bf-54882f313dfe" providerId="ADAL" clId="{6D754EED-65AA-4A21-B175-6769012CF487}"/>
+    <pc:docChg chg="addSld delSld modSld sldOrd">
+      <pc:chgData name="Virve Räni" userId="161a7437-7ef4-49ec-91bf-54882f313dfe" providerId="ADAL" clId="{6D754EED-65AA-4A21-B175-6769012CF487}" dt="2026-03-30T18:33:29.077" v="143" actId="20577"/>
+      <pc:docMkLst>
+        <pc:docMk/>
+      </pc:docMkLst>
+      <pc:sldChg chg="modNotesTx">
+        <pc:chgData name="Virve Räni" userId="161a7437-7ef4-49ec-91bf-54882f313dfe" providerId="ADAL" clId="{6D754EED-65AA-4A21-B175-6769012CF487}" dt="2026-03-30T14:11:40.899" v="0" actId="20577"/>
+        <pc:sldMkLst>
+          <pc:docMk/>
+          <pc:sldMk cId="4169291970" sldId="417"/>
+        </pc:sldMkLst>
+      </pc:sldChg>
+      <pc:sldChg chg="del modNotesTx">
+        <pc:chgData name="Virve Räni" userId="161a7437-7ef4-49ec-91bf-54882f313dfe" providerId="ADAL" clId="{6D754EED-65AA-4A21-B175-6769012CF487}" dt="2026-03-30T14:14:49.091" v="3" actId="47"/>
+        <pc:sldMkLst>
+          <pc:docMk/>
+          <pc:sldMk cId="992073564" sldId="438"/>
+        </pc:sldMkLst>
+      </pc:sldChg>
+      <pc:sldChg chg="del">
+        <pc:chgData name="Virve Räni" userId="161a7437-7ef4-49ec-91bf-54882f313dfe" providerId="ADAL" clId="{6D754EED-65AA-4A21-B175-6769012CF487}" dt="2026-03-30T14:15:36.194" v="5" actId="47"/>
+        <pc:sldMkLst>
+          <pc:docMk/>
+          <pc:sldMk cId="1090052644" sldId="442"/>
+        </pc:sldMkLst>
+      </pc:sldChg>
+      <pc:sldChg chg="modSp modAnim modNotesTx">
+        <pc:chgData name="Virve Räni" userId="161a7437-7ef4-49ec-91bf-54882f313dfe" providerId="ADAL" clId="{6D754EED-65AA-4A21-B175-6769012CF487}" dt="2026-03-30T17:47:17.999" v="26" actId="20577"/>
+        <pc:sldMkLst>
+          <pc:docMk/>
+          <pc:sldMk cId="674930125" sldId="444"/>
+        </pc:sldMkLst>
+        <pc:spChg chg="mod">
+          <ac:chgData name="Virve Räni" userId="161a7437-7ef4-49ec-91bf-54882f313dfe" providerId="ADAL" clId="{6D754EED-65AA-4A21-B175-6769012CF487}" dt="2026-03-30T17:47:17.999" v="26" actId="20577"/>
+          <ac:spMkLst>
+            <pc:docMk/>
+            <pc:sldMk cId="674930125" sldId="444"/>
+            <ac:spMk id="3" creationId="{DBD63EF3-E01C-156C-9F60-9A0AB08494D1}"/>
+          </ac:spMkLst>
+        </pc:spChg>
+      </pc:sldChg>
+      <pc:sldChg chg="ord">
+        <pc:chgData name="Virve Räni" userId="161a7437-7ef4-49ec-91bf-54882f313dfe" providerId="ADAL" clId="{6D754EED-65AA-4A21-B175-6769012CF487}" dt="2026-03-30T18:32:10.675" v="86"/>
+        <pc:sldMkLst>
+          <pc:docMk/>
+          <pc:sldMk cId="394666795" sldId="446"/>
+        </pc:sldMkLst>
+      </pc:sldChg>
+      <pc:sldChg chg="modNotesTx">
+        <pc:chgData name="Virve Räni" userId="161a7437-7ef4-49ec-91bf-54882f313dfe" providerId="ADAL" clId="{6D754EED-65AA-4A21-B175-6769012CF487}" dt="2026-03-30T17:56:40.630" v="31" actId="20577"/>
+        <pc:sldMkLst>
+          <pc:docMk/>
+          <pc:sldMk cId="1694942831" sldId="538"/>
+        </pc:sldMkLst>
+      </pc:sldChg>
+      <pc:sldChg chg="modNotesTx">
+        <pc:chgData name="Virve Räni" userId="161a7437-7ef4-49ec-91bf-54882f313dfe" providerId="ADAL" clId="{6D754EED-65AA-4A21-B175-6769012CF487}" dt="2026-03-30T17:50:20.380" v="28" actId="20577"/>
+        <pc:sldMkLst>
+          <pc:docMk/>
+          <pc:sldMk cId="1502341239" sldId="539"/>
+        </pc:sldMkLst>
+      </pc:sldChg>
+      <pc:sldChg chg="modSp mod modNotesTx">
+        <pc:chgData name="Virve Räni" userId="161a7437-7ef4-49ec-91bf-54882f313dfe" providerId="ADAL" clId="{6D754EED-65AA-4A21-B175-6769012CF487}" dt="2026-03-30T18:32:28.024" v="139" actId="20577"/>
+        <pc:sldMkLst>
+          <pc:docMk/>
+          <pc:sldMk cId="2908858834" sldId="585"/>
+        </pc:sldMkLst>
+        <pc:spChg chg="mod">
+          <ac:chgData name="Virve Räni" userId="161a7437-7ef4-49ec-91bf-54882f313dfe" providerId="ADAL" clId="{6D754EED-65AA-4A21-B175-6769012CF487}" dt="2026-03-30T18:32:28.024" v="139" actId="20577"/>
+          <ac:spMkLst>
+            <pc:docMk/>
+            <pc:sldMk cId="2908858834" sldId="585"/>
+            <ac:spMk id="2" creationId="{9DE2716E-62FE-889D-36A0-488FE686063C}"/>
+          </ac:spMkLst>
+        </pc:spChg>
+        <pc:spChg chg="mod">
+          <ac:chgData name="Virve Räni" userId="161a7437-7ef4-49ec-91bf-54882f313dfe" providerId="ADAL" clId="{6D754EED-65AA-4A21-B175-6769012CF487}" dt="2026-03-30T18:31:28.609" v="84" actId="20577"/>
+          <ac:spMkLst>
+            <pc:docMk/>
+            <pc:sldMk cId="2908858834" sldId="585"/>
+            <ac:spMk id="3" creationId="{880528B4-6D3A-26AC-5F90-5FEC55219D50}"/>
+          </ac:spMkLst>
+        </pc:spChg>
+      </pc:sldChg>
+      <pc:sldChg chg="modSp modNotesTx">
+        <pc:chgData name="Virve Räni" userId="161a7437-7ef4-49ec-91bf-54882f313dfe" providerId="ADAL" clId="{6D754EED-65AA-4A21-B175-6769012CF487}" dt="2026-03-30T18:33:29.077" v="143" actId="20577"/>
+        <pc:sldMkLst>
+          <pc:docMk/>
+          <pc:sldMk cId="337267123" sldId="629"/>
+        </pc:sldMkLst>
+        <pc:spChg chg="mod">
+          <ac:chgData name="Virve Räni" userId="161a7437-7ef4-49ec-91bf-54882f313dfe" providerId="ADAL" clId="{6D754EED-65AA-4A21-B175-6769012CF487}" dt="2026-03-30T18:33:29.077" v="143" actId="20577"/>
+          <ac:spMkLst>
+            <pc:docMk/>
+            <pc:sldMk cId="337267123" sldId="629"/>
+            <ac:spMk id="3" creationId="{BFEA46AF-CF26-119E-3252-58FD3592F913}"/>
+          </ac:spMkLst>
+        </pc:spChg>
+      </pc:sldChg>
+      <pc:sldChg chg="modNotesTx">
+        <pc:chgData name="Virve Räni" userId="161a7437-7ef4-49ec-91bf-54882f313dfe" providerId="ADAL" clId="{6D754EED-65AA-4A21-B175-6769012CF487}" dt="2026-03-30T17:57:19.668" v="32" actId="20577"/>
+        <pc:sldMkLst>
+          <pc:docMk/>
+          <pc:sldMk cId="4178757838" sldId="632"/>
+        </pc:sldMkLst>
+      </pc:sldChg>
+      <pc:sldChg chg="modNotesTx">
+        <pc:chgData name="Virve Räni" userId="161a7437-7ef4-49ec-91bf-54882f313dfe" providerId="ADAL" clId="{6D754EED-65AA-4A21-B175-6769012CF487}" dt="2026-03-30T17:56:08.021" v="29" actId="20577"/>
+        <pc:sldMkLst>
+          <pc:docMk/>
+          <pc:sldMk cId="1708488494" sldId="633"/>
+        </pc:sldMkLst>
+      </pc:sldChg>
+      <pc:sldChg chg="add">
+        <pc:chgData name="Virve Räni" userId="161a7437-7ef4-49ec-91bf-54882f313dfe" providerId="ADAL" clId="{6D754EED-65AA-4A21-B175-6769012CF487}" dt="2026-03-30T14:14:46.109" v="2"/>
+        <pc:sldMkLst>
+          <pc:docMk/>
+          <pc:sldMk cId="1135806306" sldId="634"/>
+        </pc:sldMkLst>
+      </pc:sldChg>
+      <pc:sldChg chg="add">
+        <pc:chgData name="Virve Räni" userId="161a7437-7ef4-49ec-91bf-54882f313dfe" providerId="ADAL" clId="{6D754EED-65AA-4A21-B175-6769012CF487}" dt="2026-03-30T14:15:33.634" v="4"/>
+        <pc:sldMkLst>
+          <pc:docMk/>
+          <pc:sldMk cId="1236629858" sldId="635"/>
+        </pc:sldMkLst>
+      </pc:sldChg>
+    </pc:docChg>
+  </pc:docChgLst>
+</pc:chgInfo>
 </file>
 
 <file path=ppt/diagrams/colors1.xml><?xml version="1.0" encoding="utf-8"?>
@@ -3447,7 +3584,7 @@
           <a:p>
             <a:fld id="{F9D2AD6E-DEDD-49A0-A4BE-7A081A9112DA}" type="datetimeFigureOut">
               <a:rPr lang="en-US" smtClean="0"/>
-              <a:t>8/25/2025</a:t>
+              <a:t>3/30/2026</a:t>
             </a:fld>
             <a:endParaRPr lang="en-US"/>
           </a:p>
@@ -3623,7 +3760,7 @@
           </a:lstStyle>
           <a:p>
             <a:fld id="{2AF9C1A6-4321-41FA-B001-4140F0E2457F}" type="datetimeFigureOut">
-              <a:t>25.08.2025</a:t>
+              <a:t>30.03.2026</a:t>
             </a:fld>
             <a:endParaRPr lang="en-US"/>
           </a:p>
@@ -3933,188 +4070,10 @@
           <a:bodyPr/>
           <a:lstStyle/>
           <a:p>
-            <a:r>
-              <a:rPr lang="en-US" err="1">
-                <a:ea typeface="Calibri"/>
-                <a:cs typeface="Calibri"/>
-              </a:rPr>
-              <a:t>Tänase</a:t>
-            </a:r>
-            <a:r>
-              <a:rPr lang="en-US">
-                <a:ea typeface="Calibri"/>
-                <a:cs typeface="Calibri"/>
-              </a:rPr>
-              <a:t> </a:t>
-            </a:r>
-            <a:r>
-              <a:rPr lang="en-US" err="1">
-                <a:ea typeface="Calibri"/>
-                <a:cs typeface="Calibri"/>
-              </a:rPr>
-              <a:t>kohtumise</a:t>
-            </a:r>
-            <a:r>
-              <a:rPr lang="en-US">
-                <a:ea typeface="Calibri"/>
-                <a:cs typeface="Calibri"/>
-              </a:rPr>
-              <a:t> </a:t>
-            </a:r>
-            <a:r>
-              <a:rPr lang="en-US" err="1">
-                <a:ea typeface="Calibri"/>
-                <a:cs typeface="Calibri"/>
-              </a:rPr>
-              <a:t>eesmärk</a:t>
-            </a:r>
-            <a:r>
-              <a:rPr lang="en-US">
-                <a:ea typeface="Calibri"/>
-                <a:cs typeface="Calibri"/>
-              </a:rPr>
-              <a:t> on </a:t>
-            </a:r>
-            <a:r>
-              <a:rPr lang="en-US" err="1">
-                <a:ea typeface="Calibri"/>
-                <a:cs typeface="Calibri"/>
-              </a:rPr>
-              <a:t>üle</a:t>
-            </a:r>
-            <a:r>
-              <a:rPr lang="en-US">
-                <a:ea typeface="Calibri"/>
-                <a:cs typeface="Calibri"/>
-              </a:rPr>
-              <a:t> </a:t>
-            </a:r>
-            <a:r>
-              <a:rPr lang="en-US" err="1">
-                <a:ea typeface="Calibri"/>
-                <a:cs typeface="Calibri"/>
-              </a:rPr>
-              <a:t>vaadata</a:t>
-            </a:r>
-            <a:r>
-              <a:rPr lang="en-US">
-                <a:ea typeface="Calibri"/>
-                <a:cs typeface="Calibri"/>
-              </a:rPr>
-              <a:t> </a:t>
-            </a:r>
-            <a:r>
-              <a:rPr lang="en-US" err="1">
-                <a:ea typeface="Calibri"/>
-                <a:cs typeface="Calibri"/>
-              </a:rPr>
-              <a:t>õpiväljundid</a:t>
-            </a:r>
-            <a:r>
-              <a:rPr lang="en-US">
-                <a:ea typeface="Calibri"/>
-                <a:cs typeface="Calibri"/>
-              </a:rPr>
-              <a:t> </a:t>
-            </a:r>
-            <a:r>
-              <a:rPr lang="en-US" err="1">
-                <a:ea typeface="Calibri"/>
-                <a:cs typeface="Calibri"/>
-              </a:rPr>
-              <a:t>ning</a:t>
-            </a:r>
-            <a:r>
-              <a:rPr lang="en-US">
-                <a:ea typeface="Calibri"/>
-                <a:cs typeface="Calibri"/>
-              </a:rPr>
-              <a:t> </a:t>
-            </a:r>
-            <a:r>
-              <a:rPr lang="en-US" err="1">
-                <a:ea typeface="Calibri"/>
-                <a:cs typeface="Calibri"/>
-              </a:rPr>
-              <a:t>kogudaa</a:t>
-            </a:r>
-            <a:r>
-              <a:rPr lang="en-US">
-                <a:ea typeface="Calibri"/>
-                <a:cs typeface="Calibri"/>
-              </a:rPr>
-              <a:t> </a:t>
-            </a:r>
-            <a:r>
-              <a:rPr lang="en-US" err="1">
-                <a:ea typeface="Calibri"/>
-                <a:cs typeface="Calibri"/>
-              </a:rPr>
-              <a:t>teie</a:t>
-            </a:r>
-            <a:r>
-              <a:rPr lang="en-US">
-                <a:ea typeface="Calibri"/>
-                <a:cs typeface="Calibri"/>
-              </a:rPr>
-              <a:t> </a:t>
-            </a:r>
-            <a:r>
-              <a:rPr lang="en-US" err="1">
-                <a:ea typeface="Calibri"/>
-                <a:cs typeface="Calibri"/>
-              </a:rPr>
-              <a:t>esmased</a:t>
-            </a:r>
-            <a:r>
-              <a:rPr lang="en-US">
-                <a:ea typeface="Calibri"/>
-                <a:cs typeface="Calibri"/>
-              </a:rPr>
-              <a:t> </a:t>
-            </a:r>
-            <a:r>
-              <a:rPr lang="en-US" err="1">
-                <a:ea typeface="Calibri"/>
-                <a:cs typeface="Calibri"/>
-              </a:rPr>
-              <a:t>mõtted</a:t>
-            </a:r>
-            <a:r>
-              <a:rPr lang="en-US">
-                <a:ea typeface="Calibri"/>
-                <a:cs typeface="Calibri"/>
-              </a:rPr>
-              <a:t> </a:t>
-            </a:r>
-            <a:r>
-              <a:rPr lang="en-US" err="1">
-                <a:ea typeface="Calibri"/>
-                <a:cs typeface="Calibri"/>
-              </a:rPr>
-              <a:t>programmi</a:t>
-            </a:r>
-            <a:r>
-              <a:rPr lang="en-US">
-                <a:ea typeface="Calibri"/>
-                <a:cs typeface="Calibri"/>
-              </a:rPr>
-              <a:t> </a:t>
-            </a:r>
-            <a:r>
-              <a:rPr lang="en-US" err="1">
-                <a:ea typeface="Calibri"/>
-                <a:cs typeface="Calibri"/>
-              </a:rPr>
-              <a:t>osas</a:t>
-            </a:r>
-            <a:r>
-              <a:rPr lang="en-US">
-                <a:ea typeface="Calibri"/>
-                <a:cs typeface="Calibri"/>
-              </a:rPr>
-              <a:t>.</a:t>
-            </a:r>
+            <a:endParaRPr lang="en-US" dirty="0">
+              <a:ea typeface="Calibri"/>
+              <a:cs typeface="Calibri"/>
+            </a:endParaRPr>
           </a:p>
         </p:txBody>
       </p:sp>
@@ -4153,7 +4112,928 @@
 </p:notes>
 </file>
 
-<file path=ppt/notesSlides/notesSlide10.xml><?xml version="1.0" encoding="utf-8"?>
+<file path=ppt/notesSlides/notesSlide2.xml><?xml version="1.0" encoding="utf-8"?>
+<p:notes xmlns:a="http://schemas.openxmlformats.org/drawingml/2006/main" xmlns:r="http://schemas.openxmlformats.org/officeDocument/2006/relationships" xmlns:p="http://schemas.openxmlformats.org/presentationml/2006/main">
+  <p:cSld>
+    <p:spTree>
+      <p:nvGrpSpPr>
+        <p:cNvPr id="1" name=""/>
+        <p:cNvGrpSpPr/>
+        <p:nvPr/>
+      </p:nvGrpSpPr>
+      <p:grpSpPr>
+        <a:xfrm>
+          <a:off x="0" y="0"/>
+          <a:ext cx="0" cy="0"/>
+          <a:chOff x="0" y="0"/>
+          <a:chExt cx="0" cy="0"/>
+        </a:xfrm>
+      </p:grpSpPr>
+      <p:sp>
+        <p:nvSpPr>
+          <p:cNvPr id="2" name="Slide Image Placeholder 1"/>
+          <p:cNvSpPr>
+            <a:spLocks noGrp="1" noRot="1" noChangeAspect="1"/>
+          </p:cNvSpPr>
+          <p:nvPr>
+            <p:ph type="sldImg"/>
+          </p:nvPr>
+        </p:nvSpPr>
+        <p:spPr/>
+      </p:sp>
+      <p:sp>
+        <p:nvSpPr>
+          <p:cNvPr id="3" name="Notes Placeholder 2"/>
+          <p:cNvSpPr>
+            <a:spLocks noGrp="1"/>
+          </p:cNvSpPr>
+          <p:nvPr>
+            <p:ph type="body" idx="1"/>
+          </p:nvPr>
+        </p:nvSpPr>
+        <p:spPr/>
+        <p:txBody>
+          <a:bodyPr/>
+          <a:lstStyle/>
+          <a:p>
+            <a:endParaRPr lang="en-US" dirty="0">
+              <a:ea typeface="Calibri"/>
+              <a:cs typeface="Calibri"/>
+            </a:endParaRPr>
+          </a:p>
+        </p:txBody>
+      </p:sp>
+      <p:sp>
+        <p:nvSpPr>
+          <p:cNvPr id="4" name="Slide Number Placeholder 3"/>
+          <p:cNvSpPr>
+            <a:spLocks noGrp="1"/>
+          </p:cNvSpPr>
+          <p:nvPr>
+            <p:ph type="sldNum" sz="quarter" idx="5"/>
+          </p:nvPr>
+        </p:nvSpPr>
+        <p:spPr/>
+        <p:txBody>
+          <a:bodyPr/>
+          <a:lstStyle/>
+          <a:p>
+            <a:fld id="{46699514-027B-49BD-8B49-5054CA40ECF4}" type="slidenum">
+              <a:rPr lang="en-US"/>
+              <a:t>5</a:t>
+            </a:fld>
+            <a:endParaRPr lang="en-US"/>
+          </a:p>
+        </p:txBody>
+      </p:sp>
+    </p:spTree>
+    <p:extLst>
+      <p:ext uri="{BB962C8B-B14F-4D97-AF65-F5344CB8AC3E}">
+        <p14:creationId xmlns:p14="http://schemas.microsoft.com/office/powerpoint/2010/main" val="2406251908"/>
+      </p:ext>
+    </p:extLst>
+  </p:cSld>
+  <p:clrMapOvr>
+    <a:masterClrMapping/>
+  </p:clrMapOvr>
+</p:notes>
+</file>
+
+<file path=ppt/notesSlides/notesSlide3.xml><?xml version="1.0" encoding="utf-8"?>
+<p:notes xmlns:a="http://schemas.openxmlformats.org/drawingml/2006/main" xmlns:r="http://schemas.openxmlformats.org/officeDocument/2006/relationships" xmlns:p="http://schemas.openxmlformats.org/presentationml/2006/main">
+  <p:cSld>
+    <p:spTree>
+      <p:nvGrpSpPr>
+        <p:cNvPr id="1" name="">
+          <a:extLst>
+            <a:ext uri="{FF2B5EF4-FFF2-40B4-BE49-F238E27FC236}">
+              <a16:creationId xmlns:a16="http://schemas.microsoft.com/office/drawing/2014/main" id="{98D12C03-5C01-8B8A-3206-8FE48E26242B}"/>
+            </a:ext>
+          </a:extLst>
+        </p:cNvPr>
+        <p:cNvGrpSpPr/>
+        <p:nvPr/>
+      </p:nvGrpSpPr>
+      <p:grpSpPr>
+        <a:xfrm>
+          <a:off x="0" y="0"/>
+          <a:ext cx="0" cy="0"/>
+          <a:chOff x="0" y="0"/>
+          <a:chExt cx="0" cy="0"/>
+        </a:xfrm>
+      </p:grpSpPr>
+      <p:sp>
+        <p:nvSpPr>
+          <p:cNvPr id="2" name="Slide Image Placeholder 1">
+            <a:extLst>
+              <a:ext uri="{FF2B5EF4-FFF2-40B4-BE49-F238E27FC236}">
+                <a16:creationId xmlns:a16="http://schemas.microsoft.com/office/drawing/2014/main" id="{9BA5648C-3F4F-BBFD-730E-DC70F1FB6939}"/>
+              </a:ext>
+            </a:extLst>
+          </p:cNvPr>
+          <p:cNvSpPr>
+            <a:spLocks noGrp="1" noRot="1" noChangeAspect="1"/>
+          </p:cNvSpPr>
+          <p:nvPr>
+            <p:ph type="sldImg"/>
+          </p:nvPr>
+        </p:nvSpPr>
+        <p:spPr/>
+      </p:sp>
+      <p:sp>
+        <p:nvSpPr>
+          <p:cNvPr id="3" name="Notes Placeholder 2">
+            <a:extLst>
+              <a:ext uri="{FF2B5EF4-FFF2-40B4-BE49-F238E27FC236}">
+                <a16:creationId xmlns:a16="http://schemas.microsoft.com/office/drawing/2014/main" id="{7D0A1949-BD19-3CB6-4A3A-7777248EE68A}"/>
+              </a:ext>
+            </a:extLst>
+          </p:cNvPr>
+          <p:cNvSpPr>
+            <a:spLocks noGrp="1"/>
+          </p:cNvSpPr>
+          <p:nvPr>
+            <p:ph type="body" idx="1"/>
+          </p:nvPr>
+        </p:nvSpPr>
+        <p:spPr/>
+        <p:txBody>
+          <a:bodyPr/>
+          <a:lstStyle/>
+          <a:p>
+            <a:endParaRPr lang="en-US" dirty="0">
+              <a:ea typeface="Calibri"/>
+              <a:cs typeface="Calibri"/>
+            </a:endParaRPr>
+          </a:p>
+        </p:txBody>
+      </p:sp>
+      <p:sp>
+        <p:nvSpPr>
+          <p:cNvPr id="4" name="Slide Number Placeholder 3">
+            <a:extLst>
+              <a:ext uri="{FF2B5EF4-FFF2-40B4-BE49-F238E27FC236}">
+                <a16:creationId xmlns:a16="http://schemas.microsoft.com/office/drawing/2014/main" id="{9E939D6F-525D-01A6-895F-9E18CB1350FE}"/>
+              </a:ext>
+            </a:extLst>
+          </p:cNvPr>
+          <p:cNvSpPr>
+            <a:spLocks noGrp="1"/>
+          </p:cNvSpPr>
+          <p:nvPr>
+            <p:ph type="sldNum" sz="quarter" idx="5"/>
+          </p:nvPr>
+        </p:nvSpPr>
+        <p:spPr/>
+        <p:txBody>
+          <a:bodyPr/>
+          <a:lstStyle/>
+          <a:p>
+            <a:fld id="{46699514-027B-49BD-8B49-5054CA40ECF4}" type="slidenum">
+              <a:rPr lang="en-US"/>
+              <a:t>10</a:t>
+            </a:fld>
+            <a:endParaRPr lang="en-US"/>
+          </a:p>
+        </p:txBody>
+      </p:sp>
+    </p:spTree>
+    <p:extLst>
+      <p:ext uri="{BB962C8B-B14F-4D97-AF65-F5344CB8AC3E}">
+        <p14:creationId xmlns:p14="http://schemas.microsoft.com/office/powerpoint/2010/main" val="4269442484"/>
+      </p:ext>
+    </p:extLst>
+  </p:cSld>
+  <p:clrMapOvr>
+    <a:masterClrMapping/>
+  </p:clrMapOvr>
+</p:notes>
+</file>
+
+<file path=ppt/notesSlides/notesSlide4.xml><?xml version="1.0" encoding="utf-8"?>
+<p:notes xmlns:a="http://schemas.openxmlformats.org/drawingml/2006/main" xmlns:r="http://schemas.openxmlformats.org/officeDocument/2006/relationships" xmlns:p="http://schemas.openxmlformats.org/presentationml/2006/main">
+  <p:cSld>
+    <p:spTree>
+      <p:nvGrpSpPr>
+        <p:cNvPr id="1" name=""/>
+        <p:cNvGrpSpPr/>
+        <p:nvPr/>
+      </p:nvGrpSpPr>
+      <p:grpSpPr>
+        <a:xfrm>
+          <a:off x="0" y="0"/>
+          <a:ext cx="0" cy="0"/>
+          <a:chOff x="0" y="0"/>
+          <a:chExt cx="0" cy="0"/>
+        </a:xfrm>
+      </p:grpSpPr>
+      <p:sp>
+        <p:nvSpPr>
+          <p:cNvPr id="2" name="Slide Image Placeholder 1"/>
+          <p:cNvSpPr>
+            <a:spLocks noGrp="1" noRot="1" noChangeAspect="1"/>
+          </p:cNvSpPr>
+          <p:nvPr>
+            <p:ph type="sldImg"/>
+          </p:nvPr>
+        </p:nvSpPr>
+        <p:spPr/>
+      </p:sp>
+      <p:sp>
+        <p:nvSpPr>
+          <p:cNvPr id="3" name="Notes Placeholder 2"/>
+          <p:cNvSpPr>
+            <a:spLocks noGrp="1"/>
+          </p:cNvSpPr>
+          <p:nvPr>
+            <p:ph type="body" idx="1"/>
+          </p:nvPr>
+        </p:nvSpPr>
+        <p:spPr/>
+        <p:txBody>
+          <a:bodyPr/>
+          <a:lstStyle/>
+          <a:p>
+            <a:r>
+              <a:rPr lang="en-US" err="1">
+                <a:ea typeface="Calibri"/>
+                <a:cs typeface="Calibri"/>
+              </a:rPr>
+              <a:t>Milleks</a:t>
+            </a:r>
+            <a:r>
+              <a:rPr lang="en-US">
+                <a:ea typeface="Calibri"/>
+                <a:cs typeface="Calibri"/>
+              </a:rPr>
+              <a:t> </a:t>
+            </a:r>
+            <a:r>
+              <a:rPr lang="en-US" err="1">
+                <a:ea typeface="Calibri"/>
+                <a:cs typeface="Calibri"/>
+              </a:rPr>
+              <a:t>vajalik</a:t>
+            </a:r>
+            <a:r>
+              <a:rPr lang="en-US">
+                <a:ea typeface="Calibri"/>
+                <a:cs typeface="Calibri"/>
+              </a:rPr>
+              <a:t>? - Nii </a:t>
+            </a:r>
+            <a:r>
+              <a:rPr lang="en-US" err="1">
+                <a:ea typeface="Calibri"/>
+                <a:cs typeface="Calibri"/>
+              </a:rPr>
+              <a:t>enda</a:t>
+            </a:r>
+            <a:r>
+              <a:rPr lang="en-US">
+                <a:ea typeface="Calibri"/>
+                <a:cs typeface="Calibri"/>
+              </a:rPr>
+              <a:t> </a:t>
+            </a:r>
+            <a:r>
+              <a:rPr lang="en-US" err="1">
+                <a:ea typeface="Calibri"/>
+                <a:cs typeface="Calibri"/>
+              </a:rPr>
+              <a:t>kui</a:t>
+            </a:r>
+            <a:r>
+              <a:rPr lang="en-US">
+                <a:ea typeface="Calibri"/>
+                <a:cs typeface="Calibri"/>
+              </a:rPr>
+              <a:t> ka </a:t>
+            </a:r>
+            <a:r>
+              <a:rPr lang="en-US" err="1">
+                <a:ea typeface="Calibri"/>
+                <a:cs typeface="Calibri"/>
+              </a:rPr>
+              <a:t>kolleegide</a:t>
+            </a:r>
+            <a:r>
+              <a:rPr lang="en-US">
+                <a:ea typeface="Calibri"/>
+                <a:cs typeface="Calibri"/>
+              </a:rPr>
+              <a:t> </a:t>
+            </a:r>
+            <a:r>
+              <a:rPr lang="en-US" err="1">
+                <a:ea typeface="Calibri"/>
+                <a:cs typeface="Calibri"/>
+              </a:rPr>
+              <a:t>jaoks</a:t>
+            </a:r>
+            <a:r>
+              <a:rPr lang="en-US">
+                <a:ea typeface="Calibri"/>
+                <a:cs typeface="Calibri"/>
+              </a:rPr>
+              <a:t> </a:t>
+            </a:r>
+            <a:r>
+              <a:rPr lang="en-US" err="1">
+                <a:ea typeface="Calibri"/>
+                <a:cs typeface="Calibri"/>
+              </a:rPr>
+              <a:t>kirjeldamine</a:t>
+            </a:r>
+            <a:r>
+              <a:rPr lang="en-US">
+                <a:ea typeface="Calibri"/>
+                <a:cs typeface="Calibri"/>
+              </a:rPr>
+              <a:t>, </a:t>
+            </a:r>
+            <a:r>
+              <a:rPr lang="en-US" err="1">
+                <a:ea typeface="Calibri"/>
+                <a:cs typeface="Calibri"/>
+              </a:rPr>
+              <a:t>teada</a:t>
+            </a:r>
+            <a:r>
+              <a:rPr lang="en-US">
+                <a:ea typeface="Calibri"/>
+                <a:cs typeface="Calibri"/>
+              </a:rPr>
+              <a:t>, et </a:t>
+            </a:r>
+            <a:r>
+              <a:rPr lang="en-US" err="1">
+                <a:ea typeface="Calibri"/>
+                <a:cs typeface="Calibri"/>
+              </a:rPr>
+              <a:t>miks</a:t>
+            </a:r>
+            <a:r>
+              <a:rPr lang="en-US">
+                <a:ea typeface="Calibri"/>
+                <a:cs typeface="Calibri"/>
+              </a:rPr>
+              <a:t> ja </a:t>
+            </a:r>
+            <a:r>
+              <a:rPr lang="en-US" err="1">
+                <a:ea typeface="Calibri"/>
+                <a:cs typeface="Calibri"/>
+              </a:rPr>
+              <a:t>kuidas</a:t>
+            </a:r>
+            <a:r>
+              <a:rPr lang="en-US">
+                <a:ea typeface="Calibri"/>
+                <a:cs typeface="Calibri"/>
+              </a:rPr>
+              <a:t> </a:t>
+            </a:r>
+            <a:r>
+              <a:rPr lang="en-US" err="1">
+                <a:ea typeface="Calibri"/>
+                <a:cs typeface="Calibri"/>
+              </a:rPr>
+              <a:t>mingeid</a:t>
+            </a:r>
+            <a:r>
+              <a:rPr lang="en-US">
+                <a:ea typeface="Calibri"/>
+                <a:cs typeface="Calibri"/>
+              </a:rPr>
+              <a:t> </a:t>
+            </a:r>
+            <a:r>
+              <a:rPr lang="en-US" err="1">
+                <a:ea typeface="Calibri"/>
+                <a:cs typeface="Calibri"/>
+              </a:rPr>
+              <a:t>otsuseid</a:t>
+            </a:r>
+            <a:r>
+              <a:rPr lang="en-US">
+                <a:ea typeface="Calibri"/>
+                <a:cs typeface="Calibri"/>
+              </a:rPr>
+              <a:t> ja </a:t>
+            </a:r>
+            <a:r>
+              <a:rPr lang="en-US" err="1">
+                <a:ea typeface="Calibri"/>
+                <a:cs typeface="Calibri"/>
+              </a:rPr>
+              <a:t>muutusi</a:t>
+            </a:r>
+            <a:r>
+              <a:rPr lang="en-US">
+                <a:ea typeface="Calibri"/>
+                <a:cs typeface="Calibri"/>
+              </a:rPr>
+              <a:t> on </a:t>
+            </a:r>
+            <a:r>
+              <a:rPr lang="en-US" err="1">
+                <a:ea typeface="Calibri"/>
+                <a:cs typeface="Calibri"/>
+              </a:rPr>
+              <a:t>tehtud</a:t>
+            </a:r>
+            <a:r>
+              <a:rPr lang="en-US">
+                <a:ea typeface="Calibri"/>
+                <a:cs typeface="Calibri"/>
+              </a:rPr>
+              <a:t>.</a:t>
+            </a:r>
+          </a:p>
+        </p:txBody>
+      </p:sp>
+      <p:sp>
+        <p:nvSpPr>
+          <p:cNvPr id="4" name="Slide Number Placeholder 3"/>
+          <p:cNvSpPr>
+            <a:spLocks noGrp="1"/>
+          </p:cNvSpPr>
+          <p:nvPr>
+            <p:ph type="sldNum" sz="quarter" idx="5"/>
+          </p:nvPr>
+        </p:nvSpPr>
+        <p:spPr/>
+        <p:txBody>
+          <a:bodyPr/>
+          <a:lstStyle/>
+          <a:p>
+            <a:fld id="{46699514-027B-49BD-8B49-5054CA40ECF4}" type="slidenum">
+              <a:rPr lang="en-US"/>
+              <a:t>17</a:t>
+            </a:fld>
+            <a:endParaRPr lang="en-US"/>
+          </a:p>
+        </p:txBody>
+      </p:sp>
+    </p:spTree>
+    <p:extLst>
+      <p:ext uri="{BB962C8B-B14F-4D97-AF65-F5344CB8AC3E}">
+        <p14:creationId xmlns:p14="http://schemas.microsoft.com/office/powerpoint/2010/main" val="2536514774"/>
+      </p:ext>
+    </p:extLst>
+  </p:cSld>
+  <p:clrMapOvr>
+    <a:masterClrMapping/>
+  </p:clrMapOvr>
+</p:notes>
+</file>
+
+<file path=ppt/notesSlides/notesSlide5.xml><?xml version="1.0" encoding="utf-8"?>
+<p:notes xmlns:a="http://schemas.openxmlformats.org/drawingml/2006/main" xmlns:r="http://schemas.openxmlformats.org/officeDocument/2006/relationships" xmlns:p="http://schemas.openxmlformats.org/presentationml/2006/main">
+  <p:cSld>
+    <p:spTree>
+      <p:nvGrpSpPr>
+        <p:cNvPr id="1" name="">
+          <a:extLst>
+            <a:ext uri="{FF2B5EF4-FFF2-40B4-BE49-F238E27FC236}">
+              <a16:creationId xmlns:a16="http://schemas.microsoft.com/office/drawing/2014/main" id="{ADB38261-5F5F-4373-A5D6-4E8577214A3F}"/>
+            </a:ext>
+          </a:extLst>
+        </p:cNvPr>
+        <p:cNvGrpSpPr/>
+        <p:nvPr/>
+      </p:nvGrpSpPr>
+      <p:grpSpPr>
+        <a:xfrm>
+          <a:off x="0" y="0"/>
+          <a:ext cx="0" cy="0"/>
+          <a:chOff x="0" y="0"/>
+          <a:chExt cx="0" cy="0"/>
+        </a:xfrm>
+      </p:grpSpPr>
+      <p:sp>
+        <p:nvSpPr>
+          <p:cNvPr id="2" name="Slide Image Placeholder 1">
+            <a:extLst>
+              <a:ext uri="{FF2B5EF4-FFF2-40B4-BE49-F238E27FC236}">
+                <a16:creationId xmlns:a16="http://schemas.microsoft.com/office/drawing/2014/main" id="{F8060981-4133-90F6-400C-B8BA63CB694A}"/>
+              </a:ext>
+            </a:extLst>
+          </p:cNvPr>
+          <p:cNvSpPr>
+            <a:spLocks noGrp="1" noRot="1" noChangeAspect="1"/>
+          </p:cNvSpPr>
+          <p:nvPr>
+            <p:ph type="sldImg"/>
+          </p:nvPr>
+        </p:nvSpPr>
+        <p:spPr/>
+      </p:sp>
+      <p:sp>
+        <p:nvSpPr>
+          <p:cNvPr id="3" name="Notes Placeholder 2">
+            <a:extLst>
+              <a:ext uri="{FF2B5EF4-FFF2-40B4-BE49-F238E27FC236}">
+                <a16:creationId xmlns:a16="http://schemas.microsoft.com/office/drawing/2014/main" id="{7A33CF2B-B63C-6161-DFC0-A10D6DB8CF22}"/>
+              </a:ext>
+            </a:extLst>
+          </p:cNvPr>
+          <p:cNvSpPr>
+            <a:spLocks noGrp="1"/>
+          </p:cNvSpPr>
+          <p:nvPr>
+            <p:ph type="body" idx="1"/>
+          </p:nvPr>
+        </p:nvSpPr>
+        <p:spPr/>
+        <p:txBody>
+          <a:bodyPr/>
+          <a:lstStyle/>
+          <a:p>
+            <a:endParaRPr lang="en-US" dirty="0">
+              <a:ea typeface="Calibri"/>
+              <a:cs typeface="Calibri"/>
+            </a:endParaRPr>
+          </a:p>
+        </p:txBody>
+      </p:sp>
+      <p:sp>
+        <p:nvSpPr>
+          <p:cNvPr id="4" name="Slide Number Placeholder 3">
+            <a:extLst>
+              <a:ext uri="{FF2B5EF4-FFF2-40B4-BE49-F238E27FC236}">
+                <a16:creationId xmlns:a16="http://schemas.microsoft.com/office/drawing/2014/main" id="{435967AF-CF81-C282-94D9-719A7EB728D6}"/>
+              </a:ext>
+            </a:extLst>
+          </p:cNvPr>
+          <p:cNvSpPr>
+            <a:spLocks noGrp="1"/>
+          </p:cNvSpPr>
+          <p:nvPr>
+            <p:ph type="sldNum" sz="quarter" idx="5"/>
+          </p:nvPr>
+        </p:nvSpPr>
+        <p:spPr/>
+        <p:txBody>
+          <a:bodyPr/>
+          <a:lstStyle/>
+          <a:p>
+            <a:fld id="{46699514-027B-49BD-8B49-5054CA40ECF4}" type="slidenum">
+              <a:rPr lang="en-US"/>
+              <a:t>18</a:t>
+            </a:fld>
+            <a:endParaRPr lang="en-US"/>
+          </a:p>
+        </p:txBody>
+      </p:sp>
+    </p:spTree>
+    <p:extLst>
+      <p:ext uri="{BB962C8B-B14F-4D97-AF65-F5344CB8AC3E}">
+        <p14:creationId xmlns:p14="http://schemas.microsoft.com/office/powerpoint/2010/main" val="681070360"/>
+      </p:ext>
+    </p:extLst>
+  </p:cSld>
+  <p:clrMapOvr>
+    <a:masterClrMapping/>
+  </p:clrMapOvr>
+</p:notes>
+</file>
+
+<file path=ppt/notesSlides/notesSlide6.xml><?xml version="1.0" encoding="utf-8"?>
+<p:notes xmlns:a="http://schemas.openxmlformats.org/drawingml/2006/main" xmlns:r="http://schemas.openxmlformats.org/officeDocument/2006/relationships" xmlns:p="http://schemas.openxmlformats.org/presentationml/2006/main">
+  <p:cSld>
+    <p:spTree>
+      <p:nvGrpSpPr>
+        <p:cNvPr id="1" name="">
+          <a:extLst>
+            <a:ext uri="{FF2B5EF4-FFF2-40B4-BE49-F238E27FC236}">
+              <a16:creationId xmlns:a16="http://schemas.microsoft.com/office/drawing/2014/main" id="{C15A1A3C-E783-7FC2-9DCE-9F00D9B1A1FD}"/>
+            </a:ext>
+          </a:extLst>
+        </p:cNvPr>
+        <p:cNvGrpSpPr/>
+        <p:nvPr/>
+      </p:nvGrpSpPr>
+      <p:grpSpPr>
+        <a:xfrm>
+          <a:off x="0" y="0"/>
+          <a:ext cx="0" cy="0"/>
+          <a:chOff x="0" y="0"/>
+          <a:chExt cx="0" cy="0"/>
+        </a:xfrm>
+      </p:grpSpPr>
+      <p:sp>
+        <p:nvSpPr>
+          <p:cNvPr id="2" name="Slide Image Placeholder 1">
+            <a:extLst>
+              <a:ext uri="{FF2B5EF4-FFF2-40B4-BE49-F238E27FC236}">
+                <a16:creationId xmlns:a16="http://schemas.microsoft.com/office/drawing/2014/main" id="{82134939-D194-A8D8-24F4-C85F5076CAE1}"/>
+              </a:ext>
+            </a:extLst>
+          </p:cNvPr>
+          <p:cNvSpPr>
+            <a:spLocks noGrp="1" noRot="1" noChangeAspect="1"/>
+          </p:cNvSpPr>
+          <p:nvPr>
+            <p:ph type="sldImg"/>
+          </p:nvPr>
+        </p:nvSpPr>
+        <p:spPr/>
+      </p:sp>
+      <p:sp>
+        <p:nvSpPr>
+          <p:cNvPr id="3" name="Notes Placeholder 2">
+            <a:extLst>
+              <a:ext uri="{FF2B5EF4-FFF2-40B4-BE49-F238E27FC236}">
+                <a16:creationId xmlns:a16="http://schemas.microsoft.com/office/drawing/2014/main" id="{8DFF7AAE-DFE9-BA24-9A96-0EFCA02C2743}"/>
+              </a:ext>
+            </a:extLst>
+          </p:cNvPr>
+          <p:cNvSpPr>
+            <a:spLocks noGrp="1"/>
+          </p:cNvSpPr>
+          <p:nvPr>
+            <p:ph type="body" idx="1"/>
+          </p:nvPr>
+        </p:nvSpPr>
+        <p:spPr/>
+        <p:txBody>
+          <a:bodyPr/>
+          <a:lstStyle/>
+          <a:p>
+            <a:endParaRPr lang="en-US" dirty="0">
+              <a:ea typeface="Calibri"/>
+              <a:cs typeface="Calibri"/>
+            </a:endParaRPr>
+          </a:p>
+        </p:txBody>
+      </p:sp>
+      <p:sp>
+        <p:nvSpPr>
+          <p:cNvPr id="4" name="Slide Number Placeholder 3">
+            <a:extLst>
+              <a:ext uri="{FF2B5EF4-FFF2-40B4-BE49-F238E27FC236}">
+                <a16:creationId xmlns:a16="http://schemas.microsoft.com/office/drawing/2014/main" id="{0FA10A03-469A-13BE-92A5-4D0B78A8A8CD}"/>
+              </a:ext>
+            </a:extLst>
+          </p:cNvPr>
+          <p:cNvSpPr>
+            <a:spLocks noGrp="1"/>
+          </p:cNvSpPr>
+          <p:nvPr>
+            <p:ph type="sldNum" sz="quarter" idx="5"/>
+          </p:nvPr>
+        </p:nvSpPr>
+        <p:spPr/>
+        <p:txBody>
+          <a:bodyPr/>
+          <a:lstStyle/>
+          <a:p>
+            <a:fld id="{46699514-027B-49BD-8B49-5054CA40ECF4}" type="slidenum">
+              <a:rPr lang="en-US"/>
+              <a:t>19</a:t>
+            </a:fld>
+            <a:endParaRPr lang="en-US"/>
+          </a:p>
+        </p:txBody>
+      </p:sp>
+    </p:spTree>
+    <p:extLst>
+      <p:ext uri="{BB962C8B-B14F-4D97-AF65-F5344CB8AC3E}">
+        <p14:creationId xmlns:p14="http://schemas.microsoft.com/office/powerpoint/2010/main" val="1973746104"/>
+      </p:ext>
+    </p:extLst>
+  </p:cSld>
+  <p:clrMapOvr>
+    <a:masterClrMapping/>
+  </p:clrMapOvr>
+</p:notes>
+</file>
+
+<file path=ppt/notesSlides/notesSlide7.xml><?xml version="1.0" encoding="utf-8"?>
+<p:notes xmlns:a="http://schemas.openxmlformats.org/drawingml/2006/main" xmlns:r="http://schemas.openxmlformats.org/officeDocument/2006/relationships" xmlns:p="http://schemas.openxmlformats.org/presentationml/2006/main">
+  <p:cSld>
+    <p:spTree>
+      <p:nvGrpSpPr>
+        <p:cNvPr id="1" name="">
+          <a:extLst>
+            <a:ext uri="{FF2B5EF4-FFF2-40B4-BE49-F238E27FC236}">
+              <a16:creationId xmlns:a16="http://schemas.microsoft.com/office/drawing/2014/main" id="{AA20B99D-40EC-4B75-2DC1-2D679F441C02}"/>
+            </a:ext>
+          </a:extLst>
+        </p:cNvPr>
+        <p:cNvGrpSpPr/>
+        <p:nvPr/>
+      </p:nvGrpSpPr>
+      <p:grpSpPr>
+        <a:xfrm>
+          <a:off x="0" y="0"/>
+          <a:ext cx="0" cy="0"/>
+          <a:chOff x="0" y="0"/>
+          <a:chExt cx="0" cy="0"/>
+        </a:xfrm>
+      </p:grpSpPr>
+      <p:sp>
+        <p:nvSpPr>
+          <p:cNvPr id="2" name="Slide Image Placeholder 1">
+            <a:extLst>
+              <a:ext uri="{FF2B5EF4-FFF2-40B4-BE49-F238E27FC236}">
+                <a16:creationId xmlns:a16="http://schemas.microsoft.com/office/drawing/2014/main" id="{D2A8C3F8-B93D-2F9A-B957-178CA06DA1D8}"/>
+              </a:ext>
+            </a:extLst>
+          </p:cNvPr>
+          <p:cNvSpPr>
+            <a:spLocks noGrp="1" noRot="1" noChangeAspect="1"/>
+          </p:cNvSpPr>
+          <p:nvPr>
+            <p:ph type="sldImg"/>
+          </p:nvPr>
+        </p:nvSpPr>
+        <p:spPr/>
+      </p:sp>
+      <p:sp>
+        <p:nvSpPr>
+          <p:cNvPr id="3" name="Notes Placeholder 2">
+            <a:extLst>
+              <a:ext uri="{FF2B5EF4-FFF2-40B4-BE49-F238E27FC236}">
+                <a16:creationId xmlns:a16="http://schemas.microsoft.com/office/drawing/2014/main" id="{32E55BA3-0FFA-7E1A-3BED-F130CFB7D4B5}"/>
+              </a:ext>
+            </a:extLst>
+          </p:cNvPr>
+          <p:cNvSpPr>
+            <a:spLocks noGrp="1"/>
+          </p:cNvSpPr>
+          <p:nvPr>
+            <p:ph type="body" idx="1"/>
+          </p:nvPr>
+        </p:nvSpPr>
+        <p:spPr/>
+        <p:txBody>
+          <a:bodyPr/>
+          <a:lstStyle/>
+          <a:p>
+            <a:endParaRPr lang="en-US" dirty="0">
+              <a:ea typeface="Calibri"/>
+              <a:cs typeface="Calibri"/>
+            </a:endParaRPr>
+          </a:p>
+        </p:txBody>
+      </p:sp>
+      <p:sp>
+        <p:nvSpPr>
+          <p:cNvPr id="4" name="Slide Number Placeholder 3">
+            <a:extLst>
+              <a:ext uri="{FF2B5EF4-FFF2-40B4-BE49-F238E27FC236}">
+                <a16:creationId xmlns:a16="http://schemas.microsoft.com/office/drawing/2014/main" id="{094B880B-DCCB-A2B5-176F-2871A027C0F9}"/>
+              </a:ext>
+            </a:extLst>
+          </p:cNvPr>
+          <p:cNvSpPr>
+            <a:spLocks noGrp="1"/>
+          </p:cNvSpPr>
+          <p:nvPr>
+            <p:ph type="sldNum" sz="quarter" idx="5"/>
+          </p:nvPr>
+        </p:nvSpPr>
+        <p:spPr/>
+        <p:txBody>
+          <a:bodyPr/>
+          <a:lstStyle/>
+          <a:p>
+            <a:fld id="{46699514-027B-49BD-8B49-5054CA40ECF4}" type="slidenum">
+              <a:rPr lang="en-US"/>
+              <a:t>20</a:t>
+            </a:fld>
+            <a:endParaRPr lang="en-US"/>
+          </a:p>
+        </p:txBody>
+      </p:sp>
+    </p:spTree>
+    <p:extLst>
+      <p:ext uri="{BB962C8B-B14F-4D97-AF65-F5344CB8AC3E}">
+        <p14:creationId xmlns:p14="http://schemas.microsoft.com/office/powerpoint/2010/main" val="1279079355"/>
+      </p:ext>
+    </p:extLst>
+  </p:cSld>
+  <p:clrMapOvr>
+    <a:masterClrMapping/>
+  </p:clrMapOvr>
+</p:notes>
+</file>
+
+<file path=ppt/notesSlides/notesSlide8.xml><?xml version="1.0" encoding="utf-8"?>
+<p:notes xmlns:a="http://schemas.openxmlformats.org/drawingml/2006/main" xmlns:r="http://schemas.openxmlformats.org/officeDocument/2006/relationships" xmlns:p="http://schemas.openxmlformats.org/presentationml/2006/main">
+  <p:cSld>
+    <p:spTree>
+      <p:nvGrpSpPr>
+        <p:cNvPr id="1" name="">
+          <a:extLst>
+            <a:ext uri="{FF2B5EF4-FFF2-40B4-BE49-F238E27FC236}">
+              <a16:creationId xmlns:a16="http://schemas.microsoft.com/office/drawing/2014/main" id="{BB8DA34C-149A-57A8-DCCE-482263E209E7}"/>
+            </a:ext>
+          </a:extLst>
+        </p:cNvPr>
+        <p:cNvGrpSpPr/>
+        <p:nvPr/>
+      </p:nvGrpSpPr>
+      <p:grpSpPr>
+        <a:xfrm>
+          <a:off x="0" y="0"/>
+          <a:ext cx="0" cy="0"/>
+          <a:chOff x="0" y="0"/>
+          <a:chExt cx="0" cy="0"/>
+        </a:xfrm>
+      </p:grpSpPr>
+      <p:sp>
+        <p:nvSpPr>
+          <p:cNvPr id="2" name="Slide Image Placeholder 1">
+            <a:extLst>
+              <a:ext uri="{FF2B5EF4-FFF2-40B4-BE49-F238E27FC236}">
+                <a16:creationId xmlns:a16="http://schemas.microsoft.com/office/drawing/2014/main" id="{0212C817-AC27-CA90-93C2-204C3230EB4F}"/>
+              </a:ext>
+            </a:extLst>
+          </p:cNvPr>
+          <p:cNvSpPr>
+            <a:spLocks noGrp="1" noRot="1" noChangeAspect="1"/>
+          </p:cNvSpPr>
+          <p:nvPr>
+            <p:ph type="sldImg"/>
+          </p:nvPr>
+        </p:nvSpPr>
+        <p:spPr/>
+      </p:sp>
+      <p:sp>
+        <p:nvSpPr>
+          <p:cNvPr id="3" name="Notes Placeholder 2">
+            <a:extLst>
+              <a:ext uri="{FF2B5EF4-FFF2-40B4-BE49-F238E27FC236}">
+                <a16:creationId xmlns:a16="http://schemas.microsoft.com/office/drawing/2014/main" id="{73FC1774-130A-2B62-BCFA-16A9E5D06680}"/>
+              </a:ext>
+            </a:extLst>
+          </p:cNvPr>
+          <p:cNvSpPr>
+            <a:spLocks noGrp="1"/>
+          </p:cNvSpPr>
+          <p:nvPr>
+            <p:ph type="body" idx="1"/>
+          </p:nvPr>
+        </p:nvSpPr>
+        <p:spPr/>
+        <p:txBody>
+          <a:bodyPr/>
+          <a:lstStyle/>
+          <a:p>
+            <a:endParaRPr lang="en-US" dirty="0">
+              <a:ea typeface="Calibri"/>
+              <a:cs typeface="Calibri"/>
+            </a:endParaRPr>
+          </a:p>
+        </p:txBody>
+      </p:sp>
+      <p:sp>
+        <p:nvSpPr>
+          <p:cNvPr id="4" name="Slide Number Placeholder 3">
+            <a:extLst>
+              <a:ext uri="{FF2B5EF4-FFF2-40B4-BE49-F238E27FC236}">
+                <a16:creationId xmlns:a16="http://schemas.microsoft.com/office/drawing/2014/main" id="{D12428F6-B692-59EB-721A-51F223C670DE}"/>
+              </a:ext>
+            </a:extLst>
+          </p:cNvPr>
+          <p:cNvSpPr>
+            <a:spLocks noGrp="1"/>
+          </p:cNvSpPr>
+          <p:nvPr>
+            <p:ph type="sldNum" sz="quarter" idx="5"/>
+          </p:nvPr>
+        </p:nvSpPr>
+        <p:spPr/>
+        <p:txBody>
+          <a:bodyPr/>
+          <a:lstStyle/>
+          <a:p>
+            <a:fld id="{46699514-027B-49BD-8B49-5054CA40ECF4}" type="slidenum">
+              <a:rPr lang="en-US"/>
+              <a:t>21</a:t>
+            </a:fld>
+            <a:endParaRPr lang="en-US"/>
+          </a:p>
+        </p:txBody>
+      </p:sp>
+    </p:spTree>
+    <p:extLst>
+      <p:ext uri="{BB962C8B-B14F-4D97-AF65-F5344CB8AC3E}">
+        <p14:creationId xmlns:p14="http://schemas.microsoft.com/office/powerpoint/2010/main" val="540613206"/>
+      </p:ext>
+    </p:extLst>
+  </p:cSld>
+  <p:clrMapOvr>
+    <a:masterClrMapping/>
+  </p:clrMapOvr>
+</p:notes>
+</file>
+
+<file path=ppt/notesSlides/notesSlide9.xml><?xml version="1.0" encoding="utf-8"?>
 <p:notes xmlns:a="http://schemas.openxmlformats.org/drawingml/2006/main" xmlns:r="http://schemas.openxmlformats.org/officeDocument/2006/relationships" xmlns:p="http://schemas.openxmlformats.org/presentationml/2006/main">
   <p:cSld>
     <p:spTree>
@@ -4215,202 +5095,10 @@
           <a:bodyPr/>
           <a:lstStyle/>
           <a:p>
-            <a:r>
-              <a:rPr lang="en-US" err="1">
-                <a:ea typeface="Calibri"/>
-                <a:cs typeface="Calibri"/>
-              </a:rPr>
-              <a:t>Milleks</a:t>
-            </a:r>
-            <a:r>
-              <a:rPr lang="en-US">
-                <a:ea typeface="Calibri"/>
-                <a:cs typeface="Calibri"/>
-              </a:rPr>
-              <a:t> </a:t>
-            </a:r>
-            <a:r>
-              <a:rPr lang="en-US" err="1">
-                <a:ea typeface="Calibri"/>
-                <a:cs typeface="Calibri"/>
-              </a:rPr>
-              <a:t>vajalik</a:t>
-            </a:r>
-            <a:r>
-              <a:rPr lang="en-US">
-                <a:ea typeface="Calibri"/>
-                <a:cs typeface="Calibri"/>
-              </a:rPr>
-              <a:t>? - Nii </a:t>
-            </a:r>
-            <a:r>
-              <a:rPr lang="en-US" err="1">
-                <a:ea typeface="Calibri"/>
-                <a:cs typeface="Calibri"/>
-              </a:rPr>
-              <a:t>enda</a:t>
-            </a:r>
-            <a:r>
-              <a:rPr lang="en-US">
-                <a:ea typeface="Calibri"/>
-                <a:cs typeface="Calibri"/>
-              </a:rPr>
-              <a:t> </a:t>
-            </a:r>
-            <a:r>
-              <a:rPr lang="en-US" err="1">
-                <a:ea typeface="Calibri"/>
-                <a:cs typeface="Calibri"/>
-              </a:rPr>
-              <a:t>kui</a:t>
-            </a:r>
-            <a:r>
-              <a:rPr lang="en-US">
-                <a:ea typeface="Calibri"/>
-                <a:cs typeface="Calibri"/>
-              </a:rPr>
-              <a:t> ka </a:t>
-            </a:r>
-            <a:r>
-              <a:rPr lang="en-US" err="1">
-                <a:ea typeface="Calibri"/>
-                <a:cs typeface="Calibri"/>
-              </a:rPr>
-              <a:t>kolleegide</a:t>
-            </a:r>
-            <a:r>
-              <a:rPr lang="en-US">
-                <a:ea typeface="Calibri"/>
-                <a:cs typeface="Calibri"/>
-              </a:rPr>
-              <a:t> </a:t>
-            </a:r>
-            <a:r>
-              <a:rPr lang="en-US" err="1">
-                <a:ea typeface="Calibri"/>
-                <a:cs typeface="Calibri"/>
-              </a:rPr>
-              <a:t>jaoks</a:t>
-            </a:r>
-            <a:r>
-              <a:rPr lang="en-US">
-                <a:ea typeface="Calibri"/>
-                <a:cs typeface="Calibri"/>
-              </a:rPr>
-              <a:t> </a:t>
-            </a:r>
-            <a:r>
-              <a:rPr lang="en-US" err="1">
-                <a:ea typeface="Calibri"/>
-                <a:cs typeface="Calibri"/>
-              </a:rPr>
-              <a:t>kirjeldamine</a:t>
-            </a:r>
-            <a:r>
-              <a:rPr lang="en-US">
-                <a:ea typeface="Calibri"/>
-                <a:cs typeface="Calibri"/>
-              </a:rPr>
-              <a:t>, </a:t>
-            </a:r>
-            <a:r>
-              <a:rPr lang="en-US" err="1">
-                <a:ea typeface="Calibri"/>
-                <a:cs typeface="Calibri"/>
-              </a:rPr>
-              <a:t>teada</a:t>
-            </a:r>
-            <a:r>
-              <a:rPr lang="en-US">
-                <a:ea typeface="Calibri"/>
-                <a:cs typeface="Calibri"/>
-              </a:rPr>
-              <a:t>, et </a:t>
-            </a:r>
-            <a:r>
-              <a:rPr lang="en-US" err="1">
-                <a:ea typeface="Calibri"/>
-                <a:cs typeface="Calibri"/>
-              </a:rPr>
-              <a:t>miks</a:t>
-            </a:r>
-            <a:r>
-              <a:rPr lang="en-US">
-                <a:ea typeface="Calibri"/>
-                <a:cs typeface="Calibri"/>
-              </a:rPr>
-              <a:t> ja </a:t>
-            </a:r>
-            <a:r>
-              <a:rPr lang="en-US" err="1">
-                <a:ea typeface="Calibri"/>
-                <a:cs typeface="Calibri"/>
-              </a:rPr>
-              <a:t>kuidas</a:t>
-            </a:r>
-            <a:r>
-              <a:rPr lang="en-US">
-                <a:ea typeface="Calibri"/>
-                <a:cs typeface="Calibri"/>
-              </a:rPr>
-              <a:t> </a:t>
-            </a:r>
-            <a:r>
-              <a:rPr lang="en-US" err="1">
-                <a:ea typeface="Calibri"/>
-                <a:cs typeface="Calibri"/>
-              </a:rPr>
-              <a:t>mingeid</a:t>
-            </a:r>
-            <a:r>
-              <a:rPr lang="en-US">
-                <a:ea typeface="Calibri"/>
-                <a:cs typeface="Calibri"/>
-              </a:rPr>
-              <a:t> </a:t>
-            </a:r>
-            <a:r>
-              <a:rPr lang="en-US" err="1">
-                <a:ea typeface="Calibri"/>
-                <a:cs typeface="Calibri"/>
-              </a:rPr>
-              <a:t>otsuseid</a:t>
-            </a:r>
-            <a:r>
-              <a:rPr lang="en-US">
-                <a:ea typeface="Calibri"/>
-                <a:cs typeface="Calibri"/>
-              </a:rPr>
-              <a:t> ja </a:t>
-            </a:r>
-            <a:r>
-              <a:rPr lang="en-US" err="1">
-                <a:ea typeface="Calibri"/>
-                <a:cs typeface="Calibri"/>
-              </a:rPr>
-              <a:t>muutusi</a:t>
-            </a:r>
-            <a:r>
-              <a:rPr lang="en-US">
-                <a:ea typeface="Calibri"/>
-                <a:cs typeface="Calibri"/>
-              </a:rPr>
-              <a:t> on </a:t>
-            </a:r>
-            <a:r>
-              <a:rPr lang="en-US" err="1">
-                <a:ea typeface="Calibri"/>
-                <a:cs typeface="Calibri"/>
-              </a:rPr>
-              <a:t>tehtud</a:t>
-            </a:r>
-            <a:r>
-              <a:rPr lang="en-US">
-                <a:ea typeface="Calibri"/>
-                <a:cs typeface="Calibri"/>
-              </a:rPr>
-              <a:t>.</a:t>
-            </a:r>
+            <a:endParaRPr lang="en-US" dirty="0">
+              <a:ea typeface="Calibri"/>
+              <a:cs typeface="Calibri"/>
+            </a:endParaRPr>
           </a:p>
         </p:txBody>
       </p:sp>
@@ -4447,2599 +5135,6 @@
     <p:extLst>
       <p:ext uri="{BB962C8B-B14F-4D97-AF65-F5344CB8AC3E}">
         <p14:creationId xmlns:p14="http://schemas.microsoft.com/office/powerpoint/2010/main" val="3918429573"/>
-      </p:ext>
-    </p:extLst>
-  </p:cSld>
-  <p:clrMapOvr>
-    <a:masterClrMapping/>
-  </p:clrMapOvr>
-</p:notes>
-</file>
-
-<file path=ppt/notesSlides/notesSlide2.xml><?xml version="1.0" encoding="utf-8"?>
-<p:notes xmlns:a="http://schemas.openxmlformats.org/drawingml/2006/main" xmlns:r="http://schemas.openxmlformats.org/officeDocument/2006/relationships" xmlns:p="http://schemas.openxmlformats.org/presentationml/2006/main">
-  <p:cSld>
-    <p:spTree>
-      <p:nvGrpSpPr>
-        <p:cNvPr id="1" name=""/>
-        <p:cNvGrpSpPr/>
-        <p:nvPr/>
-      </p:nvGrpSpPr>
-      <p:grpSpPr>
-        <a:xfrm>
-          <a:off x="0" y="0"/>
-          <a:ext cx="0" cy="0"/>
-          <a:chOff x="0" y="0"/>
-          <a:chExt cx="0" cy="0"/>
-        </a:xfrm>
-      </p:grpSpPr>
-      <p:sp>
-        <p:nvSpPr>
-          <p:cNvPr id="2" name="Slide Image Placeholder 1"/>
-          <p:cNvSpPr>
-            <a:spLocks noGrp="1" noRot="1" noChangeAspect="1"/>
-          </p:cNvSpPr>
-          <p:nvPr>
-            <p:ph type="sldImg"/>
-          </p:nvPr>
-        </p:nvSpPr>
-        <p:spPr/>
-      </p:sp>
-      <p:sp>
-        <p:nvSpPr>
-          <p:cNvPr id="3" name="Notes Placeholder 2"/>
-          <p:cNvSpPr>
-            <a:spLocks noGrp="1"/>
-          </p:cNvSpPr>
-          <p:nvPr>
-            <p:ph type="body" idx="1"/>
-          </p:nvPr>
-        </p:nvSpPr>
-        <p:spPr/>
-        <p:txBody>
-          <a:bodyPr/>
-          <a:lstStyle/>
-          <a:p>
-            <a:r>
-              <a:rPr lang="en-US" err="1">
-                <a:ea typeface="Calibri"/>
-                <a:cs typeface="Calibri"/>
-              </a:rPr>
-              <a:t>Teiste</a:t>
-            </a:r>
-            <a:r>
-              <a:rPr lang="en-US">
-                <a:ea typeface="Calibri"/>
-                <a:cs typeface="Calibri"/>
-              </a:rPr>
-              <a:t> </a:t>
-            </a:r>
-            <a:r>
-              <a:rPr lang="en-US" err="1">
-                <a:ea typeface="Calibri"/>
-                <a:cs typeface="Calibri"/>
-              </a:rPr>
-              <a:t>organisatsioonide</a:t>
-            </a:r>
-            <a:r>
-              <a:rPr lang="en-US">
-                <a:ea typeface="Calibri"/>
-                <a:cs typeface="Calibri"/>
-              </a:rPr>
-              <a:t> </a:t>
-            </a:r>
-            <a:r>
-              <a:rPr lang="en-US" err="1">
-                <a:ea typeface="Calibri"/>
-                <a:cs typeface="Calibri"/>
-              </a:rPr>
-              <a:t>poolt</a:t>
-            </a:r>
-            <a:r>
-              <a:rPr lang="en-US">
-                <a:ea typeface="Calibri"/>
-                <a:cs typeface="Calibri"/>
-              </a:rPr>
-              <a:t> </a:t>
-            </a:r>
-            <a:r>
-              <a:rPr lang="en-US" err="1">
-                <a:ea typeface="Calibri"/>
-                <a:cs typeface="Calibri"/>
-              </a:rPr>
-              <a:t>kogutud</a:t>
-            </a:r>
-            <a:r>
-              <a:rPr lang="en-US">
-                <a:ea typeface="Calibri"/>
-                <a:cs typeface="Calibri"/>
-              </a:rPr>
-              <a:t> </a:t>
-            </a:r>
-            <a:r>
-              <a:rPr lang="en-US" err="1">
-                <a:ea typeface="Calibri"/>
-                <a:cs typeface="Calibri"/>
-              </a:rPr>
-              <a:t>andmete</a:t>
-            </a:r>
-            <a:r>
-              <a:rPr lang="en-US">
-                <a:ea typeface="Calibri"/>
-                <a:cs typeface="Calibri"/>
-              </a:rPr>
-              <a:t> </a:t>
-            </a:r>
-            <a:r>
-              <a:rPr lang="en-US" err="1">
-                <a:ea typeface="Calibri"/>
-                <a:cs typeface="Calibri"/>
-              </a:rPr>
-              <a:t>puhul</a:t>
-            </a:r>
-            <a:r>
-              <a:rPr lang="en-US">
-                <a:ea typeface="Calibri"/>
-                <a:cs typeface="Calibri"/>
-              </a:rPr>
-              <a:t> </a:t>
-            </a:r>
-            <a:r>
-              <a:rPr lang="en-US" err="1">
-                <a:ea typeface="Calibri"/>
-                <a:cs typeface="Calibri"/>
-              </a:rPr>
-              <a:t>tuleb</a:t>
-            </a:r>
-            <a:r>
-              <a:rPr lang="en-US">
-                <a:ea typeface="Calibri"/>
-                <a:cs typeface="Calibri"/>
-              </a:rPr>
-              <a:t> </a:t>
-            </a:r>
-            <a:br>
-              <a:rPr lang="en-US">
-                <a:cs typeface="+mn-lt"/>
-              </a:rPr>
-            </a:br>
-            <a:r>
-              <a:rPr lang="en-US" err="1">
-                <a:ea typeface="Calibri"/>
-                <a:cs typeface="Calibri"/>
-              </a:rPr>
-              <a:t>Sideandmed</a:t>
-            </a:r>
-            <a:r>
-              <a:rPr lang="en-US">
-                <a:ea typeface="Calibri"/>
-                <a:cs typeface="Calibri"/>
-              </a:rPr>
-              <a:t>, </a:t>
-            </a:r>
-            <a:r>
-              <a:rPr lang="en-US" err="1">
-                <a:ea typeface="Calibri"/>
-                <a:cs typeface="Calibri"/>
-              </a:rPr>
-              <a:t>asukohaandmed</a:t>
-            </a:r>
-            <a:br>
-              <a:rPr lang="en-US">
-                <a:cs typeface="+mn-lt"/>
-              </a:rPr>
-            </a:br>
-            <a:r>
-              <a:rPr lang="en-US" err="1">
-                <a:ea typeface="Calibri"/>
-                <a:cs typeface="Calibri"/>
-              </a:rPr>
-              <a:t>Andmete</a:t>
-            </a:r>
-            <a:r>
-              <a:rPr lang="en-US">
-                <a:ea typeface="Calibri"/>
-                <a:cs typeface="Calibri"/>
-              </a:rPr>
-              <a:t> </a:t>
-            </a:r>
-            <a:r>
-              <a:rPr lang="en-US" err="1">
-                <a:ea typeface="Calibri"/>
-                <a:cs typeface="Calibri"/>
-              </a:rPr>
-              <a:t>liigid</a:t>
-            </a:r>
-            <a:r>
-              <a:rPr lang="en-US">
-                <a:ea typeface="Calibri"/>
-                <a:cs typeface="Calibri"/>
-              </a:rPr>
-              <a:t> – </a:t>
-            </a:r>
-            <a:r>
-              <a:rPr lang="en-US" err="1">
-                <a:ea typeface="Calibri"/>
-                <a:cs typeface="Calibri"/>
-              </a:rPr>
-              <a:t>teenuse</a:t>
-            </a:r>
-            <a:r>
-              <a:rPr lang="en-US">
-                <a:ea typeface="Calibri"/>
-                <a:cs typeface="Calibri"/>
-              </a:rPr>
-              <a:t> </a:t>
-            </a:r>
-            <a:r>
-              <a:rPr lang="en-US" err="1">
-                <a:ea typeface="Calibri"/>
-                <a:cs typeface="Calibri"/>
-              </a:rPr>
-              <a:t>osutamine</a:t>
-            </a:r>
-            <a:r>
-              <a:rPr lang="en-US">
-                <a:ea typeface="Calibri"/>
-                <a:cs typeface="Calibri"/>
-              </a:rPr>
-              <a:t>, </a:t>
-            </a:r>
-            <a:r>
-              <a:rPr lang="en-US" err="1">
-                <a:ea typeface="Calibri"/>
-                <a:cs typeface="Calibri"/>
-              </a:rPr>
-              <a:t>isikuandmed</a:t>
-            </a:r>
-            <a:r>
-              <a:rPr lang="en-US">
-                <a:ea typeface="Calibri"/>
-                <a:cs typeface="Calibri"/>
-              </a:rPr>
-              <a:t>, </a:t>
-            </a:r>
-            <a:r>
-              <a:rPr lang="en-US" err="1">
-                <a:ea typeface="Calibri"/>
-                <a:cs typeface="Calibri"/>
-              </a:rPr>
-              <a:t>digikeskkondades</a:t>
-            </a:r>
-            <a:r>
-              <a:rPr lang="en-US">
-                <a:ea typeface="Calibri"/>
-                <a:cs typeface="Calibri"/>
-              </a:rPr>
-              <a:t> </a:t>
-            </a:r>
-            <a:r>
-              <a:rPr lang="en-US" err="1">
-                <a:ea typeface="Calibri"/>
-                <a:cs typeface="Calibri"/>
-              </a:rPr>
-              <a:t>tekivad</a:t>
-            </a:r>
-            <a:r>
-              <a:rPr lang="en-US">
-                <a:ea typeface="Calibri"/>
-                <a:cs typeface="Calibri"/>
-              </a:rPr>
-              <a:t> </a:t>
-            </a:r>
-            <a:r>
-              <a:rPr lang="en-US" err="1">
-                <a:ea typeface="Calibri"/>
-                <a:cs typeface="Calibri"/>
-              </a:rPr>
-              <a:t>andmed</a:t>
-            </a:r>
-            <a:r>
-              <a:rPr lang="en-US">
-                <a:ea typeface="Calibri"/>
-                <a:cs typeface="Calibri"/>
-              </a:rPr>
-              <a:t>, </a:t>
-            </a:r>
-            <a:r>
-              <a:rPr lang="en-US" err="1">
-                <a:ea typeface="Calibri"/>
-                <a:cs typeface="Calibri"/>
-              </a:rPr>
-              <a:t>analoogandmed</a:t>
-            </a:r>
-            <a:r>
-              <a:rPr lang="en-US">
-                <a:ea typeface="Calibri"/>
-                <a:cs typeface="Calibri"/>
-              </a:rPr>
-              <a:t> (</a:t>
-            </a:r>
-            <a:r>
-              <a:rPr lang="en-US" err="1">
-                <a:ea typeface="Calibri"/>
-                <a:cs typeface="Calibri"/>
-              </a:rPr>
-              <a:t>paberile</a:t>
-            </a:r>
-            <a:r>
-              <a:rPr lang="en-US">
-                <a:ea typeface="Calibri"/>
-                <a:cs typeface="Calibri"/>
-              </a:rPr>
-              <a:t> </a:t>
-            </a:r>
-            <a:r>
-              <a:rPr lang="en-US" err="1">
-                <a:ea typeface="Calibri"/>
-                <a:cs typeface="Calibri"/>
-              </a:rPr>
-              <a:t>märgitud</a:t>
-            </a:r>
-            <a:r>
-              <a:rPr lang="en-US">
-                <a:ea typeface="Calibri"/>
-                <a:cs typeface="Calibri"/>
-              </a:rPr>
-              <a:t> </a:t>
-            </a:r>
-            <a:r>
-              <a:rPr lang="en-US" err="1">
-                <a:ea typeface="Calibri"/>
-                <a:cs typeface="Calibri"/>
-              </a:rPr>
-              <a:t>andmed</a:t>
-            </a:r>
-            <a:r>
-              <a:rPr lang="en-US">
-                <a:ea typeface="Calibri"/>
-                <a:cs typeface="Calibri"/>
-              </a:rPr>
-              <a:t>) - </a:t>
-            </a:r>
-            <a:r>
-              <a:rPr lang="en-US" err="1">
-                <a:ea typeface="Calibri"/>
-                <a:cs typeface="Calibri"/>
-              </a:rPr>
-              <a:t>hilisem</a:t>
-            </a:r>
-            <a:r>
-              <a:rPr lang="en-US">
-                <a:ea typeface="Calibri"/>
-                <a:cs typeface="Calibri"/>
-              </a:rPr>
-              <a:t> </a:t>
-            </a:r>
-            <a:r>
-              <a:rPr lang="en-US" err="1">
-                <a:ea typeface="Calibri"/>
-                <a:cs typeface="Calibri"/>
-              </a:rPr>
-              <a:t>digitaliseerimine</a:t>
-            </a:r>
-            <a:r>
-              <a:rPr lang="en-US">
-                <a:ea typeface="Calibri"/>
-                <a:cs typeface="Calibri"/>
-              </a:rPr>
-              <a:t>.</a:t>
-            </a:r>
-          </a:p>
-        </p:txBody>
-      </p:sp>
-      <p:sp>
-        <p:nvSpPr>
-          <p:cNvPr id="4" name="Slide Number Placeholder 3"/>
-          <p:cNvSpPr>
-            <a:spLocks noGrp="1"/>
-          </p:cNvSpPr>
-          <p:nvPr>
-            <p:ph type="sldNum" sz="quarter" idx="5"/>
-          </p:nvPr>
-        </p:nvSpPr>
-        <p:spPr/>
-        <p:txBody>
-          <a:bodyPr/>
-          <a:lstStyle/>
-          <a:p>
-            <a:fld id="{46699514-027B-49BD-8B49-5054CA40ECF4}" type="slidenum">
-              <a:rPr lang="en-US"/>
-              <a:t>3</a:t>
-            </a:fld>
-            <a:endParaRPr lang="en-US"/>
-          </a:p>
-        </p:txBody>
-      </p:sp>
-    </p:spTree>
-    <p:extLst>
-      <p:ext uri="{BB962C8B-B14F-4D97-AF65-F5344CB8AC3E}">
-        <p14:creationId xmlns:p14="http://schemas.microsoft.com/office/powerpoint/2010/main" val="1488054612"/>
-      </p:ext>
-    </p:extLst>
-  </p:cSld>
-  <p:clrMapOvr>
-    <a:masterClrMapping/>
-  </p:clrMapOvr>
-</p:notes>
-</file>
-
-<file path=ppt/notesSlides/notesSlide3.xml><?xml version="1.0" encoding="utf-8"?>
-<p:notes xmlns:a="http://schemas.openxmlformats.org/drawingml/2006/main" xmlns:r="http://schemas.openxmlformats.org/officeDocument/2006/relationships" xmlns:p="http://schemas.openxmlformats.org/presentationml/2006/main">
-  <p:cSld>
-    <p:spTree>
-      <p:nvGrpSpPr>
-        <p:cNvPr id="1" name=""/>
-        <p:cNvGrpSpPr/>
-        <p:nvPr/>
-      </p:nvGrpSpPr>
-      <p:grpSpPr>
-        <a:xfrm>
-          <a:off x="0" y="0"/>
-          <a:ext cx="0" cy="0"/>
-          <a:chOff x="0" y="0"/>
-          <a:chExt cx="0" cy="0"/>
-        </a:xfrm>
-      </p:grpSpPr>
-      <p:sp>
-        <p:nvSpPr>
-          <p:cNvPr id="2" name="Slide Image Placeholder 1"/>
-          <p:cNvSpPr>
-            <a:spLocks noGrp="1" noRot="1" noChangeAspect="1"/>
-          </p:cNvSpPr>
-          <p:nvPr>
-            <p:ph type="sldImg"/>
-          </p:nvPr>
-        </p:nvSpPr>
-        <p:spPr/>
-      </p:sp>
-      <p:sp>
-        <p:nvSpPr>
-          <p:cNvPr id="3" name="Notes Placeholder 2"/>
-          <p:cNvSpPr>
-            <a:spLocks noGrp="1"/>
-          </p:cNvSpPr>
-          <p:nvPr>
-            <p:ph type="body" idx="1"/>
-          </p:nvPr>
-        </p:nvSpPr>
-        <p:spPr/>
-        <p:txBody>
-          <a:bodyPr/>
-          <a:lstStyle/>
-          <a:p>
-            <a:r>
-              <a:rPr lang="en-US" err="1">
-                <a:ea typeface="Calibri"/>
-                <a:cs typeface="Calibri"/>
-              </a:rPr>
-              <a:t>Varasemalt</a:t>
-            </a:r>
-            <a:r>
-              <a:rPr lang="en-US">
-                <a:ea typeface="Calibri"/>
-                <a:cs typeface="Calibri"/>
-              </a:rPr>
-              <a:t> </a:t>
-            </a:r>
-            <a:r>
-              <a:rPr lang="en-US" err="1">
-                <a:ea typeface="Calibri"/>
-                <a:cs typeface="Calibri"/>
-              </a:rPr>
-              <a:t>mustad</a:t>
-            </a:r>
-            <a:r>
-              <a:rPr lang="en-US">
-                <a:ea typeface="Calibri"/>
-                <a:cs typeface="Calibri"/>
-              </a:rPr>
-              <a:t> </a:t>
-            </a:r>
-            <a:r>
-              <a:rPr lang="en-US" err="1">
-                <a:ea typeface="Calibri"/>
-                <a:cs typeface="Calibri"/>
-              </a:rPr>
-              <a:t>andmed</a:t>
-            </a:r>
-            <a:r>
-              <a:rPr lang="en-US">
-                <a:ea typeface="Calibri"/>
-                <a:cs typeface="Calibri"/>
-              </a:rPr>
-              <a:t> ja </a:t>
-            </a:r>
-            <a:r>
-              <a:rPr lang="en-US" err="1">
-                <a:ea typeface="Calibri"/>
-                <a:cs typeface="Calibri"/>
-              </a:rPr>
-              <a:t>nende</a:t>
-            </a:r>
-            <a:r>
-              <a:rPr lang="en-US">
-                <a:ea typeface="Calibri"/>
-                <a:cs typeface="Calibri"/>
-              </a:rPr>
-              <a:t> </a:t>
-            </a:r>
-            <a:r>
-              <a:rPr lang="en-US" err="1">
-                <a:ea typeface="Calibri"/>
-                <a:cs typeface="Calibri"/>
-              </a:rPr>
-              <a:t>pinnalt</a:t>
-            </a:r>
-            <a:r>
-              <a:rPr lang="en-US">
-                <a:ea typeface="Calibri"/>
-                <a:cs typeface="Calibri"/>
-              </a:rPr>
-              <a:t> </a:t>
-            </a:r>
-            <a:r>
-              <a:rPr lang="en-US" err="1">
-                <a:ea typeface="Calibri"/>
-                <a:cs typeface="Calibri"/>
-              </a:rPr>
-              <a:t>näited</a:t>
-            </a:r>
-            <a:r>
-              <a:rPr lang="en-US">
-                <a:ea typeface="Calibri"/>
-                <a:cs typeface="Calibri"/>
-              </a:rPr>
-              <a:t> </a:t>
-            </a:r>
-            <a:r>
-              <a:rPr lang="en-US" err="1">
-                <a:ea typeface="Calibri"/>
-                <a:cs typeface="Calibri"/>
-              </a:rPr>
-              <a:t>siia</a:t>
-            </a:r>
-            <a:r>
-              <a:rPr lang="en-US">
-                <a:ea typeface="Calibri"/>
-                <a:cs typeface="Calibri"/>
-              </a:rPr>
-              <a:t>.</a:t>
-            </a:r>
-          </a:p>
-        </p:txBody>
-      </p:sp>
-      <p:sp>
-        <p:nvSpPr>
-          <p:cNvPr id="4" name="Slide Number Placeholder 3"/>
-          <p:cNvSpPr>
-            <a:spLocks noGrp="1"/>
-          </p:cNvSpPr>
-          <p:nvPr>
-            <p:ph type="sldNum" sz="quarter" idx="5"/>
-          </p:nvPr>
-        </p:nvSpPr>
-        <p:spPr/>
-        <p:txBody>
-          <a:bodyPr/>
-          <a:lstStyle/>
-          <a:p>
-            <a:fld id="{46699514-027B-49BD-8B49-5054CA40ECF4}" type="slidenum">
-              <a:rPr lang="en-US"/>
-              <a:t>5</a:t>
-            </a:fld>
-            <a:endParaRPr lang="en-US"/>
-          </a:p>
-        </p:txBody>
-      </p:sp>
-    </p:spTree>
-    <p:extLst>
-      <p:ext uri="{BB962C8B-B14F-4D97-AF65-F5344CB8AC3E}">
-        <p14:creationId xmlns:p14="http://schemas.microsoft.com/office/powerpoint/2010/main" val="2406251908"/>
-      </p:ext>
-    </p:extLst>
-  </p:cSld>
-  <p:clrMapOvr>
-    <a:masterClrMapping/>
-  </p:clrMapOvr>
-</p:notes>
-</file>
-
-<file path=ppt/notesSlides/notesSlide4.xml><?xml version="1.0" encoding="utf-8"?>
-<p:notes xmlns:a="http://schemas.openxmlformats.org/drawingml/2006/main" xmlns:r="http://schemas.openxmlformats.org/officeDocument/2006/relationships" xmlns:p="http://schemas.openxmlformats.org/presentationml/2006/main">
-  <p:cSld>
-    <p:spTree>
-      <p:nvGrpSpPr>
-        <p:cNvPr id="1" name="">
-          <a:extLst>
-            <a:ext uri="{FF2B5EF4-FFF2-40B4-BE49-F238E27FC236}">
-              <a16:creationId xmlns:a16="http://schemas.microsoft.com/office/drawing/2014/main" id="{98D12C03-5C01-8B8A-3206-8FE48E26242B}"/>
-            </a:ext>
-          </a:extLst>
-        </p:cNvPr>
-        <p:cNvGrpSpPr/>
-        <p:nvPr/>
-      </p:nvGrpSpPr>
-      <p:grpSpPr>
-        <a:xfrm>
-          <a:off x="0" y="0"/>
-          <a:ext cx="0" cy="0"/>
-          <a:chOff x="0" y="0"/>
-          <a:chExt cx="0" cy="0"/>
-        </a:xfrm>
-      </p:grpSpPr>
-      <p:sp>
-        <p:nvSpPr>
-          <p:cNvPr id="2" name="Slide Image Placeholder 1">
-            <a:extLst>
-              <a:ext uri="{FF2B5EF4-FFF2-40B4-BE49-F238E27FC236}">
-                <a16:creationId xmlns:a16="http://schemas.microsoft.com/office/drawing/2014/main" id="{9BA5648C-3F4F-BBFD-730E-DC70F1FB6939}"/>
-              </a:ext>
-            </a:extLst>
-          </p:cNvPr>
-          <p:cNvSpPr>
-            <a:spLocks noGrp="1" noRot="1" noChangeAspect="1"/>
-          </p:cNvSpPr>
-          <p:nvPr>
-            <p:ph type="sldImg"/>
-          </p:nvPr>
-        </p:nvSpPr>
-        <p:spPr/>
-      </p:sp>
-      <p:sp>
-        <p:nvSpPr>
-          <p:cNvPr id="3" name="Notes Placeholder 2">
-            <a:extLst>
-              <a:ext uri="{FF2B5EF4-FFF2-40B4-BE49-F238E27FC236}">
-                <a16:creationId xmlns:a16="http://schemas.microsoft.com/office/drawing/2014/main" id="{7D0A1949-BD19-3CB6-4A3A-7777248EE68A}"/>
-              </a:ext>
-            </a:extLst>
-          </p:cNvPr>
-          <p:cNvSpPr>
-            <a:spLocks noGrp="1"/>
-          </p:cNvSpPr>
-          <p:nvPr>
-            <p:ph type="body" idx="1"/>
-          </p:nvPr>
-        </p:nvSpPr>
-        <p:spPr/>
-        <p:txBody>
-          <a:bodyPr/>
-          <a:lstStyle/>
-          <a:p>
-            <a:r>
-              <a:rPr lang="en-US" err="1">
-                <a:ea typeface="Calibri"/>
-                <a:cs typeface="Calibri"/>
-              </a:rPr>
-              <a:t>Faktitabel</a:t>
-            </a:r>
-            <a:r>
-              <a:rPr lang="en-US">
-                <a:ea typeface="Calibri"/>
-                <a:cs typeface="Calibri"/>
-              </a:rPr>
-              <a:t> on </a:t>
-            </a:r>
-            <a:r>
-              <a:rPr lang="en-US" err="1">
-                <a:ea typeface="Calibri"/>
-                <a:cs typeface="Calibri"/>
-              </a:rPr>
-              <a:t>sündmuspõhine</a:t>
-            </a:r>
-            <a:r>
-              <a:rPr lang="en-US">
-                <a:ea typeface="Calibri"/>
-                <a:cs typeface="Calibri"/>
-              </a:rPr>
-              <a:t>, </a:t>
-            </a:r>
-            <a:r>
-              <a:rPr lang="en-US" err="1">
-                <a:ea typeface="Calibri"/>
-                <a:cs typeface="Calibri"/>
-              </a:rPr>
-              <a:t>näiteks</a:t>
-            </a:r>
-            <a:r>
-              <a:rPr lang="en-US">
-                <a:ea typeface="Calibri"/>
-                <a:cs typeface="Calibri"/>
-              </a:rPr>
-              <a:t> </a:t>
-            </a:r>
-            <a:r>
-              <a:rPr lang="en-US" err="1">
-                <a:ea typeface="Calibri"/>
-                <a:cs typeface="Calibri"/>
-              </a:rPr>
-              <a:t>müük</a:t>
-            </a:r>
-            <a:r>
-              <a:rPr lang="en-US">
-                <a:ea typeface="Calibri"/>
-                <a:cs typeface="Calibri"/>
-              </a:rPr>
-              <a:t>. </a:t>
-            </a:r>
-            <a:r>
-              <a:rPr lang="en-US" err="1">
-                <a:ea typeface="Calibri"/>
-                <a:cs typeface="Calibri"/>
-              </a:rPr>
-              <a:t>Dimensioonid</a:t>
-            </a:r>
-            <a:r>
-              <a:rPr lang="en-US">
-                <a:ea typeface="Calibri"/>
-                <a:cs typeface="Calibri"/>
-              </a:rPr>
-              <a:t> on </a:t>
-            </a:r>
-            <a:r>
-              <a:rPr lang="en-US" err="1">
-                <a:ea typeface="Calibri"/>
-                <a:cs typeface="Calibri"/>
-              </a:rPr>
-              <a:t>kirjeldav</a:t>
-            </a:r>
-            <a:r>
-              <a:rPr lang="en-US">
-                <a:ea typeface="Calibri"/>
-                <a:cs typeface="Calibri"/>
-              </a:rPr>
-              <a:t> info, </a:t>
-            </a:r>
-            <a:r>
-              <a:rPr lang="en-US" err="1">
-                <a:ea typeface="Calibri"/>
-                <a:cs typeface="Calibri"/>
-              </a:rPr>
-              <a:t>nt</a:t>
-            </a:r>
-            <a:r>
-              <a:rPr lang="en-US">
-                <a:ea typeface="Calibri"/>
-                <a:cs typeface="Calibri"/>
-              </a:rPr>
-              <a:t> </a:t>
-            </a:r>
-            <a:r>
-              <a:rPr lang="en-US" err="1">
-                <a:ea typeface="Calibri"/>
-                <a:cs typeface="Calibri"/>
-              </a:rPr>
-              <a:t>klient</a:t>
-            </a:r>
-            <a:r>
-              <a:rPr lang="en-US">
-                <a:ea typeface="Calibri"/>
-                <a:cs typeface="Calibri"/>
-              </a:rPr>
-              <a:t>, </a:t>
-            </a:r>
-            <a:r>
-              <a:rPr lang="en-US" err="1">
-                <a:ea typeface="Calibri"/>
-                <a:cs typeface="Calibri"/>
-              </a:rPr>
-              <a:t>müügiesindaja</a:t>
-            </a:r>
-            <a:r>
-              <a:rPr lang="en-US">
-                <a:ea typeface="Calibri"/>
-                <a:cs typeface="Calibri"/>
-              </a:rPr>
-              <a:t>. </a:t>
-            </a:r>
-            <a:r>
-              <a:rPr lang="en-US" err="1">
-                <a:ea typeface="Calibri"/>
-                <a:cs typeface="Calibri"/>
-              </a:rPr>
-              <a:t>Sellisel</a:t>
-            </a:r>
-            <a:r>
-              <a:rPr lang="en-US">
-                <a:ea typeface="Calibri"/>
-                <a:cs typeface="Calibri"/>
-              </a:rPr>
-              <a:t> </a:t>
-            </a:r>
-            <a:r>
-              <a:rPr lang="en-US" err="1">
-                <a:ea typeface="Calibri"/>
-                <a:cs typeface="Calibri"/>
-              </a:rPr>
-              <a:t>kujul</a:t>
-            </a:r>
-            <a:r>
-              <a:rPr lang="en-US">
-                <a:ea typeface="Calibri"/>
-                <a:cs typeface="Calibri"/>
-              </a:rPr>
-              <a:t> </a:t>
-            </a:r>
-            <a:r>
-              <a:rPr lang="en-US" err="1">
-                <a:ea typeface="Calibri"/>
-                <a:cs typeface="Calibri"/>
-              </a:rPr>
-              <a:t>andmemudel</a:t>
-            </a:r>
-            <a:r>
-              <a:rPr lang="en-US">
-                <a:ea typeface="Calibri"/>
-                <a:cs typeface="Calibri"/>
-              </a:rPr>
-              <a:t> </a:t>
-            </a:r>
-            <a:r>
-              <a:rPr lang="en-US" err="1">
-                <a:ea typeface="Calibri"/>
-                <a:cs typeface="Calibri"/>
-              </a:rPr>
-              <a:t>võimaldab</a:t>
-            </a:r>
-            <a:r>
-              <a:rPr lang="en-US">
-                <a:ea typeface="Calibri"/>
-                <a:cs typeface="Calibri"/>
-              </a:rPr>
-              <a:t> </a:t>
-            </a:r>
-            <a:r>
-              <a:rPr lang="en-US" err="1">
-                <a:ea typeface="Calibri"/>
-                <a:cs typeface="Calibri"/>
-              </a:rPr>
-              <a:t>hoida</a:t>
-            </a:r>
-            <a:r>
-              <a:rPr lang="en-US">
-                <a:ea typeface="Calibri"/>
-                <a:cs typeface="Calibri"/>
-              </a:rPr>
-              <a:t> </a:t>
-            </a:r>
-            <a:r>
-              <a:rPr lang="en-US" err="1">
-                <a:ea typeface="Calibri"/>
-                <a:cs typeface="Calibri"/>
-              </a:rPr>
-              <a:t>tabelid</a:t>
-            </a:r>
-            <a:r>
-              <a:rPr lang="en-US">
-                <a:ea typeface="Calibri"/>
-                <a:cs typeface="Calibri"/>
-              </a:rPr>
-              <a:t> </a:t>
-            </a:r>
-            <a:r>
-              <a:rPr lang="en-US" err="1">
-                <a:ea typeface="Calibri"/>
-                <a:cs typeface="Calibri"/>
-              </a:rPr>
-              <a:t>väiksemana</a:t>
-            </a:r>
-            <a:r>
-              <a:rPr lang="en-US">
-                <a:ea typeface="Calibri"/>
-                <a:cs typeface="Calibri"/>
-              </a:rPr>
-              <a:t>, </a:t>
-            </a:r>
-            <a:r>
-              <a:rPr lang="en-US" err="1">
-                <a:ea typeface="Calibri"/>
-                <a:cs typeface="Calibri"/>
-              </a:rPr>
-              <a:t>näiteks</a:t>
-            </a:r>
-            <a:r>
-              <a:rPr lang="en-US">
-                <a:ea typeface="Calibri"/>
-                <a:cs typeface="Calibri"/>
-              </a:rPr>
-              <a:t> </a:t>
-            </a:r>
-            <a:r>
-              <a:rPr lang="en-US" err="1">
-                <a:ea typeface="Calibri"/>
-                <a:cs typeface="Calibri"/>
-              </a:rPr>
-              <a:t>ei</a:t>
-            </a:r>
-            <a:r>
-              <a:rPr lang="en-US">
-                <a:ea typeface="Calibri"/>
-                <a:cs typeface="Calibri"/>
-              </a:rPr>
-              <a:t> pea </a:t>
-            </a:r>
-            <a:r>
-              <a:rPr lang="en-US" err="1">
-                <a:ea typeface="Calibri"/>
-                <a:cs typeface="Calibri"/>
-              </a:rPr>
-              <a:t>faktitabelis</a:t>
-            </a:r>
-            <a:r>
-              <a:rPr lang="en-US">
-                <a:ea typeface="Calibri"/>
-                <a:cs typeface="Calibri"/>
-              </a:rPr>
-              <a:t> </a:t>
-            </a:r>
-            <a:r>
-              <a:rPr lang="en-US" err="1">
-                <a:ea typeface="Calibri"/>
-                <a:cs typeface="Calibri"/>
-              </a:rPr>
-              <a:t>tooma</a:t>
-            </a:r>
-            <a:r>
-              <a:rPr lang="en-US">
-                <a:ea typeface="Calibri"/>
-                <a:cs typeface="Calibri"/>
-              </a:rPr>
-              <a:t> </a:t>
-            </a:r>
-            <a:r>
-              <a:rPr lang="en-US" err="1">
-                <a:ea typeface="Calibri"/>
-                <a:cs typeface="Calibri"/>
-              </a:rPr>
-              <a:t>välja</a:t>
-            </a:r>
-            <a:r>
-              <a:rPr lang="en-US">
-                <a:ea typeface="Calibri"/>
-                <a:cs typeface="Calibri"/>
-              </a:rPr>
-              <a:t> </a:t>
-            </a:r>
-            <a:r>
-              <a:rPr lang="en-US" err="1">
-                <a:ea typeface="Calibri"/>
-                <a:cs typeface="Calibri"/>
-              </a:rPr>
-              <a:t>kõiki</a:t>
-            </a:r>
-            <a:r>
-              <a:rPr lang="en-US">
-                <a:ea typeface="Calibri"/>
-                <a:cs typeface="Calibri"/>
-              </a:rPr>
-              <a:t> </a:t>
-            </a:r>
-            <a:r>
-              <a:rPr lang="en-US" err="1">
-                <a:ea typeface="Calibri"/>
-                <a:cs typeface="Calibri"/>
-              </a:rPr>
-              <a:t>andmeid</a:t>
-            </a:r>
-            <a:r>
-              <a:rPr lang="en-US">
-                <a:ea typeface="Calibri"/>
-                <a:cs typeface="Calibri"/>
-              </a:rPr>
-              <a:t> </a:t>
-            </a:r>
-            <a:r>
-              <a:rPr lang="en-US" err="1">
-                <a:ea typeface="Calibri"/>
-                <a:cs typeface="Calibri"/>
-              </a:rPr>
-              <a:t>kliendi</a:t>
-            </a:r>
-            <a:r>
-              <a:rPr lang="en-US">
-                <a:ea typeface="Calibri"/>
-                <a:cs typeface="Calibri"/>
-              </a:rPr>
-              <a:t> </a:t>
-            </a:r>
-            <a:r>
-              <a:rPr lang="en-US" err="1">
-                <a:ea typeface="Calibri"/>
-                <a:cs typeface="Calibri"/>
-              </a:rPr>
-              <a:t>kohta</a:t>
-            </a:r>
-            <a:r>
-              <a:rPr lang="en-US">
-                <a:ea typeface="Calibri"/>
-                <a:cs typeface="Calibri"/>
-              </a:rPr>
-              <a:t>, </a:t>
-            </a:r>
-            <a:r>
-              <a:rPr lang="en-US" err="1">
-                <a:ea typeface="Calibri"/>
-                <a:cs typeface="Calibri"/>
-              </a:rPr>
-              <a:t>vaid</a:t>
-            </a:r>
-            <a:r>
-              <a:rPr lang="en-US">
-                <a:ea typeface="Calibri"/>
-                <a:cs typeface="Calibri"/>
-              </a:rPr>
-              <a:t> </a:t>
-            </a:r>
-            <a:r>
-              <a:rPr lang="en-US" err="1">
-                <a:ea typeface="Calibri"/>
-                <a:cs typeface="Calibri"/>
-              </a:rPr>
-              <a:t>piisab</a:t>
-            </a:r>
-            <a:r>
-              <a:rPr lang="en-US">
-                <a:ea typeface="Calibri"/>
-                <a:cs typeface="Calibri"/>
-              </a:rPr>
-              <a:t> </a:t>
-            </a:r>
-            <a:r>
-              <a:rPr lang="en-US" err="1">
-                <a:ea typeface="Calibri"/>
-                <a:cs typeface="Calibri"/>
-              </a:rPr>
-              <a:t>kliendi</a:t>
-            </a:r>
-            <a:r>
-              <a:rPr lang="en-US">
-                <a:ea typeface="Calibri"/>
-                <a:cs typeface="Calibri"/>
-              </a:rPr>
-              <a:t> id </a:t>
-            </a:r>
-            <a:r>
-              <a:rPr lang="en-US" err="1">
-                <a:ea typeface="Calibri"/>
-                <a:cs typeface="Calibri"/>
-              </a:rPr>
-              <a:t>viitest</a:t>
-            </a:r>
-            <a:r>
-              <a:rPr lang="en-US">
-                <a:ea typeface="Calibri"/>
-                <a:cs typeface="Calibri"/>
-              </a:rPr>
-              <a:t>.</a:t>
-            </a:r>
-          </a:p>
-        </p:txBody>
-      </p:sp>
-      <p:sp>
-        <p:nvSpPr>
-          <p:cNvPr id="4" name="Slide Number Placeholder 3">
-            <a:extLst>
-              <a:ext uri="{FF2B5EF4-FFF2-40B4-BE49-F238E27FC236}">
-                <a16:creationId xmlns:a16="http://schemas.microsoft.com/office/drawing/2014/main" id="{9E939D6F-525D-01A6-895F-9E18CB1350FE}"/>
-              </a:ext>
-            </a:extLst>
-          </p:cNvPr>
-          <p:cNvSpPr>
-            <a:spLocks noGrp="1"/>
-          </p:cNvSpPr>
-          <p:nvPr>
-            <p:ph type="sldNum" sz="quarter" idx="5"/>
-          </p:nvPr>
-        </p:nvSpPr>
-        <p:spPr/>
-        <p:txBody>
-          <a:bodyPr/>
-          <a:lstStyle/>
-          <a:p>
-            <a:fld id="{46699514-027B-49BD-8B49-5054CA40ECF4}" type="slidenum">
-              <a:rPr lang="en-US"/>
-              <a:t>9</a:t>
-            </a:fld>
-            <a:endParaRPr lang="en-US"/>
-          </a:p>
-        </p:txBody>
-      </p:sp>
-    </p:spTree>
-    <p:extLst>
-      <p:ext uri="{BB962C8B-B14F-4D97-AF65-F5344CB8AC3E}">
-        <p14:creationId xmlns:p14="http://schemas.microsoft.com/office/powerpoint/2010/main" val="4269442484"/>
-      </p:ext>
-    </p:extLst>
-  </p:cSld>
-  <p:clrMapOvr>
-    <a:masterClrMapping/>
-  </p:clrMapOvr>
-</p:notes>
-</file>
-
-<file path=ppt/notesSlides/notesSlide5.xml><?xml version="1.0" encoding="utf-8"?>
-<p:notes xmlns:a="http://schemas.openxmlformats.org/drawingml/2006/main" xmlns:r="http://schemas.openxmlformats.org/officeDocument/2006/relationships" xmlns:p="http://schemas.openxmlformats.org/presentationml/2006/main">
-  <p:cSld>
-    <p:spTree>
-      <p:nvGrpSpPr>
-        <p:cNvPr id="1" name=""/>
-        <p:cNvGrpSpPr/>
-        <p:nvPr/>
-      </p:nvGrpSpPr>
-      <p:grpSpPr>
-        <a:xfrm>
-          <a:off x="0" y="0"/>
-          <a:ext cx="0" cy="0"/>
-          <a:chOff x="0" y="0"/>
-          <a:chExt cx="0" cy="0"/>
-        </a:xfrm>
-      </p:grpSpPr>
-      <p:sp>
-        <p:nvSpPr>
-          <p:cNvPr id="2" name="Slide Image Placeholder 1"/>
-          <p:cNvSpPr>
-            <a:spLocks noGrp="1" noRot="1" noChangeAspect="1"/>
-          </p:cNvSpPr>
-          <p:nvPr>
-            <p:ph type="sldImg"/>
-          </p:nvPr>
-        </p:nvSpPr>
-        <p:spPr/>
-      </p:sp>
-      <p:sp>
-        <p:nvSpPr>
-          <p:cNvPr id="3" name="Notes Placeholder 2"/>
-          <p:cNvSpPr>
-            <a:spLocks noGrp="1"/>
-          </p:cNvSpPr>
-          <p:nvPr>
-            <p:ph type="body" idx="1"/>
-          </p:nvPr>
-        </p:nvSpPr>
-        <p:spPr/>
-        <p:txBody>
-          <a:bodyPr/>
-          <a:lstStyle/>
-          <a:p>
-            <a:r>
-              <a:rPr lang="en-US" err="1">
-                <a:ea typeface="Calibri"/>
-                <a:cs typeface="Calibri"/>
-              </a:rPr>
-              <a:t>Milleks</a:t>
-            </a:r>
-            <a:r>
-              <a:rPr lang="en-US">
-                <a:ea typeface="Calibri"/>
-                <a:cs typeface="Calibri"/>
-              </a:rPr>
-              <a:t> </a:t>
-            </a:r>
-            <a:r>
-              <a:rPr lang="en-US" err="1">
-                <a:ea typeface="Calibri"/>
-                <a:cs typeface="Calibri"/>
-              </a:rPr>
-              <a:t>vajalik</a:t>
-            </a:r>
-            <a:r>
-              <a:rPr lang="en-US">
-                <a:ea typeface="Calibri"/>
-                <a:cs typeface="Calibri"/>
-              </a:rPr>
-              <a:t>? - Nii </a:t>
-            </a:r>
-            <a:r>
-              <a:rPr lang="en-US" err="1">
-                <a:ea typeface="Calibri"/>
-                <a:cs typeface="Calibri"/>
-              </a:rPr>
-              <a:t>enda</a:t>
-            </a:r>
-            <a:r>
-              <a:rPr lang="en-US">
-                <a:ea typeface="Calibri"/>
-                <a:cs typeface="Calibri"/>
-              </a:rPr>
-              <a:t> </a:t>
-            </a:r>
-            <a:r>
-              <a:rPr lang="en-US" err="1">
-                <a:ea typeface="Calibri"/>
-                <a:cs typeface="Calibri"/>
-              </a:rPr>
-              <a:t>kui</a:t>
-            </a:r>
-            <a:r>
-              <a:rPr lang="en-US">
-                <a:ea typeface="Calibri"/>
-                <a:cs typeface="Calibri"/>
-              </a:rPr>
-              <a:t> ka </a:t>
-            </a:r>
-            <a:r>
-              <a:rPr lang="en-US" err="1">
-                <a:ea typeface="Calibri"/>
-                <a:cs typeface="Calibri"/>
-              </a:rPr>
-              <a:t>kolleegide</a:t>
-            </a:r>
-            <a:r>
-              <a:rPr lang="en-US">
-                <a:ea typeface="Calibri"/>
-                <a:cs typeface="Calibri"/>
-              </a:rPr>
-              <a:t> </a:t>
-            </a:r>
-            <a:r>
-              <a:rPr lang="en-US" err="1">
-                <a:ea typeface="Calibri"/>
-                <a:cs typeface="Calibri"/>
-              </a:rPr>
-              <a:t>jaoks</a:t>
-            </a:r>
-            <a:r>
-              <a:rPr lang="en-US">
-                <a:ea typeface="Calibri"/>
-                <a:cs typeface="Calibri"/>
-              </a:rPr>
-              <a:t> </a:t>
-            </a:r>
-            <a:r>
-              <a:rPr lang="en-US" err="1">
-                <a:ea typeface="Calibri"/>
-                <a:cs typeface="Calibri"/>
-              </a:rPr>
-              <a:t>kirjeldamine</a:t>
-            </a:r>
-            <a:r>
-              <a:rPr lang="en-US">
-                <a:ea typeface="Calibri"/>
-                <a:cs typeface="Calibri"/>
-              </a:rPr>
-              <a:t>, </a:t>
-            </a:r>
-            <a:r>
-              <a:rPr lang="en-US" err="1">
-                <a:ea typeface="Calibri"/>
-                <a:cs typeface="Calibri"/>
-              </a:rPr>
-              <a:t>teada</a:t>
-            </a:r>
-            <a:r>
-              <a:rPr lang="en-US">
-                <a:ea typeface="Calibri"/>
-                <a:cs typeface="Calibri"/>
-              </a:rPr>
-              <a:t>, et </a:t>
-            </a:r>
-            <a:r>
-              <a:rPr lang="en-US" err="1">
-                <a:ea typeface="Calibri"/>
-                <a:cs typeface="Calibri"/>
-              </a:rPr>
-              <a:t>miks</a:t>
-            </a:r>
-            <a:r>
-              <a:rPr lang="en-US">
-                <a:ea typeface="Calibri"/>
-                <a:cs typeface="Calibri"/>
-              </a:rPr>
-              <a:t> ja </a:t>
-            </a:r>
-            <a:r>
-              <a:rPr lang="en-US" err="1">
-                <a:ea typeface="Calibri"/>
-                <a:cs typeface="Calibri"/>
-              </a:rPr>
-              <a:t>kuidas</a:t>
-            </a:r>
-            <a:r>
-              <a:rPr lang="en-US">
-                <a:ea typeface="Calibri"/>
-                <a:cs typeface="Calibri"/>
-              </a:rPr>
-              <a:t> </a:t>
-            </a:r>
-            <a:r>
-              <a:rPr lang="en-US" err="1">
-                <a:ea typeface="Calibri"/>
-                <a:cs typeface="Calibri"/>
-              </a:rPr>
-              <a:t>mingeid</a:t>
-            </a:r>
-            <a:r>
-              <a:rPr lang="en-US">
-                <a:ea typeface="Calibri"/>
-                <a:cs typeface="Calibri"/>
-              </a:rPr>
-              <a:t> </a:t>
-            </a:r>
-            <a:r>
-              <a:rPr lang="en-US" err="1">
-                <a:ea typeface="Calibri"/>
-                <a:cs typeface="Calibri"/>
-              </a:rPr>
-              <a:t>otsuseid</a:t>
-            </a:r>
-            <a:r>
-              <a:rPr lang="en-US">
-                <a:ea typeface="Calibri"/>
-                <a:cs typeface="Calibri"/>
-              </a:rPr>
-              <a:t> ja </a:t>
-            </a:r>
-            <a:r>
-              <a:rPr lang="en-US" err="1">
-                <a:ea typeface="Calibri"/>
-                <a:cs typeface="Calibri"/>
-              </a:rPr>
-              <a:t>muutusi</a:t>
-            </a:r>
-            <a:r>
-              <a:rPr lang="en-US">
-                <a:ea typeface="Calibri"/>
-                <a:cs typeface="Calibri"/>
-              </a:rPr>
-              <a:t> on </a:t>
-            </a:r>
-            <a:r>
-              <a:rPr lang="en-US" err="1">
-                <a:ea typeface="Calibri"/>
-                <a:cs typeface="Calibri"/>
-              </a:rPr>
-              <a:t>tehtud</a:t>
-            </a:r>
-            <a:r>
-              <a:rPr lang="en-US">
-                <a:ea typeface="Calibri"/>
-                <a:cs typeface="Calibri"/>
-              </a:rPr>
-              <a:t>.</a:t>
-            </a:r>
-          </a:p>
-        </p:txBody>
-      </p:sp>
-      <p:sp>
-        <p:nvSpPr>
-          <p:cNvPr id="4" name="Slide Number Placeholder 3"/>
-          <p:cNvSpPr>
-            <a:spLocks noGrp="1"/>
-          </p:cNvSpPr>
-          <p:nvPr>
-            <p:ph type="sldNum" sz="quarter" idx="5"/>
-          </p:nvPr>
-        </p:nvSpPr>
-        <p:spPr/>
-        <p:txBody>
-          <a:bodyPr/>
-          <a:lstStyle/>
-          <a:p>
-            <a:fld id="{46699514-027B-49BD-8B49-5054CA40ECF4}" type="slidenum">
-              <a:rPr lang="en-US"/>
-              <a:t>17</a:t>
-            </a:fld>
-            <a:endParaRPr lang="en-US"/>
-          </a:p>
-        </p:txBody>
-      </p:sp>
-    </p:spTree>
-    <p:extLst>
-      <p:ext uri="{BB962C8B-B14F-4D97-AF65-F5344CB8AC3E}">
-        <p14:creationId xmlns:p14="http://schemas.microsoft.com/office/powerpoint/2010/main" val="2536514774"/>
-      </p:ext>
-    </p:extLst>
-  </p:cSld>
-  <p:clrMapOvr>
-    <a:masterClrMapping/>
-  </p:clrMapOvr>
-</p:notes>
-</file>
-
-<file path=ppt/notesSlides/notesSlide6.xml><?xml version="1.0" encoding="utf-8"?>
-<p:notes xmlns:a="http://schemas.openxmlformats.org/drawingml/2006/main" xmlns:r="http://schemas.openxmlformats.org/officeDocument/2006/relationships" xmlns:p="http://schemas.openxmlformats.org/presentationml/2006/main">
-  <p:cSld>
-    <p:spTree>
-      <p:nvGrpSpPr>
-        <p:cNvPr id="1" name="">
-          <a:extLst>
-            <a:ext uri="{FF2B5EF4-FFF2-40B4-BE49-F238E27FC236}">
-              <a16:creationId xmlns:a16="http://schemas.microsoft.com/office/drawing/2014/main" id="{ADB38261-5F5F-4373-A5D6-4E8577214A3F}"/>
-            </a:ext>
-          </a:extLst>
-        </p:cNvPr>
-        <p:cNvGrpSpPr/>
-        <p:nvPr/>
-      </p:nvGrpSpPr>
-      <p:grpSpPr>
-        <a:xfrm>
-          <a:off x="0" y="0"/>
-          <a:ext cx="0" cy="0"/>
-          <a:chOff x="0" y="0"/>
-          <a:chExt cx="0" cy="0"/>
-        </a:xfrm>
-      </p:grpSpPr>
-      <p:sp>
-        <p:nvSpPr>
-          <p:cNvPr id="2" name="Slide Image Placeholder 1">
-            <a:extLst>
-              <a:ext uri="{FF2B5EF4-FFF2-40B4-BE49-F238E27FC236}">
-                <a16:creationId xmlns:a16="http://schemas.microsoft.com/office/drawing/2014/main" id="{F8060981-4133-90F6-400C-B8BA63CB694A}"/>
-              </a:ext>
-            </a:extLst>
-          </p:cNvPr>
-          <p:cNvSpPr>
-            <a:spLocks noGrp="1" noRot="1" noChangeAspect="1"/>
-          </p:cNvSpPr>
-          <p:nvPr>
-            <p:ph type="sldImg"/>
-          </p:nvPr>
-        </p:nvSpPr>
-        <p:spPr/>
-      </p:sp>
-      <p:sp>
-        <p:nvSpPr>
-          <p:cNvPr id="3" name="Notes Placeholder 2">
-            <a:extLst>
-              <a:ext uri="{FF2B5EF4-FFF2-40B4-BE49-F238E27FC236}">
-                <a16:creationId xmlns:a16="http://schemas.microsoft.com/office/drawing/2014/main" id="{7A33CF2B-B63C-6161-DFC0-A10D6DB8CF22}"/>
-              </a:ext>
-            </a:extLst>
-          </p:cNvPr>
-          <p:cNvSpPr>
-            <a:spLocks noGrp="1"/>
-          </p:cNvSpPr>
-          <p:nvPr>
-            <p:ph type="body" idx="1"/>
-          </p:nvPr>
-        </p:nvSpPr>
-        <p:spPr/>
-        <p:txBody>
-          <a:bodyPr/>
-          <a:lstStyle/>
-          <a:p>
-            <a:r>
-              <a:rPr lang="en-US" err="1">
-                <a:ea typeface="Calibri"/>
-                <a:cs typeface="Calibri"/>
-              </a:rPr>
-              <a:t>Milleks</a:t>
-            </a:r>
-            <a:r>
-              <a:rPr lang="en-US">
-                <a:ea typeface="Calibri"/>
-                <a:cs typeface="Calibri"/>
-              </a:rPr>
-              <a:t> </a:t>
-            </a:r>
-            <a:r>
-              <a:rPr lang="en-US" err="1">
-                <a:ea typeface="Calibri"/>
-                <a:cs typeface="Calibri"/>
-              </a:rPr>
-              <a:t>vajalik</a:t>
-            </a:r>
-            <a:r>
-              <a:rPr lang="en-US">
-                <a:ea typeface="Calibri"/>
-                <a:cs typeface="Calibri"/>
-              </a:rPr>
-              <a:t>? - Nii </a:t>
-            </a:r>
-            <a:r>
-              <a:rPr lang="en-US" err="1">
-                <a:ea typeface="Calibri"/>
-                <a:cs typeface="Calibri"/>
-              </a:rPr>
-              <a:t>enda</a:t>
-            </a:r>
-            <a:r>
-              <a:rPr lang="en-US">
-                <a:ea typeface="Calibri"/>
-                <a:cs typeface="Calibri"/>
-              </a:rPr>
-              <a:t> </a:t>
-            </a:r>
-            <a:r>
-              <a:rPr lang="en-US" err="1">
-                <a:ea typeface="Calibri"/>
-                <a:cs typeface="Calibri"/>
-              </a:rPr>
-              <a:t>kui</a:t>
-            </a:r>
-            <a:r>
-              <a:rPr lang="en-US">
-                <a:ea typeface="Calibri"/>
-                <a:cs typeface="Calibri"/>
-              </a:rPr>
-              <a:t> ka </a:t>
-            </a:r>
-            <a:r>
-              <a:rPr lang="en-US" err="1">
-                <a:ea typeface="Calibri"/>
-                <a:cs typeface="Calibri"/>
-              </a:rPr>
-              <a:t>kolleegide</a:t>
-            </a:r>
-            <a:r>
-              <a:rPr lang="en-US">
-                <a:ea typeface="Calibri"/>
-                <a:cs typeface="Calibri"/>
-              </a:rPr>
-              <a:t> </a:t>
-            </a:r>
-            <a:r>
-              <a:rPr lang="en-US" err="1">
-                <a:ea typeface="Calibri"/>
-                <a:cs typeface="Calibri"/>
-              </a:rPr>
-              <a:t>jaoks</a:t>
-            </a:r>
-            <a:r>
-              <a:rPr lang="en-US">
-                <a:ea typeface="Calibri"/>
-                <a:cs typeface="Calibri"/>
-              </a:rPr>
-              <a:t> </a:t>
-            </a:r>
-            <a:r>
-              <a:rPr lang="en-US" err="1">
-                <a:ea typeface="Calibri"/>
-                <a:cs typeface="Calibri"/>
-              </a:rPr>
-              <a:t>kirjeldamine</a:t>
-            </a:r>
-            <a:r>
-              <a:rPr lang="en-US">
-                <a:ea typeface="Calibri"/>
-                <a:cs typeface="Calibri"/>
-              </a:rPr>
-              <a:t>, </a:t>
-            </a:r>
-            <a:r>
-              <a:rPr lang="en-US" err="1">
-                <a:ea typeface="Calibri"/>
-                <a:cs typeface="Calibri"/>
-              </a:rPr>
-              <a:t>teada</a:t>
-            </a:r>
-            <a:r>
-              <a:rPr lang="en-US">
-                <a:ea typeface="Calibri"/>
-                <a:cs typeface="Calibri"/>
-              </a:rPr>
-              <a:t>, et </a:t>
-            </a:r>
-            <a:r>
-              <a:rPr lang="en-US" err="1">
-                <a:ea typeface="Calibri"/>
-                <a:cs typeface="Calibri"/>
-              </a:rPr>
-              <a:t>miks</a:t>
-            </a:r>
-            <a:r>
-              <a:rPr lang="en-US">
-                <a:ea typeface="Calibri"/>
-                <a:cs typeface="Calibri"/>
-              </a:rPr>
-              <a:t> ja </a:t>
-            </a:r>
-            <a:r>
-              <a:rPr lang="en-US" err="1">
-                <a:ea typeface="Calibri"/>
-                <a:cs typeface="Calibri"/>
-              </a:rPr>
-              <a:t>kuidas</a:t>
-            </a:r>
-            <a:r>
-              <a:rPr lang="en-US">
-                <a:ea typeface="Calibri"/>
-                <a:cs typeface="Calibri"/>
-              </a:rPr>
-              <a:t> </a:t>
-            </a:r>
-            <a:r>
-              <a:rPr lang="en-US" err="1">
-                <a:ea typeface="Calibri"/>
-                <a:cs typeface="Calibri"/>
-              </a:rPr>
-              <a:t>mingeid</a:t>
-            </a:r>
-            <a:r>
-              <a:rPr lang="en-US">
-                <a:ea typeface="Calibri"/>
-                <a:cs typeface="Calibri"/>
-              </a:rPr>
-              <a:t> </a:t>
-            </a:r>
-            <a:r>
-              <a:rPr lang="en-US" err="1">
-                <a:ea typeface="Calibri"/>
-                <a:cs typeface="Calibri"/>
-              </a:rPr>
-              <a:t>otsuseid</a:t>
-            </a:r>
-            <a:r>
-              <a:rPr lang="en-US">
-                <a:ea typeface="Calibri"/>
-                <a:cs typeface="Calibri"/>
-              </a:rPr>
-              <a:t> ja </a:t>
-            </a:r>
-            <a:r>
-              <a:rPr lang="en-US" err="1">
-                <a:ea typeface="Calibri"/>
-                <a:cs typeface="Calibri"/>
-              </a:rPr>
-              <a:t>muutusi</a:t>
-            </a:r>
-            <a:r>
-              <a:rPr lang="en-US">
-                <a:ea typeface="Calibri"/>
-                <a:cs typeface="Calibri"/>
-              </a:rPr>
-              <a:t> on </a:t>
-            </a:r>
-            <a:r>
-              <a:rPr lang="en-US" err="1">
-                <a:ea typeface="Calibri"/>
-                <a:cs typeface="Calibri"/>
-              </a:rPr>
-              <a:t>tehtud</a:t>
-            </a:r>
-            <a:r>
-              <a:rPr lang="en-US">
-                <a:ea typeface="Calibri"/>
-                <a:cs typeface="Calibri"/>
-              </a:rPr>
-              <a:t>.</a:t>
-            </a:r>
-          </a:p>
-        </p:txBody>
-      </p:sp>
-      <p:sp>
-        <p:nvSpPr>
-          <p:cNvPr id="4" name="Slide Number Placeholder 3">
-            <a:extLst>
-              <a:ext uri="{FF2B5EF4-FFF2-40B4-BE49-F238E27FC236}">
-                <a16:creationId xmlns:a16="http://schemas.microsoft.com/office/drawing/2014/main" id="{435967AF-CF81-C282-94D9-719A7EB728D6}"/>
-              </a:ext>
-            </a:extLst>
-          </p:cNvPr>
-          <p:cNvSpPr>
-            <a:spLocks noGrp="1"/>
-          </p:cNvSpPr>
-          <p:nvPr>
-            <p:ph type="sldNum" sz="quarter" idx="5"/>
-          </p:nvPr>
-        </p:nvSpPr>
-        <p:spPr/>
-        <p:txBody>
-          <a:bodyPr/>
-          <a:lstStyle/>
-          <a:p>
-            <a:fld id="{46699514-027B-49BD-8B49-5054CA40ECF4}" type="slidenum">
-              <a:rPr lang="en-US"/>
-              <a:t>18</a:t>
-            </a:fld>
-            <a:endParaRPr lang="en-US"/>
-          </a:p>
-        </p:txBody>
-      </p:sp>
-    </p:spTree>
-    <p:extLst>
-      <p:ext uri="{BB962C8B-B14F-4D97-AF65-F5344CB8AC3E}">
-        <p14:creationId xmlns:p14="http://schemas.microsoft.com/office/powerpoint/2010/main" val="681070360"/>
-      </p:ext>
-    </p:extLst>
-  </p:cSld>
-  <p:clrMapOvr>
-    <a:masterClrMapping/>
-  </p:clrMapOvr>
-</p:notes>
-</file>
-
-<file path=ppt/notesSlides/notesSlide7.xml><?xml version="1.0" encoding="utf-8"?>
-<p:notes xmlns:a="http://schemas.openxmlformats.org/drawingml/2006/main" xmlns:r="http://schemas.openxmlformats.org/officeDocument/2006/relationships" xmlns:p="http://schemas.openxmlformats.org/presentationml/2006/main">
-  <p:cSld>
-    <p:spTree>
-      <p:nvGrpSpPr>
-        <p:cNvPr id="1" name="">
-          <a:extLst>
-            <a:ext uri="{FF2B5EF4-FFF2-40B4-BE49-F238E27FC236}">
-              <a16:creationId xmlns:a16="http://schemas.microsoft.com/office/drawing/2014/main" id="{C15A1A3C-E783-7FC2-9DCE-9F00D9B1A1FD}"/>
-            </a:ext>
-          </a:extLst>
-        </p:cNvPr>
-        <p:cNvGrpSpPr/>
-        <p:nvPr/>
-      </p:nvGrpSpPr>
-      <p:grpSpPr>
-        <a:xfrm>
-          <a:off x="0" y="0"/>
-          <a:ext cx="0" cy="0"/>
-          <a:chOff x="0" y="0"/>
-          <a:chExt cx="0" cy="0"/>
-        </a:xfrm>
-      </p:grpSpPr>
-      <p:sp>
-        <p:nvSpPr>
-          <p:cNvPr id="2" name="Slide Image Placeholder 1">
-            <a:extLst>
-              <a:ext uri="{FF2B5EF4-FFF2-40B4-BE49-F238E27FC236}">
-                <a16:creationId xmlns:a16="http://schemas.microsoft.com/office/drawing/2014/main" id="{82134939-D194-A8D8-24F4-C85F5076CAE1}"/>
-              </a:ext>
-            </a:extLst>
-          </p:cNvPr>
-          <p:cNvSpPr>
-            <a:spLocks noGrp="1" noRot="1" noChangeAspect="1"/>
-          </p:cNvSpPr>
-          <p:nvPr>
-            <p:ph type="sldImg"/>
-          </p:nvPr>
-        </p:nvSpPr>
-        <p:spPr/>
-      </p:sp>
-      <p:sp>
-        <p:nvSpPr>
-          <p:cNvPr id="3" name="Notes Placeholder 2">
-            <a:extLst>
-              <a:ext uri="{FF2B5EF4-FFF2-40B4-BE49-F238E27FC236}">
-                <a16:creationId xmlns:a16="http://schemas.microsoft.com/office/drawing/2014/main" id="{8DFF7AAE-DFE9-BA24-9A96-0EFCA02C2743}"/>
-              </a:ext>
-            </a:extLst>
-          </p:cNvPr>
-          <p:cNvSpPr>
-            <a:spLocks noGrp="1"/>
-          </p:cNvSpPr>
-          <p:nvPr>
-            <p:ph type="body" idx="1"/>
-          </p:nvPr>
-        </p:nvSpPr>
-        <p:spPr/>
-        <p:txBody>
-          <a:bodyPr/>
-          <a:lstStyle/>
-          <a:p>
-            <a:r>
-              <a:rPr lang="en-US" err="1">
-                <a:ea typeface="Calibri"/>
-                <a:cs typeface="Calibri"/>
-              </a:rPr>
-              <a:t>Milleks</a:t>
-            </a:r>
-            <a:r>
-              <a:rPr lang="en-US">
-                <a:ea typeface="Calibri"/>
-                <a:cs typeface="Calibri"/>
-              </a:rPr>
-              <a:t> </a:t>
-            </a:r>
-            <a:r>
-              <a:rPr lang="en-US" err="1">
-                <a:ea typeface="Calibri"/>
-                <a:cs typeface="Calibri"/>
-              </a:rPr>
-              <a:t>vajalik</a:t>
-            </a:r>
-            <a:r>
-              <a:rPr lang="en-US">
-                <a:ea typeface="Calibri"/>
-                <a:cs typeface="Calibri"/>
-              </a:rPr>
-              <a:t>? - Nii </a:t>
-            </a:r>
-            <a:r>
-              <a:rPr lang="en-US" err="1">
-                <a:ea typeface="Calibri"/>
-                <a:cs typeface="Calibri"/>
-              </a:rPr>
-              <a:t>enda</a:t>
-            </a:r>
-            <a:r>
-              <a:rPr lang="en-US">
-                <a:ea typeface="Calibri"/>
-                <a:cs typeface="Calibri"/>
-              </a:rPr>
-              <a:t> </a:t>
-            </a:r>
-            <a:r>
-              <a:rPr lang="en-US" err="1">
-                <a:ea typeface="Calibri"/>
-                <a:cs typeface="Calibri"/>
-              </a:rPr>
-              <a:t>kui</a:t>
-            </a:r>
-            <a:r>
-              <a:rPr lang="en-US">
-                <a:ea typeface="Calibri"/>
-                <a:cs typeface="Calibri"/>
-              </a:rPr>
-              <a:t> ka </a:t>
-            </a:r>
-            <a:r>
-              <a:rPr lang="en-US" err="1">
-                <a:ea typeface="Calibri"/>
-                <a:cs typeface="Calibri"/>
-              </a:rPr>
-              <a:t>kolleegide</a:t>
-            </a:r>
-            <a:r>
-              <a:rPr lang="en-US">
-                <a:ea typeface="Calibri"/>
-                <a:cs typeface="Calibri"/>
-              </a:rPr>
-              <a:t> </a:t>
-            </a:r>
-            <a:r>
-              <a:rPr lang="en-US" err="1">
-                <a:ea typeface="Calibri"/>
-                <a:cs typeface="Calibri"/>
-              </a:rPr>
-              <a:t>jaoks</a:t>
-            </a:r>
-            <a:r>
-              <a:rPr lang="en-US">
-                <a:ea typeface="Calibri"/>
-                <a:cs typeface="Calibri"/>
-              </a:rPr>
-              <a:t> </a:t>
-            </a:r>
-            <a:r>
-              <a:rPr lang="en-US" err="1">
-                <a:ea typeface="Calibri"/>
-                <a:cs typeface="Calibri"/>
-              </a:rPr>
-              <a:t>kirjeldamine</a:t>
-            </a:r>
-            <a:r>
-              <a:rPr lang="en-US">
-                <a:ea typeface="Calibri"/>
-                <a:cs typeface="Calibri"/>
-              </a:rPr>
-              <a:t>, </a:t>
-            </a:r>
-            <a:r>
-              <a:rPr lang="en-US" err="1">
-                <a:ea typeface="Calibri"/>
-                <a:cs typeface="Calibri"/>
-              </a:rPr>
-              <a:t>teada</a:t>
-            </a:r>
-            <a:r>
-              <a:rPr lang="en-US">
-                <a:ea typeface="Calibri"/>
-                <a:cs typeface="Calibri"/>
-              </a:rPr>
-              <a:t>, et </a:t>
-            </a:r>
-            <a:r>
-              <a:rPr lang="en-US" err="1">
-                <a:ea typeface="Calibri"/>
-                <a:cs typeface="Calibri"/>
-              </a:rPr>
-              <a:t>miks</a:t>
-            </a:r>
-            <a:r>
-              <a:rPr lang="en-US">
-                <a:ea typeface="Calibri"/>
-                <a:cs typeface="Calibri"/>
-              </a:rPr>
-              <a:t> ja </a:t>
-            </a:r>
-            <a:r>
-              <a:rPr lang="en-US" err="1">
-                <a:ea typeface="Calibri"/>
-                <a:cs typeface="Calibri"/>
-              </a:rPr>
-              <a:t>kuidas</a:t>
-            </a:r>
-            <a:r>
-              <a:rPr lang="en-US">
-                <a:ea typeface="Calibri"/>
-                <a:cs typeface="Calibri"/>
-              </a:rPr>
-              <a:t> </a:t>
-            </a:r>
-            <a:r>
-              <a:rPr lang="en-US" err="1">
-                <a:ea typeface="Calibri"/>
-                <a:cs typeface="Calibri"/>
-              </a:rPr>
-              <a:t>mingeid</a:t>
-            </a:r>
-            <a:r>
-              <a:rPr lang="en-US">
-                <a:ea typeface="Calibri"/>
-                <a:cs typeface="Calibri"/>
-              </a:rPr>
-              <a:t> </a:t>
-            </a:r>
-            <a:r>
-              <a:rPr lang="en-US" err="1">
-                <a:ea typeface="Calibri"/>
-                <a:cs typeface="Calibri"/>
-              </a:rPr>
-              <a:t>otsuseid</a:t>
-            </a:r>
-            <a:r>
-              <a:rPr lang="en-US">
-                <a:ea typeface="Calibri"/>
-                <a:cs typeface="Calibri"/>
-              </a:rPr>
-              <a:t> ja </a:t>
-            </a:r>
-            <a:r>
-              <a:rPr lang="en-US" err="1">
-                <a:ea typeface="Calibri"/>
-                <a:cs typeface="Calibri"/>
-              </a:rPr>
-              <a:t>muutusi</a:t>
-            </a:r>
-            <a:r>
-              <a:rPr lang="en-US">
-                <a:ea typeface="Calibri"/>
-                <a:cs typeface="Calibri"/>
-              </a:rPr>
-              <a:t> on </a:t>
-            </a:r>
-            <a:r>
-              <a:rPr lang="en-US" err="1">
-                <a:ea typeface="Calibri"/>
-                <a:cs typeface="Calibri"/>
-              </a:rPr>
-              <a:t>tehtud</a:t>
-            </a:r>
-            <a:r>
-              <a:rPr lang="en-US">
-                <a:ea typeface="Calibri"/>
-                <a:cs typeface="Calibri"/>
-              </a:rPr>
-              <a:t>.</a:t>
-            </a:r>
-          </a:p>
-        </p:txBody>
-      </p:sp>
-      <p:sp>
-        <p:nvSpPr>
-          <p:cNvPr id="4" name="Slide Number Placeholder 3">
-            <a:extLst>
-              <a:ext uri="{FF2B5EF4-FFF2-40B4-BE49-F238E27FC236}">
-                <a16:creationId xmlns:a16="http://schemas.microsoft.com/office/drawing/2014/main" id="{0FA10A03-469A-13BE-92A5-4D0B78A8A8CD}"/>
-              </a:ext>
-            </a:extLst>
-          </p:cNvPr>
-          <p:cNvSpPr>
-            <a:spLocks noGrp="1"/>
-          </p:cNvSpPr>
-          <p:nvPr>
-            <p:ph type="sldNum" sz="quarter" idx="5"/>
-          </p:nvPr>
-        </p:nvSpPr>
-        <p:spPr/>
-        <p:txBody>
-          <a:bodyPr/>
-          <a:lstStyle/>
-          <a:p>
-            <a:fld id="{46699514-027B-49BD-8B49-5054CA40ECF4}" type="slidenum">
-              <a:rPr lang="en-US"/>
-              <a:t>19</a:t>
-            </a:fld>
-            <a:endParaRPr lang="en-US"/>
-          </a:p>
-        </p:txBody>
-      </p:sp>
-    </p:spTree>
-    <p:extLst>
-      <p:ext uri="{BB962C8B-B14F-4D97-AF65-F5344CB8AC3E}">
-        <p14:creationId xmlns:p14="http://schemas.microsoft.com/office/powerpoint/2010/main" val="1973746104"/>
-      </p:ext>
-    </p:extLst>
-  </p:cSld>
-  <p:clrMapOvr>
-    <a:masterClrMapping/>
-  </p:clrMapOvr>
-</p:notes>
-</file>
-
-<file path=ppt/notesSlides/notesSlide8.xml><?xml version="1.0" encoding="utf-8"?>
-<p:notes xmlns:a="http://schemas.openxmlformats.org/drawingml/2006/main" xmlns:r="http://schemas.openxmlformats.org/officeDocument/2006/relationships" xmlns:p="http://schemas.openxmlformats.org/presentationml/2006/main">
-  <p:cSld>
-    <p:spTree>
-      <p:nvGrpSpPr>
-        <p:cNvPr id="1" name="">
-          <a:extLst>
-            <a:ext uri="{FF2B5EF4-FFF2-40B4-BE49-F238E27FC236}">
-              <a16:creationId xmlns:a16="http://schemas.microsoft.com/office/drawing/2014/main" id="{AA20B99D-40EC-4B75-2DC1-2D679F441C02}"/>
-            </a:ext>
-          </a:extLst>
-        </p:cNvPr>
-        <p:cNvGrpSpPr/>
-        <p:nvPr/>
-      </p:nvGrpSpPr>
-      <p:grpSpPr>
-        <a:xfrm>
-          <a:off x="0" y="0"/>
-          <a:ext cx="0" cy="0"/>
-          <a:chOff x="0" y="0"/>
-          <a:chExt cx="0" cy="0"/>
-        </a:xfrm>
-      </p:grpSpPr>
-      <p:sp>
-        <p:nvSpPr>
-          <p:cNvPr id="2" name="Slide Image Placeholder 1">
-            <a:extLst>
-              <a:ext uri="{FF2B5EF4-FFF2-40B4-BE49-F238E27FC236}">
-                <a16:creationId xmlns:a16="http://schemas.microsoft.com/office/drawing/2014/main" id="{D2A8C3F8-B93D-2F9A-B957-178CA06DA1D8}"/>
-              </a:ext>
-            </a:extLst>
-          </p:cNvPr>
-          <p:cNvSpPr>
-            <a:spLocks noGrp="1" noRot="1" noChangeAspect="1"/>
-          </p:cNvSpPr>
-          <p:nvPr>
-            <p:ph type="sldImg"/>
-          </p:nvPr>
-        </p:nvSpPr>
-        <p:spPr/>
-      </p:sp>
-      <p:sp>
-        <p:nvSpPr>
-          <p:cNvPr id="3" name="Notes Placeholder 2">
-            <a:extLst>
-              <a:ext uri="{FF2B5EF4-FFF2-40B4-BE49-F238E27FC236}">
-                <a16:creationId xmlns:a16="http://schemas.microsoft.com/office/drawing/2014/main" id="{32E55BA3-0FFA-7E1A-3BED-F130CFB7D4B5}"/>
-              </a:ext>
-            </a:extLst>
-          </p:cNvPr>
-          <p:cNvSpPr>
-            <a:spLocks noGrp="1"/>
-          </p:cNvSpPr>
-          <p:nvPr>
-            <p:ph type="body" idx="1"/>
-          </p:nvPr>
-        </p:nvSpPr>
-        <p:spPr/>
-        <p:txBody>
-          <a:bodyPr/>
-          <a:lstStyle/>
-          <a:p>
-            <a:r>
-              <a:rPr lang="en-US" err="1">
-                <a:ea typeface="Calibri"/>
-                <a:cs typeface="Calibri"/>
-              </a:rPr>
-              <a:t>Milleks</a:t>
-            </a:r>
-            <a:r>
-              <a:rPr lang="en-US">
-                <a:ea typeface="Calibri"/>
-                <a:cs typeface="Calibri"/>
-              </a:rPr>
-              <a:t> </a:t>
-            </a:r>
-            <a:r>
-              <a:rPr lang="en-US" err="1">
-                <a:ea typeface="Calibri"/>
-                <a:cs typeface="Calibri"/>
-              </a:rPr>
-              <a:t>vajalik</a:t>
-            </a:r>
-            <a:r>
-              <a:rPr lang="en-US">
-                <a:ea typeface="Calibri"/>
-                <a:cs typeface="Calibri"/>
-              </a:rPr>
-              <a:t>? - Nii </a:t>
-            </a:r>
-            <a:r>
-              <a:rPr lang="en-US" err="1">
-                <a:ea typeface="Calibri"/>
-                <a:cs typeface="Calibri"/>
-              </a:rPr>
-              <a:t>enda</a:t>
-            </a:r>
-            <a:r>
-              <a:rPr lang="en-US">
-                <a:ea typeface="Calibri"/>
-                <a:cs typeface="Calibri"/>
-              </a:rPr>
-              <a:t> </a:t>
-            </a:r>
-            <a:r>
-              <a:rPr lang="en-US" err="1">
-                <a:ea typeface="Calibri"/>
-                <a:cs typeface="Calibri"/>
-              </a:rPr>
-              <a:t>kui</a:t>
-            </a:r>
-            <a:r>
-              <a:rPr lang="en-US">
-                <a:ea typeface="Calibri"/>
-                <a:cs typeface="Calibri"/>
-              </a:rPr>
-              <a:t> ka </a:t>
-            </a:r>
-            <a:r>
-              <a:rPr lang="en-US" err="1">
-                <a:ea typeface="Calibri"/>
-                <a:cs typeface="Calibri"/>
-              </a:rPr>
-              <a:t>kolleegide</a:t>
-            </a:r>
-            <a:r>
-              <a:rPr lang="en-US">
-                <a:ea typeface="Calibri"/>
-                <a:cs typeface="Calibri"/>
-              </a:rPr>
-              <a:t> </a:t>
-            </a:r>
-            <a:r>
-              <a:rPr lang="en-US" err="1">
-                <a:ea typeface="Calibri"/>
-                <a:cs typeface="Calibri"/>
-              </a:rPr>
-              <a:t>jaoks</a:t>
-            </a:r>
-            <a:r>
-              <a:rPr lang="en-US">
-                <a:ea typeface="Calibri"/>
-                <a:cs typeface="Calibri"/>
-              </a:rPr>
-              <a:t> </a:t>
-            </a:r>
-            <a:r>
-              <a:rPr lang="en-US" err="1">
-                <a:ea typeface="Calibri"/>
-                <a:cs typeface="Calibri"/>
-              </a:rPr>
-              <a:t>kirjeldamine</a:t>
-            </a:r>
-            <a:r>
-              <a:rPr lang="en-US">
-                <a:ea typeface="Calibri"/>
-                <a:cs typeface="Calibri"/>
-              </a:rPr>
-              <a:t>, </a:t>
-            </a:r>
-            <a:r>
-              <a:rPr lang="en-US" err="1">
-                <a:ea typeface="Calibri"/>
-                <a:cs typeface="Calibri"/>
-              </a:rPr>
-              <a:t>teada</a:t>
-            </a:r>
-            <a:r>
-              <a:rPr lang="en-US">
-                <a:ea typeface="Calibri"/>
-                <a:cs typeface="Calibri"/>
-              </a:rPr>
-              <a:t>, et </a:t>
-            </a:r>
-            <a:r>
-              <a:rPr lang="en-US" err="1">
-                <a:ea typeface="Calibri"/>
-                <a:cs typeface="Calibri"/>
-              </a:rPr>
-              <a:t>miks</a:t>
-            </a:r>
-            <a:r>
-              <a:rPr lang="en-US">
-                <a:ea typeface="Calibri"/>
-                <a:cs typeface="Calibri"/>
-              </a:rPr>
-              <a:t> ja </a:t>
-            </a:r>
-            <a:r>
-              <a:rPr lang="en-US" err="1">
-                <a:ea typeface="Calibri"/>
-                <a:cs typeface="Calibri"/>
-              </a:rPr>
-              <a:t>kuidas</a:t>
-            </a:r>
-            <a:r>
-              <a:rPr lang="en-US">
-                <a:ea typeface="Calibri"/>
-                <a:cs typeface="Calibri"/>
-              </a:rPr>
-              <a:t> </a:t>
-            </a:r>
-            <a:r>
-              <a:rPr lang="en-US" err="1">
-                <a:ea typeface="Calibri"/>
-                <a:cs typeface="Calibri"/>
-              </a:rPr>
-              <a:t>mingeid</a:t>
-            </a:r>
-            <a:r>
-              <a:rPr lang="en-US">
-                <a:ea typeface="Calibri"/>
-                <a:cs typeface="Calibri"/>
-              </a:rPr>
-              <a:t> </a:t>
-            </a:r>
-            <a:r>
-              <a:rPr lang="en-US" err="1">
-                <a:ea typeface="Calibri"/>
-                <a:cs typeface="Calibri"/>
-              </a:rPr>
-              <a:t>otsuseid</a:t>
-            </a:r>
-            <a:r>
-              <a:rPr lang="en-US">
-                <a:ea typeface="Calibri"/>
-                <a:cs typeface="Calibri"/>
-              </a:rPr>
-              <a:t> ja </a:t>
-            </a:r>
-            <a:r>
-              <a:rPr lang="en-US" err="1">
-                <a:ea typeface="Calibri"/>
-                <a:cs typeface="Calibri"/>
-              </a:rPr>
-              <a:t>muutusi</a:t>
-            </a:r>
-            <a:r>
-              <a:rPr lang="en-US">
-                <a:ea typeface="Calibri"/>
-                <a:cs typeface="Calibri"/>
-              </a:rPr>
-              <a:t> on </a:t>
-            </a:r>
-            <a:r>
-              <a:rPr lang="en-US" err="1">
-                <a:ea typeface="Calibri"/>
-                <a:cs typeface="Calibri"/>
-              </a:rPr>
-              <a:t>tehtud</a:t>
-            </a:r>
-            <a:r>
-              <a:rPr lang="en-US">
-                <a:ea typeface="Calibri"/>
-                <a:cs typeface="Calibri"/>
-              </a:rPr>
-              <a:t>.</a:t>
-            </a:r>
-          </a:p>
-        </p:txBody>
-      </p:sp>
-      <p:sp>
-        <p:nvSpPr>
-          <p:cNvPr id="4" name="Slide Number Placeholder 3">
-            <a:extLst>
-              <a:ext uri="{FF2B5EF4-FFF2-40B4-BE49-F238E27FC236}">
-                <a16:creationId xmlns:a16="http://schemas.microsoft.com/office/drawing/2014/main" id="{094B880B-DCCB-A2B5-176F-2871A027C0F9}"/>
-              </a:ext>
-            </a:extLst>
-          </p:cNvPr>
-          <p:cNvSpPr>
-            <a:spLocks noGrp="1"/>
-          </p:cNvSpPr>
-          <p:nvPr>
-            <p:ph type="sldNum" sz="quarter" idx="5"/>
-          </p:nvPr>
-        </p:nvSpPr>
-        <p:spPr/>
-        <p:txBody>
-          <a:bodyPr/>
-          <a:lstStyle/>
-          <a:p>
-            <a:fld id="{46699514-027B-49BD-8B49-5054CA40ECF4}" type="slidenum">
-              <a:rPr lang="en-US"/>
-              <a:t>20</a:t>
-            </a:fld>
-            <a:endParaRPr lang="en-US"/>
-          </a:p>
-        </p:txBody>
-      </p:sp>
-    </p:spTree>
-    <p:extLst>
-      <p:ext uri="{BB962C8B-B14F-4D97-AF65-F5344CB8AC3E}">
-        <p14:creationId xmlns:p14="http://schemas.microsoft.com/office/powerpoint/2010/main" val="1279079355"/>
-      </p:ext>
-    </p:extLst>
-  </p:cSld>
-  <p:clrMapOvr>
-    <a:masterClrMapping/>
-  </p:clrMapOvr>
-</p:notes>
-</file>
-
-<file path=ppt/notesSlides/notesSlide9.xml><?xml version="1.0" encoding="utf-8"?>
-<p:notes xmlns:a="http://schemas.openxmlformats.org/drawingml/2006/main" xmlns:r="http://schemas.openxmlformats.org/officeDocument/2006/relationships" xmlns:p="http://schemas.openxmlformats.org/presentationml/2006/main">
-  <p:cSld>
-    <p:spTree>
-      <p:nvGrpSpPr>
-        <p:cNvPr id="1" name="">
-          <a:extLst>
-            <a:ext uri="{FF2B5EF4-FFF2-40B4-BE49-F238E27FC236}">
-              <a16:creationId xmlns:a16="http://schemas.microsoft.com/office/drawing/2014/main" id="{BB8DA34C-149A-57A8-DCCE-482263E209E7}"/>
-            </a:ext>
-          </a:extLst>
-        </p:cNvPr>
-        <p:cNvGrpSpPr/>
-        <p:nvPr/>
-      </p:nvGrpSpPr>
-      <p:grpSpPr>
-        <a:xfrm>
-          <a:off x="0" y="0"/>
-          <a:ext cx="0" cy="0"/>
-          <a:chOff x="0" y="0"/>
-          <a:chExt cx="0" cy="0"/>
-        </a:xfrm>
-      </p:grpSpPr>
-      <p:sp>
-        <p:nvSpPr>
-          <p:cNvPr id="2" name="Slide Image Placeholder 1">
-            <a:extLst>
-              <a:ext uri="{FF2B5EF4-FFF2-40B4-BE49-F238E27FC236}">
-                <a16:creationId xmlns:a16="http://schemas.microsoft.com/office/drawing/2014/main" id="{0212C817-AC27-CA90-93C2-204C3230EB4F}"/>
-              </a:ext>
-            </a:extLst>
-          </p:cNvPr>
-          <p:cNvSpPr>
-            <a:spLocks noGrp="1" noRot="1" noChangeAspect="1"/>
-          </p:cNvSpPr>
-          <p:nvPr>
-            <p:ph type="sldImg"/>
-          </p:nvPr>
-        </p:nvSpPr>
-        <p:spPr/>
-      </p:sp>
-      <p:sp>
-        <p:nvSpPr>
-          <p:cNvPr id="3" name="Notes Placeholder 2">
-            <a:extLst>
-              <a:ext uri="{FF2B5EF4-FFF2-40B4-BE49-F238E27FC236}">
-                <a16:creationId xmlns:a16="http://schemas.microsoft.com/office/drawing/2014/main" id="{73FC1774-130A-2B62-BCFA-16A9E5D06680}"/>
-              </a:ext>
-            </a:extLst>
-          </p:cNvPr>
-          <p:cNvSpPr>
-            <a:spLocks noGrp="1"/>
-          </p:cNvSpPr>
-          <p:nvPr>
-            <p:ph type="body" idx="1"/>
-          </p:nvPr>
-        </p:nvSpPr>
-        <p:spPr/>
-        <p:txBody>
-          <a:bodyPr/>
-          <a:lstStyle/>
-          <a:p>
-            <a:r>
-              <a:rPr lang="en-US" err="1">
-                <a:ea typeface="Calibri"/>
-                <a:cs typeface="Calibri"/>
-              </a:rPr>
-              <a:t>Milleks</a:t>
-            </a:r>
-            <a:r>
-              <a:rPr lang="en-US">
-                <a:ea typeface="Calibri"/>
-                <a:cs typeface="Calibri"/>
-              </a:rPr>
-              <a:t> </a:t>
-            </a:r>
-            <a:r>
-              <a:rPr lang="en-US" err="1">
-                <a:ea typeface="Calibri"/>
-                <a:cs typeface="Calibri"/>
-              </a:rPr>
-              <a:t>vajalik</a:t>
-            </a:r>
-            <a:r>
-              <a:rPr lang="en-US">
-                <a:ea typeface="Calibri"/>
-                <a:cs typeface="Calibri"/>
-              </a:rPr>
-              <a:t>? - Nii </a:t>
-            </a:r>
-            <a:r>
-              <a:rPr lang="en-US" err="1">
-                <a:ea typeface="Calibri"/>
-                <a:cs typeface="Calibri"/>
-              </a:rPr>
-              <a:t>enda</a:t>
-            </a:r>
-            <a:r>
-              <a:rPr lang="en-US">
-                <a:ea typeface="Calibri"/>
-                <a:cs typeface="Calibri"/>
-              </a:rPr>
-              <a:t> </a:t>
-            </a:r>
-            <a:r>
-              <a:rPr lang="en-US" err="1">
-                <a:ea typeface="Calibri"/>
-                <a:cs typeface="Calibri"/>
-              </a:rPr>
-              <a:t>kui</a:t>
-            </a:r>
-            <a:r>
-              <a:rPr lang="en-US">
-                <a:ea typeface="Calibri"/>
-                <a:cs typeface="Calibri"/>
-              </a:rPr>
-              <a:t> ka </a:t>
-            </a:r>
-            <a:r>
-              <a:rPr lang="en-US" err="1">
-                <a:ea typeface="Calibri"/>
-                <a:cs typeface="Calibri"/>
-              </a:rPr>
-              <a:t>kolleegide</a:t>
-            </a:r>
-            <a:r>
-              <a:rPr lang="en-US">
-                <a:ea typeface="Calibri"/>
-                <a:cs typeface="Calibri"/>
-              </a:rPr>
-              <a:t> </a:t>
-            </a:r>
-            <a:r>
-              <a:rPr lang="en-US" err="1">
-                <a:ea typeface="Calibri"/>
-                <a:cs typeface="Calibri"/>
-              </a:rPr>
-              <a:t>jaoks</a:t>
-            </a:r>
-            <a:r>
-              <a:rPr lang="en-US">
-                <a:ea typeface="Calibri"/>
-                <a:cs typeface="Calibri"/>
-              </a:rPr>
-              <a:t> </a:t>
-            </a:r>
-            <a:r>
-              <a:rPr lang="en-US" err="1">
-                <a:ea typeface="Calibri"/>
-                <a:cs typeface="Calibri"/>
-              </a:rPr>
-              <a:t>kirjeldamine</a:t>
-            </a:r>
-            <a:r>
-              <a:rPr lang="en-US">
-                <a:ea typeface="Calibri"/>
-                <a:cs typeface="Calibri"/>
-              </a:rPr>
-              <a:t>, </a:t>
-            </a:r>
-            <a:r>
-              <a:rPr lang="en-US" err="1">
-                <a:ea typeface="Calibri"/>
-                <a:cs typeface="Calibri"/>
-              </a:rPr>
-              <a:t>teada</a:t>
-            </a:r>
-            <a:r>
-              <a:rPr lang="en-US">
-                <a:ea typeface="Calibri"/>
-                <a:cs typeface="Calibri"/>
-              </a:rPr>
-              <a:t>, et </a:t>
-            </a:r>
-            <a:r>
-              <a:rPr lang="en-US" err="1">
-                <a:ea typeface="Calibri"/>
-                <a:cs typeface="Calibri"/>
-              </a:rPr>
-              <a:t>miks</a:t>
-            </a:r>
-            <a:r>
-              <a:rPr lang="en-US">
-                <a:ea typeface="Calibri"/>
-                <a:cs typeface="Calibri"/>
-              </a:rPr>
-              <a:t> ja </a:t>
-            </a:r>
-            <a:r>
-              <a:rPr lang="en-US" err="1">
-                <a:ea typeface="Calibri"/>
-                <a:cs typeface="Calibri"/>
-              </a:rPr>
-              <a:t>kuidas</a:t>
-            </a:r>
-            <a:r>
-              <a:rPr lang="en-US">
-                <a:ea typeface="Calibri"/>
-                <a:cs typeface="Calibri"/>
-              </a:rPr>
-              <a:t> </a:t>
-            </a:r>
-            <a:r>
-              <a:rPr lang="en-US" err="1">
-                <a:ea typeface="Calibri"/>
-                <a:cs typeface="Calibri"/>
-              </a:rPr>
-              <a:t>mingeid</a:t>
-            </a:r>
-            <a:r>
-              <a:rPr lang="en-US">
-                <a:ea typeface="Calibri"/>
-                <a:cs typeface="Calibri"/>
-              </a:rPr>
-              <a:t> </a:t>
-            </a:r>
-            <a:r>
-              <a:rPr lang="en-US" err="1">
-                <a:ea typeface="Calibri"/>
-                <a:cs typeface="Calibri"/>
-              </a:rPr>
-              <a:t>otsuseid</a:t>
-            </a:r>
-            <a:r>
-              <a:rPr lang="en-US">
-                <a:ea typeface="Calibri"/>
-                <a:cs typeface="Calibri"/>
-              </a:rPr>
-              <a:t> ja </a:t>
-            </a:r>
-            <a:r>
-              <a:rPr lang="en-US" err="1">
-                <a:ea typeface="Calibri"/>
-                <a:cs typeface="Calibri"/>
-              </a:rPr>
-              <a:t>muutusi</a:t>
-            </a:r>
-            <a:r>
-              <a:rPr lang="en-US">
-                <a:ea typeface="Calibri"/>
-                <a:cs typeface="Calibri"/>
-              </a:rPr>
-              <a:t> on </a:t>
-            </a:r>
-            <a:r>
-              <a:rPr lang="en-US" err="1">
-                <a:ea typeface="Calibri"/>
-                <a:cs typeface="Calibri"/>
-              </a:rPr>
-              <a:t>tehtud</a:t>
-            </a:r>
-            <a:r>
-              <a:rPr lang="en-US">
-                <a:ea typeface="Calibri"/>
-                <a:cs typeface="Calibri"/>
-              </a:rPr>
-              <a:t>.</a:t>
-            </a:r>
-          </a:p>
-        </p:txBody>
-      </p:sp>
-      <p:sp>
-        <p:nvSpPr>
-          <p:cNvPr id="4" name="Slide Number Placeholder 3">
-            <a:extLst>
-              <a:ext uri="{FF2B5EF4-FFF2-40B4-BE49-F238E27FC236}">
-                <a16:creationId xmlns:a16="http://schemas.microsoft.com/office/drawing/2014/main" id="{D12428F6-B692-59EB-721A-51F223C670DE}"/>
-              </a:ext>
-            </a:extLst>
-          </p:cNvPr>
-          <p:cNvSpPr>
-            <a:spLocks noGrp="1"/>
-          </p:cNvSpPr>
-          <p:nvPr>
-            <p:ph type="sldNum" sz="quarter" idx="5"/>
-          </p:nvPr>
-        </p:nvSpPr>
-        <p:spPr/>
-        <p:txBody>
-          <a:bodyPr/>
-          <a:lstStyle/>
-          <a:p>
-            <a:fld id="{46699514-027B-49BD-8B49-5054CA40ECF4}" type="slidenum">
-              <a:rPr lang="en-US"/>
-              <a:t>21</a:t>
-            </a:fld>
-            <a:endParaRPr lang="en-US"/>
-          </a:p>
-        </p:txBody>
-      </p:sp>
-    </p:spTree>
-    <p:extLst>
-      <p:ext uri="{BB962C8B-B14F-4D97-AF65-F5344CB8AC3E}">
-        <p14:creationId xmlns:p14="http://schemas.microsoft.com/office/powerpoint/2010/main" val="540613206"/>
       </p:ext>
     </p:extLst>
   </p:cSld>
@@ -7089,10 +5184,10 @@
           <p:nvPr userDrawn="1"/>
         </p:nvPicPr>
         <p:blipFill>
-          <a:blip r:embed="rId2">
+          <a:blip>
             <a:extLst>
               <a:ext uri="{96DAC541-7B7A-43D3-8B79-37D633B846F1}">
-                <asvg:svgBlip xmlns:asvg="http://schemas.microsoft.com/office/drawing/2016/SVG/main" r:embed="rId3"/>
+                <asvg:svgBlip xmlns:asvg="http://schemas.microsoft.com/office/drawing/2016/SVG/main" r:embed="rId2"/>
               </a:ext>
             </a:extLst>
           </a:blip>
@@ -16650,10 +14745,10 @@
             <a:ext cx="810000" cy="320400"/>
           </a:xfrm>
           <a:blipFill>
-            <a:blip r:embed="rId2">
+            <a:blip>
               <a:extLst>
                 <a:ext uri="{96DAC541-7B7A-43D3-8B79-37D633B846F1}">
-                  <asvg:svgBlip xmlns:asvg="http://schemas.microsoft.com/office/drawing/2016/SVG/main" r:embed="rId3"/>
+                  <asvg:svgBlip xmlns:asvg="http://schemas.microsoft.com/office/drawing/2016/SVG/main" r:embed="rId2"/>
                 </a:ext>
               </a:extLst>
             </a:blip>
@@ -17932,10 +16027,10 @@
             <a:ext cx="810000" cy="320400"/>
           </a:xfrm>
           <a:blipFill>
-            <a:blip r:embed="rId2">
+            <a:blip>
               <a:extLst>
                 <a:ext uri="{96DAC541-7B7A-43D3-8B79-37D633B846F1}">
-                  <asvg:svgBlip xmlns:asvg="http://schemas.microsoft.com/office/drawing/2016/SVG/main" r:embed="rId3"/>
+                  <asvg:svgBlip xmlns:asvg="http://schemas.microsoft.com/office/drawing/2016/SVG/main" r:embed="rId2"/>
                 </a:ext>
               </a:extLst>
             </a:blip>
@@ -18176,7 +16271,7 @@
           <a:p>
             <a:fld id="{DE840A40-73C8-4048-8140-49F5D65BB431}" type="datetimeFigureOut">
               <a:rPr lang="et-EE" smtClean="0"/>
-              <a:t>25.08.2025</a:t>
+              <a:t>30.03.2026</a:t>
             </a:fld>
             <a:endParaRPr lang="et-EE"/>
           </a:p>
@@ -18289,10 +16384,10 @@
           <p:nvPr userDrawn="1"/>
         </p:nvPicPr>
         <p:blipFill>
-          <a:blip r:embed="rId2">
+          <a:blip>
             <a:extLst>
               <a:ext uri="{96DAC541-7B7A-43D3-8B79-37D633B846F1}">
-                <asvg:svgBlip xmlns:asvg="http://schemas.microsoft.com/office/drawing/2016/SVG/main" r:embed="rId3"/>
+                <asvg:svgBlip xmlns:asvg="http://schemas.microsoft.com/office/drawing/2016/SVG/main" r:embed="rId2"/>
               </a:ext>
             </a:extLst>
           </a:blip>
@@ -25271,10 +23366,10 @@
             <a:ext cx="2302064" cy="927536"/>
           </a:xfrm>
           <a:blipFill>
-            <a:blip r:embed="rId2">
+            <a:blip>
               <a:extLst>
                 <a:ext uri="{96DAC541-7B7A-43D3-8B79-37D633B846F1}">
-                  <asvg:svgBlip xmlns:asvg="http://schemas.microsoft.com/office/drawing/2016/SVG/main" r:embed="rId3"/>
+                  <asvg:svgBlip xmlns:asvg="http://schemas.microsoft.com/office/drawing/2016/SVG/main" r:embed="rId2"/>
                 </a:ext>
               </a:extLst>
             </a:blip>
@@ -25457,10 +23552,10 @@
           <p:nvPr userDrawn="1"/>
         </p:nvPicPr>
         <p:blipFill>
-          <a:blip r:embed="rId2">
+          <a:blip>
             <a:extLst>
               <a:ext uri="{96DAC541-7B7A-43D3-8B79-37D633B846F1}">
-                <asvg:svgBlip xmlns:asvg="http://schemas.microsoft.com/office/drawing/2016/SVG/main" r:embed="rId3"/>
+                <asvg:svgBlip xmlns:asvg="http://schemas.microsoft.com/office/drawing/2016/SVG/main" r:embed="rId2"/>
               </a:ext>
             </a:extLst>
           </a:blip>
@@ -26191,10 +24286,10 @@
           <p:nvPr userDrawn="1"/>
         </p:nvPicPr>
         <p:blipFill>
-          <a:blip r:embed="rId2">
+          <a:blip>
             <a:extLst>
               <a:ext uri="{96DAC541-7B7A-43D3-8B79-37D633B846F1}">
-                <asvg:svgBlip xmlns:asvg="http://schemas.microsoft.com/office/drawing/2016/SVG/main" r:embed="rId3"/>
+                <asvg:svgBlip xmlns:asvg="http://schemas.microsoft.com/office/drawing/2016/SVG/main" r:embed="rId2"/>
               </a:ext>
             </a:extLst>
           </a:blip>
@@ -26980,10 +25075,10 @@
             <a:ext cx="810000" cy="320400"/>
           </a:xfrm>
           <a:blipFill>
-            <a:blip r:embed="rId2">
+            <a:blip>
               <a:extLst>
                 <a:ext uri="{96DAC541-7B7A-43D3-8B79-37D633B846F1}">
-                  <asvg:svgBlip xmlns:asvg="http://schemas.microsoft.com/office/drawing/2016/SVG/main" r:embed="rId3"/>
+                  <asvg:svgBlip xmlns:asvg="http://schemas.microsoft.com/office/drawing/2016/SVG/main" r:embed="rId2"/>
                 </a:ext>
               </a:extLst>
             </a:blip>
@@ -30288,7 +28383,13 @@
   <p:cSld>
     <p:spTree>
       <p:nvGrpSpPr>
-        <p:cNvPr id="1" name=""/>
+        <p:cNvPr id="1" name="">
+          <a:extLst>
+            <a:ext uri="{FF2B5EF4-FFF2-40B4-BE49-F238E27FC236}">
+              <a16:creationId xmlns:a16="http://schemas.microsoft.com/office/drawing/2014/main" id="{2E557E86-F0CD-95DC-95D0-8C87805B0EA1}"/>
+            </a:ext>
+          </a:extLst>
+        </p:cNvPr>
         <p:cNvGrpSpPr/>
         <p:nvPr/>
       </p:nvGrpSpPr>
@@ -30305,7 +28406,7 @@
           <p:cNvPr id="2" name="Title 1">
             <a:extLst>
               <a:ext uri="{FF2B5EF4-FFF2-40B4-BE49-F238E27FC236}">
-                <a16:creationId xmlns:a16="http://schemas.microsoft.com/office/drawing/2014/main" id="{FAADA8EF-698C-04CF-D04C-52686C4BA54A}"/>
+                <a16:creationId xmlns:a16="http://schemas.microsoft.com/office/drawing/2014/main" id="{9DE2716E-62FE-889D-36A0-488FE686063C}"/>
               </a:ext>
             </a:extLst>
           </p:cNvPr>
@@ -30322,38 +28423,64 @@
           <a:lstStyle/>
           <a:p>
             <a:r>
-              <a:rPr lang="en-US" sz="2800"/>
+              <a:rPr lang="en-US" dirty="0">
+                <a:ea typeface="+mj-lt"/>
+                <a:cs typeface="+mj-lt"/>
+              </a:rPr>
               <a:t>Power BI – </a:t>
             </a:r>
             <a:r>
-              <a:rPr lang="en-US" sz="2800" err="1"/>
-              <a:t>andmete</a:t>
-            </a:r>
-            <a:r>
-              <a:rPr lang="en-US" sz="2800"/>
+              <a:rPr lang="en-US" dirty="0" err="1">
+                <a:ea typeface="+mj-lt"/>
+                <a:cs typeface="+mj-lt"/>
+              </a:rPr>
+              <a:t>uue</a:t>
+            </a:r>
+            <a:r>
+              <a:rPr lang="en-US" dirty="0">
+                <a:ea typeface="+mj-lt"/>
+                <a:cs typeface="+mj-lt"/>
+              </a:rPr>
               <a:t> </a:t>
             </a:r>
             <a:r>
-              <a:rPr lang="en-US" sz="2800" err="1"/>
-              <a:t>profileerimine</a:t>
-            </a:r>
-            <a:r>
-              <a:rPr lang="en-US" sz="2800"/>
-              <a:t> – </a:t>
-            </a:r>
-            <a:r>
-              <a:rPr lang="en-US" sz="2800" err="1"/>
-              <a:t>kirjeldav</a:t>
-            </a:r>
-            <a:r>
-              <a:rPr lang="en-US" sz="2800"/>
+              <a:rPr lang="en-US" dirty="0" err="1">
+                <a:ea typeface="+mj-lt"/>
+                <a:cs typeface="+mj-lt"/>
+              </a:rPr>
+              <a:t>andmestiku</a:t>
+            </a:r>
+            <a:r>
+              <a:rPr lang="en-US" dirty="0">
+                <a:ea typeface="+mj-lt"/>
+                <a:cs typeface="+mj-lt"/>
+              </a:rPr>
               <a:t> </a:t>
             </a:r>
             <a:r>
-              <a:rPr lang="en-US" sz="2800" err="1"/>
-              <a:t>statistika</a:t>
-            </a:r>
-            <a:endParaRPr lang="en-US" sz="2800"/>
+              <a:rPr lang="en-US" dirty="0" err="1">
+                <a:ea typeface="+mj-lt"/>
+                <a:cs typeface="+mj-lt"/>
+              </a:rPr>
+              <a:t>kvaliteedi</a:t>
+            </a:r>
+            <a:r>
+              <a:rPr lang="en-US" dirty="0">
+                <a:ea typeface="+mj-lt"/>
+                <a:cs typeface="+mj-lt"/>
+              </a:rPr>
+              <a:t> </a:t>
+            </a:r>
+            <a:r>
+              <a:rPr lang="en-US" dirty="0" err="1">
+                <a:ea typeface="+mj-lt"/>
+                <a:cs typeface="+mj-lt"/>
+              </a:rPr>
+              <a:t>kontroll</a:t>
+            </a:r>
+            <a:endParaRPr lang="en-US" dirty="0">
+              <a:ea typeface="Inter Bold"/>
+            </a:endParaRPr>
           </a:p>
         </p:txBody>
       </p:sp>
@@ -30362,7 +28489,7 @@
           <p:cNvPr id="3" name="Content Placeholder 2">
             <a:extLst>
               <a:ext uri="{FF2B5EF4-FFF2-40B4-BE49-F238E27FC236}">
-                <a16:creationId xmlns:a16="http://schemas.microsoft.com/office/drawing/2014/main" id="{80CE708D-24EA-EFA6-0635-D22EE046AC14}"/>
+                <a16:creationId xmlns:a16="http://schemas.microsoft.com/office/drawing/2014/main" id="{880528B4-6D3A-26AC-5F90-5FEC55219D50}"/>
               </a:ext>
             </a:extLst>
           </p:cNvPr>
@@ -30378,150 +28505,320 @@
           <a:bodyPr/>
           <a:lstStyle/>
           <a:p>
-            <a:pPr>
+            <a:pPr marL="514350">
               <a:lnSpc>
                 <a:spcPct val="150000"/>
               </a:lnSpc>
+              <a:buFont typeface="Inter,Sans-Serif" panose="020B0502030000000004" pitchFamily="34" charset="0"/>
             </a:pPr>
             <a:r>
-              <a:rPr lang="en-US" sz="2400">
-                <a:ea typeface="Inter"/>
-              </a:rPr>
-              <a:t>Power Query </a:t>
-            </a:r>
-            <a:r>
-              <a:rPr lang="en-US" sz="2400" err="1">
-                <a:ea typeface="Inter"/>
-              </a:rPr>
-              <a:t>vaade</a:t>
-            </a:r>
-            <a:r>
-              <a:rPr lang="en-US" sz="2400">
-                <a:ea typeface="Inter"/>
-              </a:rPr>
-              <a:t> --&gt; View:</a:t>
-            </a:r>
-            <a:endParaRPr lang="en-US" sz="2400"/>
+              <a:rPr lang="en-US" sz="2400" dirty="0" err="1">
+                <a:ea typeface="Inter"/>
+              </a:rPr>
+              <a:t>Võtame</a:t>
+            </a:r>
+            <a:r>
+              <a:rPr lang="en-US" sz="2400" dirty="0">
+                <a:ea typeface="Inter"/>
+              </a:rPr>
+              <a:t> alla </a:t>
+            </a:r>
+            <a:r>
+              <a:rPr lang="en-US" sz="2400" dirty="0" err="1">
+                <a:ea typeface="Inter"/>
+              </a:rPr>
+              <a:t>uued</a:t>
+            </a:r>
+            <a:r>
+              <a:rPr lang="en-US" sz="2400" dirty="0">
+                <a:ea typeface="Inter"/>
+              </a:rPr>
+              <a:t> </a:t>
+            </a:r>
+            <a:r>
+              <a:rPr lang="en-US" sz="2400" dirty="0" err="1">
+                <a:ea typeface="Inter"/>
+              </a:rPr>
+              <a:t>andmed</a:t>
+            </a:r>
+            <a:r>
+              <a:rPr lang="en-US" sz="2400" dirty="0">
+                <a:ea typeface="Inter"/>
+              </a:rPr>
+              <a:t> </a:t>
+            </a:r>
+            <a:r>
+              <a:rPr lang="en-US" sz="2400" dirty="0" err="1">
+                <a:ea typeface="Inter"/>
+              </a:rPr>
+              <a:t>müügiraporti</a:t>
+            </a:r>
+            <a:r>
+              <a:rPr lang="en-US" sz="2400" dirty="0">
+                <a:ea typeface="Inter"/>
+              </a:rPr>
+              <a:t> </a:t>
+            </a:r>
+            <a:r>
+              <a:rPr lang="en-US" sz="2400" dirty="0" err="1">
+                <a:ea typeface="Inter"/>
+              </a:rPr>
+              <a:t>jaoks</a:t>
+            </a:r>
+            <a:r>
+              <a:rPr lang="en-US" sz="2400" dirty="0">
+                <a:ea typeface="Inter"/>
+              </a:rPr>
+              <a:t> </a:t>
+            </a:r>
           </a:p>
           <a:p>
-            <a:pPr lvl="1" indent="-342900">
+            <a:pPr marL="1028700" lvl="1">
               <a:lnSpc>
                 <a:spcPct val="150000"/>
               </a:lnSpc>
-              <a:buFont typeface="Courier New" panose="020B0502030000000004" pitchFamily="34" charset="0"/>
+              <a:buFont typeface="Courier New,monospace" panose="020B0502030000000004" pitchFamily="34" charset="0"/>
               <a:buChar char="o"/>
             </a:pPr>
             <a:r>
-              <a:rPr lang="en-US" sz="2400">
-                <a:ea typeface="Inter"/>
-              </a:rPr>
-              <a:t>Column Distribution </a:t>
-            </a:r>
-            <a:endParaRPr lang="en-US" sz="2400"/>
+              <a:rPr lang="en-US" sz="2000" dirty="0">
+                <a:ea typeface="Inter"/>
+              </a:rPr>
+              <a:t>Lae alla ZIP fail </a:t>
+            </a:r>
+            <a:r>
+              <a:rPr lang="en-US" sz="2000" dirty="0" err="1">
+                <a:ea typeface="Inter"/>
+              </a:rPr>
+              <a:t>alliktabelitega</a:t>
+            </a:r>
+            <a:r>
+              <a:rPr lang="en-US" sz="2000" dirty="0">
+                <a:ea typeface="Inter"/>
+              </a:rPr>
+              <a:t> </a:t>
+            </a:r>
+            <a:r>
+              <a:rPr lang="en-US" sz="2000" dirty="0" err="1">
+                <a:ea typeface="Inter"/>
+              </a:rPr>
+              <a:t>GitHubist</a:t>
+            </a:r>
+            <a:r>
+              <a:rPr lang="en-US" sz="2000" dirty="0">
+                <a:ea typeface="Inter"/>
+              </a:rPr>
+              <a:t>: </a:t>
+            </a:r>
+            <a:r>
+              <a:rPr lang="en-US" sz="2000" b="1" dirty="0">
+                <a:ea typeface="Inter"/>
+              </a:rPr>
+              <a:t>Day2 </a:t>
+            </a:r>
+            <a:r>
+              <a:rPr lang="en-US" sz="2000" dirty="0">
+                <a:ea typeface="Inter"/>
+              </a:rPr>
+              <a:t>--&gt; DataSources.zip</a:t>
+            </a:r>
           </a:p>
           <a:p>
-            <a:pPr lvl="1" indent="-342900">
+            <a:pPr marL="1028700" lvl="1">
               <a:lnSpc>
                 <a:spcPct val="150000"/>
               </a:lnSpc>
-              <a:buFont typeface="Courier New" panose="020B0502030000000004" pitchFamily="34" charset="0"/>
+              <a:buFont typeface="Courier New,monospace" panose="020B0502030000000004" pitchFamily="34" charset="0"/>
               <a:buChar char="o"/>
             </a:pPr>
             <a:r>
-              <a:rPr lang="en-US" sz="2400">
-                <a:ea typeface="Inter"/>
-              </a:rPr>
-              <a:t>Column Profile</a:t>
-            </a:r>
-            <a:endParaRPr lang="en-US" sz="2400"/>
+              <a:rPr lang="en-US" sz="2000" dirty="0">
+                <a:ea typeface="Inter"/>
+              </a:rPr>
+              <a:t>Unzip</a:t>
+            </a:r>
           </a:p>
           <a:p>
-            <a:pPr lvl="1" indent="-342900">
+            <a:pPr marL="1028700" lvl="1">
               <a:lnSpc>
                 <a:spcPct val="150000"/>
               </a:lnSpc>
-              <a:buFont typeface="Courier New" panose="020B0502030000000004" pitchFamily="34" charset="0"/>
+              <a:buFont typeface="Courier New,monospace" panose="020B0502030000000004" pitchFamily="34" charset="0"/>
               <a:buChar char="o"/>
             </a:pPr>
             <a:r>
-              <a:rPr lang="en-US" sz="2400">
-                <a:ea typeface="Inter"/>
-              </a:rPr>
-              <a:t>Column Quality</a:t>
+              <a:rPr lang="en-US" sz="2000" dirty="0">
+                <a:ea typeface="Inter"/>
+              </a:rPr>
+              <a:t>Ava </a:t>
+            </a:r>
+            <a:r>
+              <a:rPr lang="en-US" sz="2000" dirty="0" err="1">
+                <a:ea typeface="Inter"/>
+              </a:rPr>
+              <a:t>eile</a:t>
+            </a:r>
+            <a:r>
+              <a:rPr lang="en-US" sz="2000" dirty="0">
+                <a:ea typeface="Inter"/>
+              </a:rPr>
+              <a:t> </a:t>
+            </a:r>
+            <a:r>
+              <a:rPr lang="en-US" sz="2000" dirty="0" err="1">
+                <a:ea typeface="Inter"/>
+              </a:rPr>
+              <a:t>tehtud</a:t>
+            </a:r>
+            <a:r>
+              <a:rPr lang="en-US" sz="2000" dirty="0">
+                <a:ea typeface="Inter"/>
+              </a:rPr>
+              <a:t> </a:t>
+            </a:r>
+            <a:r>
+              <a:rPr lang="en-US" sz="2000" dirty="0" err="1">
+                <a:ea typeface="Inter"/>
+              </a:rPr>
+              <a:t>PowerBI</a:t>
+            </a:r>
+            <a:r>
+              <a:rPr lang="en-US" sz="2000" dirty="0">
+                <a:ea typeface="Inter"/>
+              </a:rPr>
+              <a:t> fail --&gt; Transform Data --&gt; Change data source</a:t>
             </a:r>
           </a:p>
           <a:p>
-            <a:pPr>
+            <a:pPr marL="1428750" lvl="2">
               <a:lnSpc>
                 <a:spcPct val="150000"/>
               </a:lnSpc>
-              <a:buClr>
-                <a:srgbClr val="121212"/>
-              </a:buClr>
+              <a:buFont typeface="Wingdings,Sans-Serif" panose="020B0502030000000004" pitchFamily="34" charset="0"/>
+              <a:buChar char="§"/>
             </a:pPr>
             <a:r>
-              <a:rPr lang="en-US" sz="2400" err="1">
-                <a:ea typeface="Inter"/>
-              </a:rPr>
-              <a:t>Vaikimisi</a:t>
-            </a:r>
-            <a:r>
-              <a:rPr lang="en-US" sz="2400">
+              <a:rPr lang="en-US" sz="2000" dirty="0" err="1">
+                <a:ea typeface="Inter"/>
+              </a:rPr>
+              <a:t>Vaata</a:t>
+            </a:r>
+            <a:r>
+              <a:rPr lang="en-US" sz="2000" dirty="0">
                 <a:ea typeface="Inter"/>
               </a:rPr>
               <a:t> </a:t>
             </a:r>
             <a:r>
-              <a:rPr lang="en-US" sz="2400" err="1">
-                <a:ea typeface="Inter"/>
-              </a:rPr>
-              <a:t>esimesed</a:t>
-            </a:r>
-            <a:r>
-              <a:rPr lang="en-US" sz="2400">
-                <a:ea typeface="Inter"/>
-              </a:rPr>
-              <a:t> 1000 </a:t>
-            </a:r>
-            <a:r>
-              <a:rPr lang="en-US" sz="2400" err="1">
-                <a:ea typeface="Inter"/>
-              </a:rPr>
-              <a:t>kirjet</a:t>
-            </a:r>
-            <a:r>
-              <a:rPr lang="en-US" sz="2400">
-                <a:ea typeface="Inter"/>
-              </a:rPr>
-              <a:t>, </a:t>
-            </a:r>
-            <a:r>
-              <a:rPr lang="en-US" sz="2400" err="1">
-                <a:ea typeface="Inter"/>
-              </a:rPr>
-              <a:t>vaja</a:t>
-            </a:r>
-            <a:r>
-              <a:rPr lang="en-US" sz="2400">
+              <a:rPr lang="en-US" sz="2000" dirty="0" err="1">
+                <a:ea typeface="Inter"/>
+              </a:rPr>
+              <a:t>üle</a:t>
+            </a:r>
+            <a:r>
+              <a:rPr lang="en-US" sz="2000" dirty="0">
                 <a:ea typeface="Inter"/>
               </a:rPr>
               <a:t> </a:t>
             </a:r>
             <a:r>
-              <a:rPr lang="en-US" sz="2400" err="1">
-                <a:ea typeface="Inter"/>
-              </a:rPr>
-              <a:t>valida</a:t>
-            </a:r>
-            <a:r>
-              <a:rPr lang="en-US" sz="2400">
-                <a:ea typeface="Inter"/>
-              </a:rPr>
-              <a:t>  "Column profiling based on entire data set"</a:t>
-            </a:r>
+              <a:rPr lang="en-US" sz="2000" dirty="0" err="1">
+                <a:ea typeface="Inter"/>
+              </a:rPr>
+              <a:t>tulpade</a:t>
+            </a:r>
+            <a:r>
+              <a:rPr lang="en-US" sz="2000" dirty="0">
+                <a:ea typeface="Inter"/>
+              </a:rPr>
+              <a:t> sisu ja </a:t>
+            </a:r>
+            <a:r>
+              <a:rPr lang="en-US" sz="2000" dirty="0" err="1">
+                <a:ea typeface="Inter"/>
+              </a:rPr>
+              <a:t>vorm</a:t>
+            </a:r>
+            <a:endParaRPr lang="en-US" sz="2000" dirty="0">
+              <a:ea typeface="Inter"/>
+            </a:endParaRPr>
           </a:p>
           <a:p>
-            <a:pPr marL="0" indent="0">
+            <a:pPr marL="1428750" lvl="2">
+              <a:lnSpc>
+                <a:spcPct val="150000"/>
+              </a:lnSpc>
+              <a:buFont typeface="Wingdings,Sans-Serif" panose="020B0502030000000004" pitchFamily="34" charset="0"/>
+              <a:buChar char="§"/>
+            </a:pPr>
+            <a:r>
+              <a:rPr lang="en-US" sz="2000" dirty="0">
+                <a:ea typeface="Inter"/>
+              </a:rPr>
+              <a:t>Kas on </a:t>
+            </a:r>
+            <a:r>
+              <a:rPr lang="en-US" sz="2000" dirty="0" err="1">
+                <a:ea typeface="Inter"/>
+              </a:rPr>
+              <a:t>väärtuseid</a:t>
+            </a:r>
+            <a:r>
+              <a:rPr lang="en-US" sz="2000" dirty="0">
+                <a:ea typeface="Inter"/>
+              </a:rPr>
+              <a:t>, mis </a:t>
+            </a:r>
+            <a:r>
+              <a:rPr lang="en-US" sz="2000" dirty="0" err="1">
+                <a:ea typeface="Inter"/>
+              </a:rPr>
+              <a:t>tunduvad</a:t>
+            </a:r>
+            <a:r>
+              <a:rPr lang="en-US" sz="2000" dirty="0">
+                <a:ea typeface="Inter"/>
+              </a:rPr>
+              <a:t> </a:t>
+            </a:r>
+            <a:r>
+              <a:rPr lang="en-US" sz="2000" dirty="0" err="1">
+                <a:ea typeface="Inter"/>
+              </a:rPr>
+              <a:t>ebaloogilised</a:t>
+            </a:r>
+            <a:r>
+              <a:rPr lang="en-US" sz="2000" dirty="0">
+                <a:ea typeface="Inter"/>
+              </a:rPr>
+              <a:t>?</a:t>
+            </a:r>
+            <a:endParaRPr lang="en-US" sz="2000" dirty="0"/>
+          </a:p>
+          <a:p>
+            <a:pPr marL="1028700" lvl="1">
+              <a:lnSpc>
+                <a:spcPct val="150000"/>
+              </a:lnSpc>
+              <a:buFont typeface="Courier New,monospace" panose="020B0502030000000004" pitchFamily="34" charset="0"/>
+              <a:buChar char="o"/>
+            </a:pPr>
+            <a:r>
+              <a:rPr lang="en-US" sz="2000" dirty="0" err="1">
+                <a:ea typeface="Inter"/>
+              </a:rPr>
+              <a:t>Salvesta</a:t>
+            </a:r>
+            <a:r>
+              <a:rPr lang="en-US" sz="2000" dirty="0">
+                <a:ea typeface="Inter"/>
+              </a:rPr>
+              <a:t> fail</a:t>
+            </a:r>
+            <a:endParaRPr lang="en-US" sz="2000" dirty="0"/>
+          </a:p>
+          <a:p>
+            <a:pPr marL="285750" indent="0">
               <a:lnSpc>
                 <a:spcPct val="150000"/>
               </a:lnSpc>
@@ -30530,16 +28827,33 @@
               </a:buClr>
               <a:buNone/>
             </a:pPr>
-            <a:endParaRPr lang="en-US" sz="2400">
-              <a:ea typeface="Inter"/>
-            </a:endParaRPr>
+            <a:endParaRPr lang="en-US" sz="2400" dirty="0"/>
+          </a:p>
+          <a:p>
+            <a:pPr marL="514350">
+              <a:lnSpc>
+                <a:spcPct val="150000"/>
+              </a:lnSpc>
+              <a:buFont typeface="Inter"/>
+              <a:buChar char="‣"/>
+            </a:pPr>
+            <a:endParaRPr lang="en-US" sz="2800" dirty="0"/>
+          </a:p>
+          <a:p>
+            <a:pPr marL="0" indent="0">
+              <a:lnSpc>
+                <a:spcPct val="150000"/>
+              </a:lnSpc>
+              <a:buNone/>
+            </a:pPr>
+            <a:endParaRPr lang="en-US" sz="2800" dirty="0"/>
           </a:p>
         </p:txBody>
       </p:sp>
     </p:spTree>
     <p:extLst>
       <p:ext uri="{BB962C8B-B14F-4D97-AF65-F5344CB8AC3E}">
-        <p14:creationId xmlns:p14="http://schemas.microsoft.com/office/powerpoint/2010/main" val="394666795"/>
+        <p14:creationId xmlns:p14="http://schemas.microsoft.com/office/powerpoint/2010/main" val="2908858834"/>
       </p:ext>
     </p:extLst>
   </p:cSld>
@@ -35065,7 +33379,7 @@
               <a:t>git config --global </a:t>
             </a:r>
             <a:r>
-              <a:rPr lang="en-US" sz="2400" err="1">
+              <a:rPr lang="en-US" sz="2400" dirty="0" err="1">
                 <a:ea typeface="Inter"/>
               </a:rPr>
               <a:t>user.email</a:t>
@@ -35105,7 +33419,7 @@
               <a:t>git config --global user.name "</a:t>
             </a:r>
             <a:r>
-              <a:rPr lang="en-US" sz="2400" i="1" err="1">
+              <a:rPr lang="en-US" sz="2400" i="1" dirty="0" err="1">
                 <a:ea typeface="Inter"/>
               </a:rPr>
               <a:t>sinukasutajanimi</a:t>
@@ -36767,7 +35081,7 @@
               <a:t>Vali </a:t>
             </a:r>
             <a:r>
-              <a:rPr lang="en-US" sz="2400" err="1">
+              <a:rPr lang="en-US" sz="2400" dirty="0" err="1">
                 <a:ea typeface="Inter"/>
               </a:rPr>
               <a:t>vasakult</a:t>
@@ -36778,7 +35092,7 @@
               </a:rPr>
               <a:t> Source Control </a:t>
             </a:r>
-            <a:endParaRPr lang="en-US" sz="2400"/>
+            <a:endParaRPr lang="en-US" sz="2400" dirty="0"/>
           </a:p>
           <a:p>
             <a:pPr>
@@ -36796,10 +35110,10 @@
               <a:t>Vali Clone Git Repository --&gt; </a:t>
             </a:r>
             <a:r>
-              <a:rPr lang="en-US" sz="2400" err="1">
-                <a:ea typeface="Inter"/>
-              </a:rPr>
-              <a:t>Githubis</a:t>
+              <a:rPr lang="en-US" sz="2400" dirty="0" err="1">
+                <a:ea typeface="Inter"/>
+              </a:rPr>
+              <a:t>GitHubis</a:t>
             </a:r>
             <a:r>
               <a:rPr lang="en-US" sz="2400" dirty="0">
@@ -36808,7 +35122,7 @@
               <a:t> </a:t>
             </a:r>
             <a:r>
-              <a:rPr lang="en-US" sz="2400" err="1">
+              <a:rPr lang="en-US" sz="2400" dirty="0" err="1">
                 <a:ea typeface="Inter"/>
               </a:rPr>
               <a:t>õiguste</a:t>
@@ -36820,12 +35134,12 @@
               <a:t> </a:t>
             </a:r>
             <a:r>
-              <a:rPr lang="en-US" sz="2400" err="1">
+              <a:rPr lang="en-US" sz="2400" dirty="0" err="1">
                 <a:ea typeface="Inter"/>
               </a:rPr>
               <a:t>kinnitus</a:t>
             </a:r>
-            <a:endParaRPr lang="en-US" sz="2400" err="1"/>
+            <a:endParaRPr lang="en-US" sz="2400" dirty="0"/>
           </a:p>
           <a:p>
             <a:pPr>
@@ -36843,12 +35157,12 @@
               <a:t>Vali </a:t>
             </a:r>
             <a:r>
-              <a:rPr lang="en-US" sz="2400" err="1">
+              <a:rPr lang="en-US" sz="2400" dirty="0" err="1">
                 <a:ea typeface="Inter"/>
               </a:rPr>
               <a:t>projekt</a:t>
             </a:r>
-            <a:endParaRPr lang="en-US" sz="2400" err="1"/>
+            <a:endParaRPr lang="en-US" sz="2400" dirty="0"/>
           </a:p>
           <a:p>
             <a:pPr>
@@ -36866,7 +35180,7 @@
               <a:t>Vali </a:t>
             </a:r>
             <a:r>
-              <a:rPr lang="en-US" sz="2400" err="1">
+              <a:rPr lang="en-US" sz="2400" dirty="0" err="1">
                 <a:ea typeface="Inter"/>
               </a:rPr>
               <a:t>kohalik</a:t>
@@ -36878,7 +35192,7 @@
               <a:t> </a:t>
             </a:r>
             <a:r>
-              <a:rPr lang="en-US" sz="2400" err="1">
+              <a:rPr lang="en-US" sz="2400" dirty="0" err="1">
                 <a:ea typeface="Inter"/>
               </a:rPr>
               <a:t>kaust</a:t>
@@ -36890,7 +35204,7 @@
               <a:t>, </a:t>
             </a:r>
             <a:r>
-              <a:rPr lang="en-US" sz="2400" err="1">
+              <a:rPr lang="en-US" sz="2400" dirty="0" err="1">
                 <a:ea typeface="Inter"/>
               </a:rPr>
               <a:t>kuhu</a:t>
@@ -36902,7 +35216,7 @@
               <a:t> </a:t>
             </a:r>
             <a:r>
-              <a:rPr lang="en-US" sz="2400" err="1">
+              <a:rPr lang="en-US" sz="2400" dirty="0" err="1">
                 <a:ea typeface="Inter"/>
               </a:rPr>
               <a:t>luua</a:t>
@@ -36914,10 +35228,10 @@
               <a:t> </a:t>
             </a:r>
             <a:r>
-              <a:rPr lang="en-US" sz="2400" err="1">
-                <a:ea typeface="Inter"/>
-              </a:rPr>
-              <a:t>Githubi</a:t>
+              <a:rPr lang="en-US" sz="2400" dirty="0" err="1">
+                <a:ea typeface="Inter"/>
+              </a:rPr>
+              <a:t>GitHubi</a:t>
             </a:r>
             <a:r>
               <a:rPr lang="en-US" sz="2400" dirty="0">
@@ -36926,12 +35240,12 @@
               <a:t> </a:t>
             </a:r>
             <a:r>
-              <a:rPr lang="en-US" sz="2400" err="1">
+              <a:rPr lang="en-US" sz="2400" dirty="0" err="1">
                 <a:ea typeface="Inter"/>
               </a:rPr>
               <a:t>kaust</a:t>
             </a:r>
-            <a:endParaRPr lang="en-US" sz="2400" err="1"/>
+            <a:endParaRPr lang="en-US" sz="2400" dirty="0"/>
           </a:p>
           <a:p>
             <a:pPr>
@@ -36949,7 +35263,7 @@
               <a:t>Loo </a:t>
             </a:r>
             <a:r>
-              <a:rPr lang="en-US" sz="2400" err="1">
+              <a:rPr lang="en-US" sz="2400" dirty="0" err="1">
                 <a:ea typeface="Inter"/>
               </a:rPr>
               <a:t>enda</a:t>
@@ -36961,12 +35275,12 @@
               <a:t> </a:t>
             </a:r>
             <a:r>
-              <a:rPr lang="en-US" sz="2400" err="1">
+              <a:rPr lang="en-US" sz="2400" dirty="0" err="1">
                 <a:ea typeface="Inter"/>
               </a:rPr>
               <a:t>haru</a:t>
             </a:r>
-            <a:endParaRPr lang="en-US" sz="2400" err="1"/>
+            <a:endParaRPr lang="en-US" sz="2400" dirty="0"/>
           </a:p>
           <a:p>
             <a:pPr lvl="1">
@@ -36983,7 +35297,7 @@
               <a:t>Alt </a:t>
             </a:r>
             <a:r>
-              <a:rPr lang="en-US" sz="2400" err="1">
+              <a:rPr lang="en-US" sz="2400" dirty="0" err="1">
                 <a:ea typeface="Inter"/>
               </a:rPr>
               <a:t>vasakult</a:t>
@@ -37010,7 +35324,7 @@
               <a:t>--&gt; </a:t>
             </a:r>
             <a:r>
-              <a:rPr lang="en-US" sz="2400" err="1">
+              <a:rPr lang="en-US" sz="2400" dirty="0" err="1">
                 <a:ea typeface="Inter"/>
               </a:rPr>
               <a:t>uue</a:t>
@@ -37022,7 +35336,7 @@
               <a:t> </a:t>
             </a:r>
             <a:r>
-              <a:rPr lang="en-US" sz="2400" err="1">
+              <a:rPr lang="en-US" sz="2400" dirty="0" err="1">
                 <a:ea typeface="Inter"/>
               </a:rPr>
               <a:t>haru</a:t>
@@ -37034,7 +35348,7 @@
               <a:t> </a:t>
             </a:r>
             <a:r>
-              <a:rPr lang="en-US" sz="2400" err="1">
+              <a:rPr lang="en-US" sz="2400" dirty="0" err="1">
                 <a:ea typeface="Inter"/>
               </a:rPr>
               <a:t>nimi</a:t>
@@ -37045,7 +35359,7 @@
               </a:rPr>
               <a:t> </a:t>
             </a:r>
-            <a:endParaRPr lang="en-US" sz="2400"/>
+            <a:endParaRPr lang="en-US" sz="2400" dirty="0"/>
           </a:p>
           <a:p>
             <a:pPr>
@@ -37066,7 +35380,7 @@
               <a:buFont typeface="Wingdings" panose="020B0502030000000004" pitchFamily="34" charset="0"/>
               <a:buChar char="Ø"/>
             </a:pPr>
-            <a:endParaRPr lang="en-US" sz="2400"/>
+            <a:endParaRPr lang="en-US" sz="2400" dirty="0"/>
           </a:p>
           <a:p>
             <a:pPr>
@@ -37074,7 +35388,7 @@
                 <a:srgbClr val="121212"/>
               </a:buClr>
             </a:pPr>
-            <a:endParaRPr lang="en-US"/>
+            <a:endParaRPr lang="en-US" dirty="0"/>
           </a:p>
         </p:txBody>
       </p:sp>
@@ -38805,7 +37119,7 @@
               <a:buChar char="•"/>
             </a:pPr>
             <a:r>
-              <a:rPr lang="en-US" sz="2000" err="1">
+              <a:rPr lang="en-US" sz="2000" dirty="0" err="1">
                 <a:solidFill>
                   <a:srgbClr val="121212"/>
                 </a:solidFill>
@@ -38813,10 +37127,10 @@
                 <a:ea typeface="Inter"/>
                 <a:cs typeface="Arial"/>
               </a:rPr>
-              <a:t>Ettevõttes</a:t>
-            </a:r>
-            <a:r>
-              <a:rPr lang="en-US" sz="2000">
+              <a:t>Organisatsioonis</a:t>
+            </a:r>
+            <a:r>
+              <a:rPr lang="en-US" sz="2000" dirty="0">
                 <a:solidFill>
                   <a:srgbClr val="121212"/>
                 </a:solidFill>
@@ -38827,7 +37141,7 @@
               <a:t> </a:t>
             </a:r>
             <a:r>
-              <a:rPr lang="en-US" sz="2000" err="1">
+              <a:rPr lang="en-US" sz="2000" dirty="0" err="1">
                 <a:solidFill>
                   <a:srgbClr val="121212"/>
                 </a:solidFill>
@@ -38835,10 +37149,10 @@
                 <a:ea typeface="Inter"/>
                 <a:cs typeface="Arial"/>
               </a:rPr>
-              <a:t>olevad</a:t>
-            </a:r>
-            <a:r>
-              <a:rPr lang="en-US" sz="2000">
+              <a:t>loodavad</a:t>
+            </a:r>
+            <a:r>
+              <a:rPr lang="en-US" sz="2000" dirty="0">
                 <a:solidFill>
                   <a:srgbClr val="121212"/>
                 </a:solidFill>
@@ -38849,7 +37163,7 @@
               <a:t> </a:t>
             </a:r>
             <a:r>
-              <a:rPr lang="en-US" sz="2000" err="1">
+              <a:rPr lang="en-US" sz="2000" dirty="0" err="1">
                 <a:solidFill>
                   <a:srgbClr val="121212"/>
                 </a:solidFill>
@@ -38859,157 +37173,10 @@
               </a:rPr>
               <a:t>andmed</a:t>
             </a:r>
-            <a:endParaRPr lang="en-US" sz="2000">
+            <a:endParaRPr lang="en-US" sz="2000" dirty="0" err="1">
               <a:solidFill>
                 <a:srgbClr val="121212"/>
               </a:solidFill>
-              <a:latin typeface="Inter" panose="02000503000000020004" pitchFamily="2" charset="0"/>
-              <a:cs typeface="Arial"/>
-            </a:endParaRPr>
-          </a:p>
-          <a:p>
-            <a:pPr marL="857250" lvl="1" indent="-342900">
-              <a:lnSpc>
-                <a:spcPct val="150000"/>
-              </a:lnSpc>
-              <a:buFont typeface="Courier New" panose="020B0502030000000004" pitchFamily="34" charset="0"/>
-              <a:buChar char="o"/>
-            </a:pPr>
-            <a:r>
-              <a:rPr lang="en-US" sz="2000" err="1">
-                <a:latin typeface="Inter"/>
-                <a:ea typeface="Inter"/>
-                <a:cs typeface="Arial"/>
-              </a:rPr>
-              <a:t>Raamatupidamissüsteem</a:t>
-            </a:r>
-            <a:r>
-              <a:rPr lang="en-US" sz="2000">
-                <a:latin typeface="Inter"/>
-                <a:ea typeface="Inter"/>
-                <a:cs typeface="Arial"/>
-              </a:rPr>
-              <a:t>, CRM, </a:t>
-            </a:r>
-            <a:r>
-              <a:rPr lang="en-US" sz="2000" err="1">
-                <a:latin typeface="Inter"/>
-                <a:ea typeface="Inter"/>
-                <a:cs typeface="Arial"/>
-              </a:rPr>
-              <a:t>tootmistarkvara</a:t>
-            </a:r>
-            <a:r>
-              <a:rPr lang="en-US" sz="2000">
-                <a:latin typeface="Inter"/>
-                <a:ea typeface="Inter"/>
-                <a:cs typeface="Arial"/>
-              </a:rPr>
-              <a:t>, </a:t>
-            </a:r>
-            <a:r>
-              <a:rPr lang="en-US" sz="2000" err="1">
-                <a:latin typeface="Inter"/>
-                <a:ea typeface="Inter"/>
-                <a:cs typeface="Arial"/>
-              </a:rPr>
-              <a:t>masinate</a:t>
-            </a:r>
-            <a:r>
-              <a:rPr lang="en-US" sz="2000">
-                <a:latin typeface="Inter"/>
-                <a:ea typeface="Inter"/>
-                <a:cs typeface="Arial"/>
-              </a:rPr>
-              <a:t> </a:t>
-            </a:r>
-            <a:r>
-              <a:rPr lang="en-US" sz="2000" err="1">
-                <a:latin typeface="Inter"/>
-                <a:ea typeface="Inter"/>
-                <a:cs typeface="Arial"/>
-              </a:rPr>
-              <a:t>poolt</a:t>
-            </a:r>
-            <a:r>
-              <a:rPr lang="en-US" sz="2000">
-                <a:latin typeface="Inter"/>
-                <a:ea typeface="Inter"/>
-                <a:cs typeface="Arial"/>
-              </a:rPr>
-              <a:t> </a:t>
-            </a:r>
-            <a:r>
-              <a:rPr lang="en-US" sz="2000" err="1">
-                <a:latin typeface="Inter"/>
-                <a:ea typeface="Inter"/>
-                <a:cs typeface="Arial"/>
-              </a:rPr>
-              <a:t>loodud</a:t>
-            </a:r>
-            <a:r>
-              <a:rPr lang="en-US" sz="2000">
-                <a:latin typeface="Inter"/>
-                <a:ea typeface="Inter"/>
-                <a:cs typeface="Arial"/>
-              </a:rPr>
-              <a:t> </a:t>
-            </a:r>
-            <a:r>
-              <a:rPr lang="en-US" sz="2000" err="1">
-                <a:latin typeface="Inter"/>
-                <a:ea typeface="Inter"/>
-                <a:cs typeface="Arial"/>
-              </a:rPr>
-              <a:t>andmed</a:t>
-            </a:r>
-            <a:r>
-              <a:rPr lang="en-US" sz="2000">
-                <a:latin typeface="Inter"/>
-                <a:ea typeface="Inter"/>
-                <a:cs typeface="Arial"/>
-              </a:rPr>
-              <a:t> </a:t>
-            </a:r>
-            <a:r>
-              <a:rPr lang="en-US" sz="2000" err="1">
-                <a:latin typeface="Inter"/>
-                <a:ea typeface="Inter"/>
-                <a:cs typeface="Arial"/>
-              </a:rPr>
-              <a:t>jne</a:t>
-            </a:r>
-            <a:endParaRPr lang="en-US" sz="2000">
-              <a:latin typeface="Inter"/>
-              <a:ea typeface="Inter"/>
-              <a:cs typeface="Arial"/>
-            </a:endParaRPr>
-          </a:p>
-          <a:p>
-            <a:pPr marL="342900" indent="-342900">
-              <a:lnSpc>
-                <a:spcPct val="150000"/>
-              </a:lnSpc>
-              <a:buFont typeface="Arial,Sans-Serif" panose="020B0502030000000004" pitchFamily="34" charset="0"/>
-              <a:buChar char="•"/>
-            </a:pPr>
-            <a:r>
-              <a:rPr lang="en-US" sz="2000" err="1">
-                <a:latin typeface="Inter"/>
-                <a:ea typeface="Inter"/>
-                <a:cs typeface="Arial"/>
-              </a:rPr>
-              <a:t>Küsitlused</a:t>
-            </a:r>
-            <a:r>
-              <a:rPr lang="en-US" sz="2000">
-                <a:latin typeface="Inter"/>
-                <a:ea typeface="Inter"/>
-                <a:cs typeface="Arial"/>
-              </a:rPr>
-              <a:t> </a:t>
-            </a:r>
-            <a:endParaRPr lang="en-US" sz="2000">
               <a:latin typeface="Inter" panose="02000503000000020004" pitchFamily="2" charset="0"/>
               <a:cs typeface="Arial"/>
             </a:endParaRPr>
@@ -39023,7 +37190,176 @@
               <a:buChar char="•"/>
             </a:pPr>
             <a:r>
-              <a:rPr lang="en-US" sz="2000" err="1">
+              <a:rPr lang="en-US" sz="2000" dirty="0" err="1">
+                <a:latin typeface="Inter"/>
+                <a:ea typeface="Inter"/>
+                <a:cs typeface="Arial"/>
+              </a:rPr>
+              <a:t>Teiste</a:t>
+            </a:r>
+            <a:r>
+              <a:rPr lang="en-US" sz="2000" dirty="0">
+                <a:latin typeface="Inter"/>
+                <a:ea typeface="Inter"/>
+                <a:cs typeface="Arial"/>
+              </a:rPr>
+              <a:t> </a:t>
+            </a:r>
+            <a:r>
+              <a:rPr lang="en-US" sz="2000" dirty="0" err="1">
+                <a:latin typeface="Inter"/>
+                <a:ea typeface="Inter"/>
+                <a:cs typeface="Arial"/>
+              </a:rPr>
+              <a:t>organisatsioonide</a:t>
+            </a:r>
+            <a:r>
+              <a:rPr lang="en-US" sz="2000" dirty="0">
+                <a:latin typeface="Inter"/>
+                <a:ea typeface="Inter"/>
+                <a:cs typeface="Arial"/>
+              </a:rPr>
+              <a:t> </a:t>
+            </a:r>
+            <a:r>
+              <a:rPr lang="en-US" sz="2000" dirty="0" err="1">
+                <a:latin typeface="Inter"/>
+                <a:ea typeface="Inter"/>
+                <a:cs typeface="Arial"/>
+              </a:rPr>
+              <a:t>andmed</a:t>
+            </a:r>
+          </a:p>
+          <a:p>
+            <a:pPr marL="342900" indent="-342900">
+              <a:lnSpc>
+                <a:spcPct val="150000"/>
+              </a:lnSpc>
+              <a:buFont typeface="Arial,Sans-Serif" panose="020B0502030000000004" pitchFamily="34" charset="0"/>
+              <a:buChar char="•"/>
+            </a:pPr>
+            <a:r>
+              <a:rPr lang="en-US" sz="2000" dirty="0" err="1">
+                <a:latin typeface="Inter"/>
+                <a:ea typeface="Inter"/>
+                <a:cs typeface="Arial"/>
+              </a:rPr>
+              <a:t>Veebist</a:t>
+            </a:r>
+            <a:r>
+              <a:rPr lang="en-US" sz="2000" dirty="0">
+                <a:latin typeface="Inter"/>
+                <a:ea typeface="Inter"/>
+                <a:cs typeface="Arial"/>
+              </a:rPr>
+              <a:t> </a:t>
+            </a:r>
+            <a:r>
+              <a:rPr lang="en-US" sz="2000" dirty="0" err="1">
+                <a:latin typeface="Inter"/>
+                <a:ea typeface="Inter"/>
+                <a:cs typeface="Arial"/>
+              </a:rPr>
+              <a:t>leitavad</a:t>
+            </a:r>
+            <a:r>
+              <a:rPr lang="en-US" sz="2000" dirty="0">
+                <a:latin typeface="Inter"/>
+                <a:ea typeface="Inter"/>
+                <a:cs typeface="Arial"/>
+              </a:rPr>
+              <a:t> </a:t>
+            </a:r>
+            <a:r>
+              <a:rPr lang="en-US" sz="2000" dirty="0" err="1">
+                <a:latin typeface="Inter"/>
+                <a:ea typeface="Inter"/>
+                <a:cs typeface="Arial"/>
+              </a:rPr>
+              <a:t>andmed</a:t>
+            </a:r>
+          </a:p>
+          <a:p>
+            <a:pPr marL="857250" lvl="1" indent="-342900">
+              <a:lnSpc>
+                <a:spcPct val="150000"/>
+              </a:lnSpc>
+              <a:buFont typeface="Courier New,monospace" panose="020B0502030000000004" pitchFamily="34" charset="0"/>
+              <a:buChar char="o"/>
+            </a:pPr>
+            <a:r>
+              <a:rPr lang="en-US" sz="2000" dirty="0" err="1">
+                <a:latin typeface="Inter"/>
+                <a:ea typeface="Inter"/>
+                <a:cs typeface="Arial"/>
+              </a:rPr>
+              <a:t>Andmete</a:t>
+            </a:r>
+            <a:r>
+              <a:rPr lang="en-US" sz="2000" dirty="0">
+                <a:latin typeface="Inter"/>
+                <a:ea typeface="Inter"/>
+                <a:cs typeface="Arial"/>
+              </a:rPr>
+              <a:t> </a:t>
+            </a:r>
+            <a:r>
+              <a:rPr lang="en-US" sz="2000" dirty="0" err="1">
+                <a:latin typeface="Inter"/>
+                <a:ea typeface="Inter"/>
+                <a:cs typeface="Arial"/>
+              </a:rPr>
+              <a:t>teabevärav</a:t>
+            </a:r>
+            <a:r>
+              <a:rPr lang="en-US" sz="2000" dirty="0">
+                <a:latin typeface="Inter"/>
+                <a:ea typeface="Inter"/>
+                <a:cs typeface="Arial"/>
+              </a:rPr>
+              <a:t>: andmed.eesti.ee</a:t>
+            </a:r>
+            <a:endParaRPr lang="en-US" dirty="0"/>
+          </a:p>
+          <a:p>
+            <a:pPr marL="342900" indent="-342900">
+              <a:lnSpc>
+                <a:spcPct val="150000"/>
+              </a:lnSpc>
+              <a:buFont typeface="Arial,Sans-Serif" panose="020B0502030000000004" pitchFamily="34" charset="0"/>
+              <a:buChar char="•"/>
+            </a:pPr>
+            <a:r>
+              <a:rPr lang="en-US" sz="2000" dirty="0" err="1">
+                <a:latin typeface="Inter"/>
+                <a:ea typeface="Inter"/>
+                <a:cs typeface="Arial"/>
+              </a:rPr>
+              <a:t>Küsitlused</a:t>
+            </a:r>
+            <a:r>
+              <a:rPr lang="en-US" sz="2000" dirty="0">
+                <a:latin typeface="Inter"/>
+                <a:ea typeface="Inter"/>
+                <a:cs typeface="Arial"/>
+              </a:rPr>
+              <a:t> </a:t>
+            </a:r>
+            <a:endParaRPr lang="en-US" sz="2000" dirty="0">
+              <a:latin typeface="Inter" panose="02000503000000020004" pitchFamily="2" charset="0"/>
+              <a:cs typeface="Arial"/>
+            </a:endParaRPr>
+          </a:p>
+          <a:p>
+            <a:pPr marL="342900" indent="-342900">
+              <a:lnSpc>
+                <a:spcPct val="150000"/>
+              </a:lnSpc>
+              <a:buFont typeface="Arial,Sans-Serif" panose="020B0502030000000004" pitchFamily="34" charset="0"/>
+              <a:buChar char="•"/>
+            </a:pPr>
+            <a:r>
+              <a:rPr lang="en-US" sz="2000" dirty="0" err="1">
                 <a:ea typeface="Inter"/>
                 <a:cs typeface="Arial"/>
               </a:rPr>
@@ -39043,156 +37379,105 @@
               <a:buChar char="•"/>
             </a:pPr>
             <a:r>
-              <a:rPr lang="en-US" sz="2000" err="1">
+              <a:rPr lang="en-US" sz="2000" dirty="0" err="1">
                 <a:ea typeface="Inter"/>
                 <a:cs typeface="Arial"/>
               </a:rPr>
-              <a:t>Veebist</a:t>
-            </a:r>
-            <a:r>
-              <a:rPr lang="en-US" sz="2000">
-                <a:ea typeface="Inter"/>
-                <a:cs typeface="Arial"/>
-              </a:rPr>
-              <a:t> </a:t>
-            </a:r>
-            <a:r>
-              <a:rPr lang="en-US" sz="2000" err="1">
-                <a:ea typeface="Inter"/>
-                <a:cs typeface="Arial"/>
-              </a:rPr>
-              <a:t>leitavad</a:t>
-            </a:r>
-            <a:r>
-              <a:rPr lang="en-US" sz="2000">
-                <a:ea typeface="Inter"/>
-                <a:cs typeface="Arial"/>
-              </a:rPr>
-              <a:t> </a:t>
-            </a:r>
-            <a:r>
-              <a:rPr lang="en-US" sz="2000" err="1">
-                <a:ea typeface="Inter"/>
-                <a:cs typeface="Arial"/>
-              </a:rPr>
-              <a:t>andmed</a:t>
-            </a:r>
-            <a:endParaRPr lang="en-US" sz="2000">
+              <a:t>Katsed</a:t>
+            </a:r>
+            <a:endParaRPr lang="en-US" sz="2000" dirty="0">
+              <a:ea typeface="Inter"/>
               <a:cs typeface="Arial"/>
             </a:endParaRPr>
           </a:p>
           <a:p>
-            <a:pPr marL="857250" lvl="1" indent="-342900">
+            <a:pPr marL="342900" indent="-342900">
               <a:lnSpc>
                 <a:spcPct val="150000"/>
               </a:lnSpc>
-              <a:buFont typeface="Courier New" panose="020B0502030000000004" pitchFamily="34" charset="0"/>
-              <a:buChar char="o"/>
+              <a:buClr>
+                <a:srgbClr val="121212"/>
+              </a:buClr>
             </a:pPr>
             <a:r>
-              <a:rPr lang="en-US" sz="2000" err="1">
-                <a:ea typeface="+mn-lt"/>
-                <a:cs typeface="+mn-lt"/>
-              </a:rPr>
-              <a:t>Andmete</a:t>
-            </a:r>
-            <a:r>
-              <a:rPr lang="en-US" sz="2000">
-                <a:ea typeface="+mn-lt"/>
-                <a:cs typeface="+mn-lt"/>
+              <a:rPr lang="en-US" sz="2000" dirty="0" err="1">
+                <a:ea typeface="Inter"/>
+              </a:rPr>
+              <a:t>Seadmete</a:t>
+            </a:r>
+            <a:r>
+              <a:rPr lang="en-US" sz="2000" dirty="0">
+                <a:ea typeface="Inter"/>
               </a:rPr>
               <a:t> </a:t>
             </a:r>
             <a:r>
-              <a:rPr lang="en-US" sz="2000" err="1">
-                <a:ea typeface="+mn-lt"/>
-                <a:cs typeface="+mn-lt"/>
-              </a:rPr>
-              <a:t>teabevärav</a:t>
-            </a:r>
-            <a:r>
-              <a:rPr lang="en-US" sz="2000">
-                <a:ea typeface="+mn-lt"/>
-                <a:cs typeface="+mn-lt"/>
-              </a:rPr>
-              <a:t>: andmed.eesti.ee</a:t>
-            </a:r>
-            <a:endParaRPr lang="en-US" sz="2000">
-              <a:cs typeface="Arial"/>
-            </a:endParaRPr>
+              <a:rPr lang="en-US" sz="2000" dirty="0" err="1">
+                <a:ea typeface="Inter"/>
+              </a:rPr>
+              <a:t>andmed</a:t>
+            </a:r>
+            <a:r>
+              <a:rPr lang="en-US" sz="2000" dirty="0">
+                <a:ea typeface="Inter"/>
+              </a:rPr>
+              <a:t> (</a:t>
+            </a:r>
+            <a:r>
+              <a:rPr lang="en-US" sz="2000" dirty="0" err="1">
+                <a:ea typeface="Inter"/>
+              </a:rPr>
+              <a:t>andurid</a:t>
+            </a:r>
+            <a:r>
+              <a:rPr lang="en-US" sz="2000" dirty="0">
+                <a:ea typeface="Inter"/>
+              </a:rPr>
+              <a:t>)</a:t>
+            </a:r>
           </a:p>
           <a:p>
-            <a:pPr marL="857250" lvl="1" indent="-342900">
+            <a:pPr marL="342900" indent="-342900">
               <a:lnSpc>
                 <a:spcPct val="150000"/>
               </a:lnSpc>
-              <a:buFont typeface="Courier New" panose="020B0502030000000004" pitchFamily="34" charset="0"/>
-              <a:buChar char="o"/>
+              <a:buClr>
+                <a:srgbClr val="121212"/>
+              </a:buClr>
             </a:pPr>
             <a:r>
-              <a:rPr lang="en-US" sz="2000" err="1">
-                <a:ea typeface="Inter"/>
-              </a:rPr>
-              <a:t>Statistikaamet</a:t>
-            </a:r>
-            <a:r>
-              <a:rPr lang="en-US" sz="2000">
-                <a:ea typeface="Inter"/>
-              </a:rPr>
-              <a:t>: stat.ee</a:t>
+              <a:rPr lang="en-US" sz="2000" dirty="0">
+                <a:ea typeface="Inter"/>
+              </a:rPr>
+              <a:t>IT-</a:t>
+            </a:r>
+            <a:r>
+              <a:rPr lang="en-US" sz="2000" dirty="0" err="1">
+                <a:ea typeface="Inter"/>
+              </a:rPr>
+              <a:t>süsteemide</a:t>
+            </a:r>
+            <a:r>
+              <a:rPr lang="en-US" sz="2000" dirty="0">
+                <a:ea typeface="Inter"/>
+              </a:rPr>
+              <a:t> </a:t>
+            </a:r>
+            <a:r>
+              <a:rPr lang="en-US" sz="2000" dirty="0" err="1">
+                <a:ea typeface="Inter"/>
+              </a:rPr>
+              <a:t>kasutusandmed</a:t>
             </a:r>
           </a:p>
           <a:p>
-            <a:pPr marL="1257300" lvl="2" indent="-342900">
+            <a:pPr marL="514350" lvl="1" indent="0">
               <a:lnSpc>
                 <a:spcPct val="150000"/>
               </a:lnSpc>
-              <a:buFont typeface="Wingdings" panose="020B0502030000000004" pitchFamily="34" charset="0"/>
-              <a:buChar char="§"/>
+              <a:buNone/>
             </a:pPr>
-            <a:r>
-              <a:rPr lang="en-US" sz="2000" err="1">
-                <a:ea typeface="Inter"/>
-              </a:rPr>
-              <a:t>Nt</a:t>
-            </a:r>
-            <a:r>
-              <a:rPr lang="en-US" sz="2000">
-                <a:ea typeface="Inter"/>
-              </a:rPr>
-              <a:t> </a:t>
-            </a:r>
-            <a:r>
-              <a:rPr lang="en-US" sz="2000" err="1">
-                <a:ea typeface="Inter"/>
-              </a:rPr>
-              <a:t>elanike</a:t>
-            </a:r>
-            <a:r>
-              <a:rPr lang="en-US" sz="2000">
-                <a:ea typeface="Inter"/>
-              </a:rPr>
-              <a:t> </a:t>
-            </a:r>
-            <a:r>
-              <a:rPr lang="en-US" sz="2000" err="1">
-                <a:ea typeface="Inter"/>
-              </a:rPr>
-              <a:t>arv</a:t>
-            </a:r>
-            <a:r>
-              <a:rPr lang="en-US" sz="2000">
-                <a:ea typeface="Inter"/>
-              </a:rPr>
-              <a:t> ja </a:t>
-            </a:r>
-            <a:r>
-              <a:rPr lang="en-US" sz="2000" err="1">
-                <a:ea typeface="Inter"/>
-              </a:rPr>
-              <a:t>turupositsioon</a:t>
-            </a:r>
-            <a:endParaRPr lang="en-US" sz="2000">
+            <a:endParaRPr lang="en-US" sz="2000" dirty="0">
               <a:ea typeface="Inter"/>
             </a:endParaRPr>
           </a:p>
@@ -39205,116 +37490,103 @@
                 <a:srgbClr val="121212"/>
               </a:buClr>
             </a:pPr>
-            <a:endParaRPr lang="en-US" sz="2000">
-              <a:ea typeface="Inter"/>
-            </a:endParaRPr>
-          </a:p>
-          <a:p>
-            <a:pPr marL="342900" indent="-342900">
-              <a:lnSpc>
-                <a:spcPct val="150000"/>
-              </a:lnSpc>
-              <a:buClr>
-                <a:srgbClr val="121212"/>
-              </a:buClr>
-            </a:pPr>
-            <a:r>
-              <a:rPr lang="en-US" sz="2000" err="1">
+            <a:r>
+              <a:rPr lang="en-US" sz="2000" dirty="0" err="1">
                 <a:ea typeface="Inter"/>
               </a:rPr>
               <a:t>Andmete</a:t>
             </a:r>
             <a:r>
-              <a:rPr lang="en-US" sz="2000">
+              <a:rPr lang="en-US" sz="2000" dirty="0">
                 <a:ea typeface="Inter"/>
               </a:rPr>
               <a:t> </a:t>
             </a:r>
             <a:r>
-              <a:rPr lang="en-US" sz="2000" err="1">
+              <a:rPr lang="en-US" sz="2000" dirty="0" err="1">
                 <a:ea typeface="Inter"/>
               </a:rPr>
               <a:t>kogumisel</a:t>
             </a:r>
             <a:r>
-              <a:rPr lang="en-US" sz="2000">
+              <a:rPr lang="en-US" sz="2000" dirty="0">
                 <a:ea typeface="Inter"/>
               </a:rPr>
               <a:t> ja </a:t>
             </a:r>
             <a:r>
-              <a:rPr lang="en-US" sz="2000" err="1">
+              <a:rPr lang="en-US" sz="2000" dirty="0" err="1">
                 <a:ea typeface="Inter"/>
               </a:rPr>
               <a:t>kasutamisel</a:t>
             </a:r>
             <a:r>
-              <a:rPr lang="en-US" sz="2000">
+              <a:rPr lang="en-US" sz="2000" dirty="0">
                 <a:ea typeface="Inter"/>
               </a:rPr>
               <a:t> </a:t>
             </a:r>
             <a:r>
-              <a:rPr lang="en-US" sz="2000" err="1">
+              <a:rPr lang="en-US" sz="2000" dirty="0" err="1">
                 <a:ea typeface="Inter"/>
               </a:rPr>
               <a:t>tuleb</a:t>
             </a:r>
             <a:r>
-              <a:rPr lang="en-US" sz="2000">
+              <a:rPr lang="en-US" sz="2000" dirty="0">
                 <a:ea typeface="Inter"/>
               </a:rPr>
               <a:t> </a:t>
             </a:r>
             <a:r>
-              <a:rPr lang="en-US" sz="2000" err="1">
+              <a:rPr lang="en-US" sz="2000" dirty="0" err="1">
                 <a:ea typeface="Inter"/>
               </a:rPr>
               <a:t>silmas</a:t>
             </a:r>
             <a:r>
-              <a:rPr lang="en-US" sz="2000">
+              <a:rPr lang="en-US" sz="2000" dirty="0">
                 <a:ea typeface="Inter"/>
               </a:rPr>
               <a:t> </a:t>
             </a:r>
             <a:r>
-              <a:rPr lang="en-US" sz="2000" err="1">
+              <a:rPr lang="en-US" sz="2000" dirty="0" err="1">
                 <a:ea typeface="Inter"/>
               </a:rPr>
               <a:t>pidada</a:t>
             </a:r>
             <a:r>
-              <a:rPr lang="en-US" sz="2000">
+              <a:rPr lang="en-US" sz="2000" dirty="0">
                 <a:ea typeface="Inter"/>
               </a:rPr>
               <a:t> </a:t>
             </a:r>
             <a:r>
-              <a:rPr lang="en-US" sz="2000" err="1">
+              <a:rPr lang="en-US" sz="2000" dirty="0" err="1">
                 <a:ea typeface="Inter"/>
               </a:rPr>
               <a:t>andmekaitse</a:t>
             </a:r>
             <a:r>
-              <a:rPr lang="en-US" sz="2000">
+              <a:rPr lang="en-US" sz="2000" dirty="0">
                 <a:ea typeface="Inter"/>
               </a:rPr>
               <a:t> </a:t>
             </a:r>
             <a:r>
-              <a:rPr lang="en-US" sz="2000" err="1">
+              <a:rPr lang="en-US" sz="2000" dirty="0" err="1">
                 <a:ea typeface="Inter"/>
               </a:rPr>
               <a:t>põhimõtteid</a:t>
             </a:r>
             <a:r>
-              <a:rPr lang="en-US" sz="2000">
+              <a:rPr lang="en-US" sz="2000" dirty="0">
                 <a:ea typeface="Inter"/>
               </a:rPr>
               <a:t>.</a:t>
             </a:r>
-            <a:endParaRPr lang="en-US" sz="2000"/>
+            <a:endParaRPr lang="en-US" sz="2000" dirty="0"/>
           </a:p>
           <a:p>
             <a:pPr marL="514350" indent="-514350">
@@ -39338,7 +37610,7 @@
     </p:spTree>
     <p:extLst>
       <p:ext uri="{BB962C8B-B14F-4D97-AF65-F5344CB8AC3E}">
-        <p14:creationId xmlns:p14="http://schemas.microsoft.com/office/powerpoint/2010/main" val="992073564"/>
+        <p14:creationId xmlns:p14="http://schemas.microsoft.com/office/powerpoint/2010/main" val="1135806306"/>
       </p:ext>
     </p:extLst>
   </p:cSld>
@@ -39396,15 +37668,33 @@
                                   </p:childTnLst>
                                 </p:cTn>
                               </p:par>
+                            </p:childTnLst>
+                          </p:cTn>
+                        </p:par>
+                      </p:childTnLst>
+                    </p:cTn>
+                  </p:par>
+                  <p:par>
+                    <p:cTn id="7" fill="hold">
+                      <p:stCondLst>
+                        <p:cond delay="indefinite"/>
+                      </p:stCondLst>
+                      <p:childTnLst>
+                        <p:par>
+                          <p:cTn id="8" fill="hold">
+                            <p:stCondLst>
+                              <p:cond delay="0"/>
+                            </p:stCondLst>
+                            <p:childTnLst>
                               <p:par>
-                                <p:cTn id="7" presetID="1" presetClass="entr" presetSubtype="0" fill="hold" grpId="0" nodeType="withEffect">
+                                <p:cTn id="9" presetID="1" presetClass="entr" presetSubtype="0" fill="hold" grpId="0" nodeType="clickEffect">
                                   <p:stCondLst>
                                     <p:cond delay="0"/>
                                   </p:stCondLst>
                                   <p:childTnLst>
                                     <p:set>
                                       <p:cBhvr>
-                                        <p:cTn id="8" dur="1" fill="hold">
+                                        <p:cTn id="10" dur="1" fill="hold">
                                           <p:stCondLst>
                                             <p:cond delay="0"/>
                                           </p:stCondLst>
@@ -39434,26 +37724,26 @@
                     </p:cTn>
                   </p:par>
                   <p:par>
-                    <p:cTn id="9" fill="hold">
+                    <p:cTn id="11" fill="hold">
                       <p:stCondLst>
                         <p:cond delay="indefinite"/>
                       </p:stCondLst>
                       <p:childTnLst>
                         <p:par>
-                          <p:cTn id="10" fill="hold">
+                          <p:cTn id="12" fill="hold">
                             <p:stCondLst>
                               <p:cond delay="0"/>
                             </p:stCondLst>
                             <p:childTnLst>
                               <p:par>
-                                <p:cTn id="11" presetID="1" presetClass="entr" presetSubtype="0" fill="hold" grpId="0" nodeType="clickEffect">
+                                <p:cTn id="13" presetID="1" presetClass="entr" presetSubtype="0" fill="hold" grpId="0" nodeType="clickEffect">
                                   <p:stCondLst>
                                     <p:cond delay="0"/>
                                   </p:stCondLst>
                                   <p:childTnLst>
                                     <p:set>
                                       <p:cBhvr>
-                                        <p:cTn id="12" dur="1" fill="hold">
+                                        <p:cTn id="14" dur="1" fill="hold">
                                           <p:stCondLst>
                                             <p:cond delay="0"/>
                                           </p:stCondLst>
@@ -39476,26 +37766,8 @@
                                   </p:childTnLst>
                                 </p:cTn>
                               </p:par>
-                            </p:childTnLst>
-                          </p:cTn>
-                        </p:par>
-                      </p:childTnLst>
-                    </p:cTn>
-                  </p:par>
-                  <p:par>
-                    <p:cTn id="13" fill="hold">
-                      <p:stCondLst>
-                        <p:cond delay="indefinite"/>
-                      </p:stCondLst>
-                      <p:childTnLst>
-                        <p:par>
-                          <p:cTn id="14" fill="hold">
-                            <p:stCondLst>
-                              <p:cond delay="0"/>
-                            </p:stCondLst>
-                            <p:childTnLst>
                               <p:par>
-                                <p:cTn id="15" presetID="1" presetClass="entr" presetSubtype="0" fill="hold" grpId="0" nodeType="clickEffect">
+                                <p:cTn id="15" presetID="1" presetClass="entr" presetSubtype="0" fill="hold" grpId="0" nodeType="withEffect">
                                   <p:stCondLst>
                                     <p:cond delay="0"/>
                                   </p:stCondLst>
@@ -39574,15 +37846,33 @@
                                   </p:childTnLst>
                                 </p:cTn>
                               </p:par>
+                            </p:childTnLst>
+                          </p:cTn>
+                        </p:par>
+                      </p:childTnLst>
+                    </p:cTn>
+                  </p:par>
+                  <p:par>
+                    <p:cTn id="21" fill="hold">
+                      <p:stCondLst>
+                        <p:cond delay="indefinite"/>
+                      </p:stCondLst>
+                      <p:childTnLst>
+                        <p:par>
+                          <p:cTn id="22" fill="hold">
+                            <p:stCondLst>
+                              <p:cond delay="0"/>
+                            </p:stCondLst>
+                            <p:childTnLst>
                               <p:par>
-                                <p:cTn id="21" presetID="1" presetClass="entr" presetSubtype="0" fill="hold" grpId="0" nodeType="withEffect">
+                                <p:cTn id="23" presetID="1" presetClass="entr" presetSubtype="0" fill="hold" grpId="0" nodeType="clickEffect">
                                   <p:stCondLst>
                                     <p:cond delay="0"/>
                                   </p:stCondLst>
                                   <p:childTnLst>
                                     <p:set>
                                       <p:cBhvr>
-                                        <p:cTn id="22" dur="1" fill="hold">
+                                        <p:cTn id="24" dur="1" fill="hold">
                                           <p:stCondLst>
                                             <p:cond delay="0"/>
                                           </p:stCondLst>
@@ -39605,15 +37895,33 @@
                                   </p:childTnLst>
                                 </p:cTn>
                               </p:par>
+                            </p:childTnLst>
+                          </p:cTn>
+                        </p:par>
+                      </p:childTnLst>
+                    </p:cTn>
+                  </p:par>
+                  <p:par>
+                    <p:cTn id="25" fill="hold">
+                      <p:stCondLst>
+                        <p:cond delay="indefinite"/>
+                      </p:stCondLst>
+                      <p:childTnLst>
+                        <p:par>
+                          <p:cTn id="26" fill="hold">
+                            <p:stCondLst>
+                              <p:cond delay="0"/>
+                            </p:stCondLst>
+                            <p:childTnLst>
                               <p:par>
-                                <p:cTn id="23" presetID="1" presetClass="entr" presetSubtype="0" fill="hold" grpId="0" nodeType="withEffect">
+                                <p:cTn id="27" presetID="1" presetClass="entr" presetSubtype="0" fill="hold" grpId="0" nodeType="clickEffect">
                                   <p:stCondLst>
                                     <p:cond delay="0"/>
                                   </p:stCondLst>
                                   <p:childTnLst>
                                     <p:set>
                                       <p:cBhvr>
-                                        <p:cTn id="24" dur="1" fill="hold">
+                                        <p:cTn id="28" dur="1" fill="hold">
                                           <p:stCondLst>
                                             <p:cond delay="0"/>
                                           </p:stCondLst>
@@ -39636,15 +37944,33 @@
                                   </p:childTnLst>
                                 </p:cTn>
                               </p:par>
+                            </p:childTnLst>
+                          </p:cTn>
+                        </p:par>
+                      </p:childTnLst>
+                    </p:cTn>
+                  </p:par>
+                  <p:par>
+                    <p:cTn id="29" fill="hold">
+                      <p:stCondLst>
+                        <p:cond delay="indefinite"/>
+                      </p:stCondLst>
+                      <p:childTnLst>
+                        <p:par>
+                          <p:cTn id="30" fill="hold">
+                            <p:stCondLst>
+                              <p:cond delay="0"/>
+                            </p:stCondLst>
+                            <p:childTnLst>
                               <p:par>
-                                <p:cTn id="25" presetID="1" presetClass="entr" presetSubtype="0" fill="hold" grpId="0" nodeType="withEffect">
+                                <p:cTn id="31" presetID="1" presetClass="entr" presetSubtype="0" fill="hold" grpId="0" nodeType="clickEffect">
                                   <p:stCondLst>
                                     <p:cond delay="0"/>
                                   </p:stCondLst>
                                   <p:childTnLst>
                                     <p:set>
                                       <p:cBhvr>
-                                        <p:cTn id="26" dur="1" fill="hold">
+                                        <p:cTn id="32" dur="1" fill="hold">
                                           <p:stCondLst>
                                             <p:cond delay="0"/>
                                           </p:stCondLst>
@@ -39674,26 +38000,26 @@
                     </p:cTn>
                   </p:par>
                   <p:par>
-                    <p:cTn id="27" fill="hold">
+                    <p:cTn id="33" fill="hold">
                       <p:stCondLst>
                         <p:cond delay="indefinite"/>
                       </p:stCondLst>
                       <p:childTnLst>
                         <p:par>
-                          <p:cTn id="28" fill="hold">
+                          <p:cTn id="34" fill="hold">
                             <p:stCondLst>
                               <p:cond delay="0"/>
                             </p:stCondLst>
                             <p:childTnLst>
                               <p:par>
-                                <p:cTn id="29" presetID="1" presetClass="entr" presetSubtype="0" fill="hold" grpId="0" nodeType="clickEffect">
+                                <p:cTn id="35" presetID="1" presetClass="entr" presetSubtype="0" fill="hold" grpId="0" nodeType="clickEffect">
                                   <p:stCondLst>
                                     <p:cond delay="0"/>
                                   </p:stCondLst>
                                   <p:childTnLst>
                                     <p:set>
                                       <p:cBhvr>
-                                        <p:cTn id="30" dur="1" fill="hold">
+                                        <p:cTn id="36" dur="1" fill="hold">
                                           <p:stCondLst>
                                             <p:cond delay="0"/>
                                           </p:stCondLst>
@@ -39701,7 +38027,56 @@
                                         <p:tgtEl>
                                           <p:spTgt spid="3">
                                             <p:txEl>
-                                              <p:pRg st="9" end="9"/>
+                                              <p:pRg st="8" end="8"/>
+                                            </p:txEl>
+                                          </p:spTgt>
+                                        </p:tgtEl>
+                                        <p:attrNameLst>
+                                          <p:attrName>style.visibility</p:attrName>
+                                        </p:attrNameLst>
+                                      </p:cBhvr>
+                                      <p:to>
+                                        <p:strVal val="visible"/>
+                                      </p:to>
+                                    </p:set>
+                                  </p:childTnLst>
+                                </p:cTn>
+                              </p:par>
+                            </p:childTnLst>
+                          </p:cTn>
+                        </p:par>
+                      </p:childTnLst>
+                    </p:cTn>
+                  </p:par>
+                  <p:par>
+                    <p:cTn id="37" fill="hold">
+                      <p:stCondLst>
+                        <p:cond delay="indefinite"/>
+                      </p:stCondLst>
+                      <p:childTnLst>
+                        <p:par>
+                          <p:cTn id="38" fill="hold">
+                            <p:stCondLst>
+                              <p:cond delay="0"/>
+                            </p:stCondLst>
+                            <p:childTnLst>
+                              <p:par>
+                                <p:cTn id="39" presetID="1" presetClass="entr" presetSubtype="0" fill="hold" grpId="0" nodeType="clickEffect">
+                                  <p:stCondLst>
+                                    <p:cond delay="0"/>
+                                  </p:stCondLst>
+                                  <p:childTnLst>
+                                    <p:set>
+                                      <p:cBhvr>
+                                        <p:cTn id="40" dur="1" fill="hold">
+                                          <p:stCondLst>
+                                            <p:cond delay="0"/>
+                                          </p:stCondLst>
+                                        </p:cTn>
+                                        <p:tgtEl>
+                                          <p:spTgt spid="3">
+                                            <p:txEl>
+                                              <p:pRg st="10" end="10"/>
                                             </p:txEl>
                                           </p:spTgt>
                                         </p:tgtEl>
@@ -39984,36 +38359,36 @@
               </a:lnSpc>
             </a:pPr>
             <a:r>
-              <a:rPr lang="en-US" sz="2400" err="1">
+              <a:rPr lang="en-US" sz="2400" dirty="0" err="1">
                 <a:ea typeface="Inter"/>
               </a:rPr>
               <a:t>Õigsus</a:t>
             </a:r>
             <a:r>
-              <a:rPr lang="en-US" sz="2400">
+              <a:rPr lang="en-US" sz="2400" dirty="0">
                 <a:ea typeface="Inter"/>
               </a:rPr>
               <a:t> - </a:t>
             </a:r>
             <a:r>
-              <a:rPr lang="en-US" sz="2400" err="1">
+              <a:rPr lang="en-US" sz="2400" dirty="0" err="1">
                 <a:ea typeface="Inter"/>
               </a:rPr>
               <a:t>vastavus</a:t>
             </a:r>
             <a:r>
-              <a:rPr lang="en-US" sz="2400">
+              <a:rPr lang="en-US" sz="2400" dirty="0">
                 <a:ea typeface="Inter"/>
               </a:rPr>
               <a:t> </a:t>
             </a:r>
             <a:r>
-              <a:rPr lang="en-US" sz="2400" err="1">
+              <a:rPr lang="en-US" sz="2400" dirty="0" err="1">
                 <a:ea typeface="Inter"/>
               </a:rPr>
               <a:t>tegelikkusele</a:t>
             </a:r>
-            <a:endParaRPr lang="en-US" sz="2400" err="1"/>
+            <a:endParaRPr lang="en-US" sz="2400" dirty="0"/>
           </a:p>
           <a:p>
             <a:pPr>
@@ -40022,102 +38397,102 @@
               </a:lnSpc>
             </a:pPr>
             <a:r>
-              <a:rPr lang="en-US" sz="2400" err="1">
+              <a:rPr lang="en-US" sz="2400" dirty="0" err="1">
                 <a:ea typeface="Inter"/>
               </a:rPr>
               <a:t>Täielikkus</a:t>
             </a:r>
             <a:r>
-              <a:rPr lang="en-US" sz="2400">
+              <a:rPr lang="en-US" sz="2400" dirty="0">
                 <a:ea typeface="Inter"/>
               </a:rPr>
               <a:t> - </a:t>
             </a:r>
             <a:r>
-              <a:rPr lang="en-US" sz="2400" err="1">
+              <a:rPr lang="en-US" sz="2400" dirty="0" err="1">
                 <a:ea typeface="Inter"/>
               </a:rPr>
               <a:t>kõigi</a:t>
             </a:r>
             <a:r>
-              <a:rPr lang="en-US" sz="2400">
+              <a:rPr lang="en-US" sz="2400" dirty="0">
                 <a:ea typeface="Inter"/>
               </a:rPr>
               <a:t> </a:t>
             </a:r>
             <a:r>
-              <a:rPr lang="en-US" sz="2400" err="1">
+              <a:rPr lang="en-US" sz="2400" dirty="0" err="1">
                 <a:ea typeface="Inter"/>
               </a:rPr>
               <a:t>väärtuste</a:t>
             </a:r>
             <a:r>
-              <a:rPr lang="en-US" sz="2400">
+              <a:rPr lang="en-US" sz="2400" dirty="0">
                 <a:ea typeface="Inter"/>
               </a:rPr>
               <a:t> </a:t>
             </a:r>
             <a:r>
-              <a:rPr lang="en-US" sz="2400" err="1">
+              <a:rPr lang="en-US" sz="2400" dirty="0" err="1">
                 <a:ea typeface="Inter"/>
               </a:rPr>
               <a:t>olemasolu</a:t>
             </a:r>
             <a:r>
-              <a:rPr lang="en-US" sz="2400">
+              <a:rPr lang="en-US" sz="2400" dirty="0">
                 <a:ea typeface="Inter"/>
               </a:rPr>
               <a:t> (</a:t>
             </a:r>
             <a:r>
-              <a:rPr lang="en-US" sz="2400" err="1">
+              <a:rPr lang="en-US" sz="2400" dirty="0" err="1">
                 <a:ea typeface="Inter"/>
               </a:rPr>
               <a:t>tulbad</a:t>
             </a:r>
             <a:r>
-              <a:rPr lang="en-US" sz="2400">
+              <a:rPr lang="en-US" sz="2400" dirty="0">
                 <a:ea typeface="Inter"/>
               </a:rPr>
               <a:t> </a:t>
             </a:r>
             <a:r>
-              <a:rPr lang="en-US" sz="2400" err="1">
+              <a:rPr lang="en-US" sz="2400" dirty="0" err="1">
                 <a:ea typeface="Inter"/>
               </a:rPr>
               <a:t>täidetud</a:t>
             </a:r>
             <a:r>
-              <a:rPr lang="en-US" sz="2400">
+              <a:rPr lang="en-US" sz="2400" dirty="0">
                 <a:ea typeface="Inter"/>
               </a:rPr>
               <a:t>, </a:t>
             </a:r>
             <a:r>
-              <a:rPr lang="en-US" sz="2400" err="1">
+              <a:rPr lang="en-US" sz="2400" dirty="0" err="1">
                 <a:ea typeface="Inter"/>
               </a:rPr>
               <a:t>kõik</a:t>
             </a:r>
             <a:r>
-              <a:rPr lang="en-US" sz="2400">
+              <a:rPr lang="en-US" sz="2400" dirty="0">
                 <a:ea typeface="Inter"/>
               </a:rPr>
               <a:t> read </a:t>
             </a:r>
             <a:r>
-              <a:rPr lang="en-US" sz="2400" err="1">
+              <a:rPr lang="en-US" sz="2400" dirty="0" err="1">
                 <a:ea typeface="Inter"/>
               </a:rPr>
               <a:t>olemas</a:t>
             </a:r>
             <a:r>
-              <a:rPr lang="en-US" sz="2400">
+              <a:rPr lang="en-US" sz="2400" dirty="0">
                 <a:ea typeface="Inter"/>
               </a:rPr>
               <a:t>) </a:t>
             </a:r>
-            <a:endParaRPr lang="en-US" sz="2400"/>
+            <a:endParaRPr lang="en-US" sz="2400" dirty="0"/>
           </a:p>
           <a:p>
             <a:pPr>
@@ -40126,60 +38501,60 @@
               </a:lnSpc>
             </a:pPr>
             <a:r>
-              <a:rPr lang="en-US" sz="2400" err="1">
+              <a:rPr lang="en-US" sz="2400" dirty="0" err="1">
                 <a:ea typeface="Inter"/>
               </a:rPr>
               <a:t>Ajakohasus</a:t>
             </a:r>
             <a:r>
-              <a:rPr lang="en-US" sz="2400">
+              <a:rPr lang="en-US" sz="2400" dirty="0">
                 <a:ea typeface="Inter"/>
               </a:rPr>
               <a:t> – </a:t>
             </a:r>
             <a:r>
-              <a:rPr lang="en-US" sz="2400" err="1">
+              <a:rPr lang="en-US" sz="2400" dirty="0" err="1">
                 <a:ea typeface="Inter"/>
               </a:rPr>
               <a:t>uuendatud</a:t>
             </a:r>
             <a:r>
-              <a:rPr lang="en-US" sz="2400">
+              <a:rPr lang="en-US" sz="2400" dirty="0">
                 <a:ea typeface="Inter"/>
               </a:rPr>
               <a:t> </a:t>
             </a:r>
             <a:r>
-              <a:rPr lang="en-US" sz="2400" err="1">
+              <a:rPr lang="en-US" sz="2400" dirty="0" err="1">
                 <a:ea typeface="Inter"/>
               </a:rPr>
               <a:t>vastavalt</a:t>
             </a:r>
             <a:r>
-              <a:rPr lang="en-US" sz="2400">
+              <a:rPr lang="en-US" sz="2400" dirty="0">
                 <a:ea typeface="Inter"/>
               </a:rPr>
               <a:t> </a:t>
             </a:r>
             <a:r>
-              <a:rPr lang="en-US" sz="2400" err="1">
+              <a:rPr lang="en-US" sz="2400" dirty="0" err="1">
                 <a:ea typeface="Inter"/>
               </a:rPr>
               <a:t>vajadusele</a:t>
             </a:r>
             <a:r>
-              <a:rPr lang="en-US" sz="2400">
+              <a:rPr lang="en-US" sz="2400" dirty="0">
                 <a:ea typeface="Inter"/>
               </a:rPr>
               <a:t>, </a:t>
             </a:r>
             <a:r>
-              <a:rPr lang="en-US" sz="2400" err="1">
+              <a:rPr lang="en-US" sz="2400" dirty="0" err="1">
                 <a:ea typeface="Inter"/>
               </a:rPr>
               <a:t>muutustele</a:t>
             </a:r>
-            <a:endParaRPr lang="en-US" sz="2400" err="1"/>
+            <a:endParaRPr lang="en-US" sz="2400" dirty="0"/>
           </a:p>
           <a:p>
             <a:pPr>
@@ -40188,60 +38563,60 @@
               </a:lnSpc>
             </a:pPr>
             <a:r>
-              <a:rPr lang="en-US" sz="2400" err="1">
+              <a:rPr lang="en-US" sz="2400" dirty="0" err="1">
                 <a:ea typeface="Inter"/>
               </a:rPr>
               <a:t>Reeglipärasus</a:t>
             </a:r>
             <a:r>
-              <a:rPr lang="en-US" sz="2400">
+              <a:rPr lang="en-US" sz="2400" dirty="0">
                 <a:ea typeface="Inter"/>
               </a:rPr>
               <a:t> - </a:t>
             </a:r>
             <a:r>
-              <a:rPr lang="en-US" sz="2400" err="1">
+              <a:rPr lang="en-US" sz="2400" dirty="0" err="1">
                 <a:ea typeface="Inter"/>
               </a:rPr>
               <a:t>formaadi</a:t>
             </a:r>
             <a:r>
-              <a:rPr lang="en-US" sz="2400">
+              <a:rPr lang="en-US" sz="2400" dirty="0">
                 <a:ea typeface="Inter"/>
               </a:rPr>
               <a:t> ja </a:t>
             </a:r>
             <a:r>
-              <a:rPr lang="en-US" sz="2400" err="1">
+              <a:rPr lang="en-US" sz="2400" dirty="0" err="1">
                 <a:ea typeface="Inter"/>
               </a:rPr>
               <a:t>struktuuri</a:t>
             </a:r>
             <a:r>
-              <a:rPr lang="en-US" sz="2400">
+              <a:rPr lang="en-US" sz="2400" dirty="0">
                 <a:ea typeface="Inter"/>
               </a:rPr>
               <a:t> </a:t>
             </a:r>
             <a:r>
-              <a:rPr lang="en-US" sz="2400" err="1">
+              <a:rPr lang="en-US" sz="2400" dirty="0" err="1">
                 <a:ea typeface="Inter"/>
               </a:rPr>
               <a:t>vastamine</a:t>
             </a:r>
             <a:r>
-              <a:rPr lang="en-US" sz="2400">
+              <a:rPr lang="en-US" sz="2400" dirty="0">
                 <a:ea typeface="Inter"/>
               </a:rPr>
               <a:t> </a:t>
             </a:r>
             <a:r>
-              <a:rPr lang="en-US" sz="2400" err="1">
+              <a:rPr lang="en-US" sz="2400" dirty="0" err="1">
                 <a:ea typeface="Inter"/>
               </a:rPr>
               <a:t>nõuetele</a:t>
             </a:r>
-            <a:endParaRPr lang="en-US" sz="2400" err="1"/>
+            <a:endParaRPr lang="en-US" sz="2400" dirty="0"/>
           </a:p>
           <a:p>
             <a:pPr>
@@ -40250,84 +38625,95 @@
               </a:lnSpc>
             </a:pPr>
             <a:r>
-              <a:rPr lang="en-US" sz="2400" err="1">
+              <a:rPr lang="en-US" sz="2400" dirty="0" err="1">
                 <a:ea typeface="Inter"/>
               </a:rPr>
               <a:t>Ühekordsus</a:t>
             </a:r>
             <a:r>
-              <a:rPr lang="en-US" sz="2400">
+              <a:rPr lang="en-US" sz="2400" dirty="0">
                 <a:ea typeface="Inter"/>
               </a:rPr>
               <a:t> - </a:t>
             </a:r>
             <a:r>
-              <a:rPr lang="en-US" sz="2400" err="1">
+              <a:rPr lang="en-US" sz="2400" dirty="0" err="1">
                 <a:ea typeface="Inter"/>
               </a:rPr>
               <a:t>ühe</a:t>
             </a:r>
             <a:r>
-              <a:rPr lang="en-US" sz="2400">
+              <a:rPr lang="en-US" sz="2400" dirty="0">
                 <a:ea typeface="Inter"/>
               </a:rPr>
               <a:t> </a:t>
             </a:r>
             <a:r>
-              <a:rPr lang="en-US" sz="2400" err="1">
+              <a:rPr lang="en-US" sz="2400" dirty="0" err="1">
                 <a:ea typeface="Inter"/>
               </a:rPr>
               <a:t>päriselu</a:t>
             </a:r>
             <a:r>
-              <a:rPr lang="en-US" sz="2400">
+              <a:rPr lang="en-US" sz="2400" dirty="0">
                 <a:ea typeface="Inter"/>
               </a:rPr>
               <a:t> </a:t>
             </a:r>
             <a:r>
-              <a:rPr lang="en-US" sz="2400" err="1">
+              <a:rPr lang="en-US" sz="2400" dirty="0" err="1">
                 <a:ea typeface="Inter"/>
               </a:rPr>
               <a:t>objekti</a:t>
             </a:r>
             <a:r>
-              <a:rPr lang="en-US" sz="2400">
+              <a:rPr lang="en-US" sz="2400" dirty="0">
                 <a:ea typeface="Inter"/>
               </a:rPr>
               <a:t> </a:t>
             </a:r>
             <a:r>
-              <a:rPr lang="en-US" sz="2400" err="1">
+              <a:rPr lang="en-US" sz="2400" dirty="0" err="1">
                 <a:ea typeface="Inter"/>
               </a:rPr>
               <a:t>kohta</a:t>
             </a:r>
             <a:r>
-              <a:rPr lang="en-US" sz="2400">
+              <a:rPr lang="en-US" sz="2400" dirty="0">
                 <a:ea typeface="Inter"/>
               </a:rPr>
               <a:t> </a:t>
             </a:r>
             <a:r>
-              <a:rPr lang="en-US" sz="2400" err="1">
+              <a:rPr lang="en-US" sz="2400" dirty="0" err="1">
                 <a:ea typeface="Inter"/>
               </a:rPr>
               <a:t>üks</a:t>
             </a:r>
             <a:r>
-              <a:rPr lang="en-US" sz="2400">
+              <a:rPr lang="en-US" sz="2400" dirty="0">
                 <a:ea typeface="Inter"/>
               </a:rPr>
               <a:t> </a:t>
             </a:r>
             <a:r>
-              <a:rPr lang="en-US" sz="2400" err="1">
+              <a:rPr lang="en-US" sz="2400" dirty="0" err="1">
                 <a:ea typeface="Inter"/>
               </a:rPr>
               <a:t>andmekirje</a:t>
             </a:r>
-            <a:endParaRPr lang="en-US" sz="2400">
+            <a:endParaRPr lang="en-US" sz="2400" dirty="0">
+              <a:ea typeface="Inter"/>
+            </a:endParaRPr>
+          </a:p>
+          <a:p>
+            <a:pPr marL="0" indent="0">
+              <a:lnSpc>
+                <a:spcPct val="150000"/>
+              </a:lnSpc>
+              <a:buNone/>
+            </a:pPr>
+            <a:endParaRPr lang="en-US" sz="2400" dirty="0">
               <a:ea typeface="Inter"/>
             </a:endParaRPr>
           </a:p>
@@ -40337,7 +38723,7 @@
                 <a:spcPct val="150000"/>
               </a:lnSpc>
             </a:pPr>
-            <a:endParaRPr lang="en-US" sz="2400"/>
+            <a:endParaRPr lang="en-US" sz="2400" dirty="0"/>
           </a:p>
           <a:p>
             <a:pPr marL="0" indent="0">
@@ -40346,7 +38732,7 @@
               </a:lnSpc>
               <a:buNone/>
             </a:pPr>
-            <a:endParaRPr lang="en-US" sz="2400"/>
+            <a:endParaRPr lang="en-US" sz="2400" dirty="0"/>
           </a:p>
         </p:txBody>
       </p:sp>
@@ -41341,18 +39727,18 @@
           <a:lstStyle/>
           <a:p>
             <a:r>
-              <a:rPr lang="en-US" sz="3600" b="1" err="1"/>
+              <a:rPr lang="en-US" sz="2800" b="1" err="1"/>
               <a:t>Andmete</a:t>
             </a:r>
             <a:r>
-              <a:rPr lang="en-US" sz="3600" b="1"/>
+              <a:rPr lang="en-US" sz="2800" b="1"/>
               <a:t> </a:t>
             </a:r>
             <a:r>
-              <a:rPr lang="en-US" sz="3600" b="1" err="1"/>
+              <a:rPr lang="en-US" sz="2800" b="1" err="1"/>
               <a:t>elutsükkel</a:t>
             </a:r>
-            <a:endParaRPr lang="en-US" err="1"/>
+            <a:endParaRPr lang="en-US" sz="2800" err="1"/>
           </a:p>
         </p:txBody>
       </p:sp>
@@ -41407,34 +39793,6 @@
           </a:p>
         </p:txBody>
       </p:sp>
-      <p:graphicFrame>
-        <p:nvGraphicFramePr>
-          <p:cNvPr id="4" name="Diagram 3">
-            <a:extLst>
-              <a:ext uri="{FF2B5EF4-FFF2-40B4-BE49-F238E27FC236}">
-                <a16:creationId xmlns:a16="http://schemas.microsoft.com/office/drawing/2014/main" id="{2A3D1327-4C66-49A1-3CA7-991196D30BF8}"/>
-              </a:ext>
-            </a:extLst>
-          </p:cNvPr>
-          <p:cNvGraphicFramePr/>
-          <p:nvPr>
-            <p:extLst>
-              <p:ext uri="{D42A27DB-BD31-4B8C-83A1-F6EECF244321}">
-                <p14:modId xmlns:p14="http://schemas.microsoft.com/office/powerpoint/2010/main" val="2619788529"/>
-              </p:ext>
-            </p:extLst>
-          </p:nvPr>
-        </p:nvGraphicFramePr>
-        <p:xfrm>
-          <a:off x="1186905" y="1515955"/>
-          <a:ext cx="10033458" cy="3043056"/>
-        </p:xfrm>
-        <a:graphic>
-          <a:graphicData uri="http://schemas.openxmlformats.org/drawingml/2006/diagram">
-            <dgm:relIds xmlns:dgm="http://schemas.openxmlformats.org/drawingml/2006/diagram" xmlns:r="http://schemas.openxmlformats.org/officeDocument/2006/relationships" r:dm="rId2" r:lo="rId3" r:qs="rId4" r:cs="rId5"/>
-          </a:graphicData>
-        </a:graphic>
-      </p:graphicFrame>
       <p:sp>
         <p:nvSpPr>
           <p:cNvPr id="534" name="TextBox 533">
@@ -41785,10 +40143,248 @@
           </a:p>
         </p:txBody>
       </p:sp>
+      <p:graphicFrame>
+        <p:nvGraphicFramePr>
+          <p:cNvPr id="17" name="Diagram 16">
+            <a:extLst>
+              <a:ext uri="{FF2B5EF4-FFF2-40B4-BE49-F238E27FC236}">
+                <a16:creationId xmlns:a16="http://schemas.microsoft.com/office/drawing/2014/main" id="{2A3D1327-4C66-49A1-3CA7-991196D30BF8}"/>
+              </a:ext>
+            </a:extLst>
+          </p:cNvPr>
+          <p:cNvGraphicFramePr/>
+          <p:nvPr/>
+        </p:nvGraphicFramePr>
+        <p:xfrm>
+          <a:off x="1186905" y="1515955"/>
+          <a:ext cx="10033458" cy="3043056"/>
+        </p:xfrm>
+        <a:graphic>
+          <a:graphicData uri="http://schemas.openxmlformats.org/drawingml/2006/diagram">
+            <dgm:relIds xmlns:dgm="http://schemas.openxmlformats.org/drawingml/2006/diagram" xmlns:r="http://schemas.openxmlformats.org/officeDocument/2006/relationships" r:dm="rId2" r:lo="rId3" r:qs="rId4" r:cs="rId5"/>
+          </a:graphicData>
+        </a:graphic>
+      </p:graphicFrame>
+      <p:pic>
+        <p:nvPicPr>
+          <p:cNvPr id="18" name="Graphic 41" descr="Blueprint outline">
+            <a:extLst>
+              <a:ext uri="{FF2B5EF4-FFF2-40B4-BE49-F238E27FC236}">
+                <a16:creationId xmlns:a16="http://schemas.microsoft.com/office/drawing/2014/main" id="{71D20794-3C1B-E580-181F-D8E67E262F95}"/>
+              </a:ext>
+            </a:extLst>
+          </p:cNvPr>
+          <p:cNvPicPr>
+            <a:picLocks noChangeAspect="1"/>
+          </p:cNvPicPr>
+          <p:nvPr/>
+        </p:nvPicPr>
+        <p:blipFill>
+          <a:blip>
+            <a:extLst>
+              <a:ext uri="{96DAC541-7B7A-43D3-8B79-37D633B846F1}">
+                <asvg:svgBlip xmlns:asvg="http://schemas.microsoft.com/office/drawing/2016/SVG/main" r:embed="rId7"/>
+              </a:ext>
+            </a:extLst>
+          </a:blip>
+          <a:stretch>
+            <a:fillRect/>
+          </a:stretch>
+        </p:blipFill>
+        <p:spPr>
+          <a:xfrm>
+            <a:off x="1453020" y="3431088"/>
+            <a:ext cx="705633" cy="674319"/>
+          </a:xfrm>
+          <a:prstGeom prst="rect">
+            <a:avLst/>
+          </a:prstGeom>
+        </p:spPr>
+      </p:pic>
+      <p:pic>
+        <p:nvPicPr>
+          <p:cNvPr id="19" name="Graphic 79" descr="Questions outline">
+            <a:extLst>
+              <a:ext uri="{FF2B5EF4-FFF2-40B4-BE49-F238E27FC236}">
+                <a16:creationId xmlns:a16="http://schemas.microsoft.com/office/drawing/2014/main" id="{C5EDA6E9-71D7-0E43-4C18-C8CD194B2068}"/>
+              </a:ext>
+            </a:extLst>
+          </p:cNvPr>
+          <p:cNvPicPr>
+            <a:picLocks noChangeAspect="1"/>
+          </p:cNvPicPr>
+          <p:nvPr/>
+        </p:nvPicPr>
+        <p:blipFill>
+          <a:blip>
+            <a:extLst>
+              <a:ext uri="{96DAC541-7B7A-43D3-8B79-37D633B846F1}">
+                <asvg:svgBlip xmlns:asvg="http://schemas.microsoft.com/office/drawing/2016/SVG/main" r:embed="rId8"/>
+              </a:ext>
+            </a:extLst>
+          </a:blip>
+          <a:stretch>
+            <a:fillRect/>
+          </a:stretch>
+        </p:blipFill>
+        <p:spPr>
+          <a:xfrm>
+            <a:off x="3300608" y="3431088"/>
+            <a:ext cx="632565" cy="663880"/>
+          </a:xfrm>
+          <a:prstGeom prst="rect">
+            <a:avLst/>
+          </a:prstGeom>
+        </p:spPr>
+      </p:pic>
+      <p:pic>
+        <p:nvPicPr>
+          <p:cNvPr id="20" name="Graphic 81" descr="Database outline">
+            <a:extLst>
+              <a:ext uri="{FF2B5EF4-FFF2-40B4-BE49-F238E27FC236}">
+                <a16:creationId xmlns:a16="http://schemas.microsoft.com/office/drawing/2014/main" id="{A2C8095B-8166-8907-25F7-AE4858B7CE82}"/>
+              </a:ext>
+            </a:extLst>
+          </p:cNvPr>
+          <p:cNvPicPr>
+            <a:picLocks noChangeAspect="1"/>
+          </p:cNvPicPr>
+          <p:nvPr/>
+        </p:nvPicPr>
+        <p:blipFill>
+          <a:blip>
+            <a:extLst>
+              <a:ext uri="{96DAC541-7B7A-43D3-8B79-37D633B846F1}">
+                <asvg:svgBlip xmlns:asvg="http://schemas.microsoft.com/office/drawing/2016/SVG/main" r:embed="rId9"/>
+              </a:ext>
+            </a:extLst>
+          </a:blip>
+          <a:stretch>
+            <a:fillRect/>
+          </a:stretch>
+        </p:blipFill>
+        <p:spPr>
+          <a:xfrm>
+            <a:off x="5033375" y="3431088"/>
+            <a:ext cx="611688" cy="653442"/>
+          </a:xfrm>
+          <a:prstGeom prst="rect">
+            <a:avLst/>
+          </a:prstGeom>
+        </p:spPr>
+      </p:pic>
+      <p:pic>
+        <p:nvPicPr>
+          <p:cNvPr id="21" name="Graphic 83" descr="Research outline">
+            <a:extLst>
+              <a:ext uri="{FF2B5EF4-FFF2-40B4-BE49-F238E27FC236}">
+                <a16:creationId xmlns:a16="http://schemas.microsoft.com/office/drawing/2014/main" id="{E7303798-A37A-CA2C-5B12-4528796A05E7}"/>
+              </a:ext>
+            </a:extLst>
+          </p:cNvPr>
+          <p:cNvPicPr>
+            <a:picLocks noChangeAspect="1"/>
+          </p:cNvPicPr>
+          <p:nvPr/>
+        </p:nvPicPr>
+        <p:blipFill>
+          <a:blip>
+            <a:extLst>
+              <a:ext uri="{96DAC541-7B7A-43D3-8B79-37D633B846F1}">
+                <asvg:svgBlip xmlns:asvg="http://schemas.microsoft.com/office/drawing/2016/SVG/main" r:embed="rId10"/>
+              </a:ext>
+            </a:extLst>
+          </a:blip>
+          <a:stretch>
+            <a:fillRect/>
+          </a:stretch>
+        </p:blipFill>
+        <p:spPr>
+          <a:xfrm>
+            <a:off x="6776580" y="3431088"/>
+            <a:ext cx="663880" cy="674318"/>
+          </a:xfrm>
+          <a:prstGeom prst="rect">
+            <a:avLst/>
+          </a:prstGeom>
+        </p:spPr>
+      </p:pic>
+      <p:pic>
+        <p:nvPicPr>
+          <p:cNvPr id="22" name="Graphic 84" descr="Filing Box Archive outline">
+            <a:extLst>
+              <a:ext uri="{FF2B5EF4-FFF2-40B4-BE49-F238E27FC236}">
+                <a16:creationId xmlns:a16="http://schemas.microsoft.com/office/drawing/2014/main" id="{9573F17F-4D4A-59C1-CBA6-8214794920A7}"/>
+              </a:ext>
+            </a:extLst>
+          </p:cNvPr>
+          <p:cNvPicPr>
+            <a:picLocks noChangeAspect="1"/>
+          </p:cNvPicPr>
+          <p:nvPr/>
+        </p:nvPicPr>
+        <p:blipFill>
+          <a:blip>
+            <a:extLst>
+              <a:ext uri="{96DAC541-7B7A-43D3-8B79-37D633B846F1}">
+                <asvg:svgBlip xmlns:asvg="http://schemas.microsoft.com/office/drawing/2016/SVG/main" r:embed="rId11"/>
+              </a:ext>
+            </a:extLst>
+          </a:blip>
+          <a:stretch>
+            <a:fillRect/>
+          </a:stretch>
+        </p:blipFill>
+        <p:spPr>
+          <a:xfrm>
+            <a:off x="8540663" y="3431088"/>
+            <a:ext cx="674318" cy="674318"/>
+          </a:xfrm>
+          <a:prstGeom prst="rect">
+            <a:avLst/>
+          </a:prstGeom>
+        </p:spPr>
+      </p:pic>
+      <p:pic>
+        <p:nvPicPr>
+          <p:cNvPr id="23" name="Graphic 85" descr="Shredder outline">
+            <a:extLst>
+              <a:ext uri="{FF2B5EF4-FFF2-40B4-BE49-F238E27FC236}">
+                <a16:creationId xmlns:a16="http://schemas.microsoft.com/office/drawing/2014/main" id="{77BB4153-FA85-E30F-C6EA-19FEFADE66FD}"/>
+              </a:ext>
+            </a:extLst>
+          </p:cNvPr>
+          <p:cNvPicPr>
+            <a:picLocks noChangeAspect="1"/>
+          </p:cNvPicPr>
+          <p:nvPr/>
+        </p:nvPicPr>
+        <p:blipFill>
+          <a:blip>
+            <a:extLst>
+              <a:ext uri="{96DAC541-7B7A-43D3-8B79-37D633B846F1}">
+                <asvg:svgBlip xmlns:asvg="http://schemas.microsoft.com/office/drawing/2016/SVG/main" r:embed="rId12"/>
+              </a:ext>
+            </a:extLst>
+          </a:blip>
+          <a:stretch>
+            <a:fillRect/>
+          </a:stretch>
+        </p:blipFill>
+        <p:spPr>
+          <a:xfrm>
+            <a:off x="10304745" y="3431088"/>
+            <a:ext cx="726510" cy="674318"/>
+          </a:xfrm>
+          <a:prstGeom prst="rect">
+            <a:avLst/>
+          </a:prstGeom>
+        </p:spPr>
+      </p:pic>
     </p:spTree>
     <p:extLst>
       <p:ext uri="{BB962C8B-B14F-4D97-AF65-F5344CB8AC3E}">
-        <p14:creationId xmlns:p14="http://schemas.microsoft.com/office/powerpoint/2010/main" val="1090052644"/>
+        <p14:creationId xmlns:p14="http://schemas.microsoft.com/office/powerpoint/2010/main" val="1236629858"/>
       </p:ext>
     </p:extLst>
   </p:cSld>
@@ -41916,13 +40512,7 @@
   <p:cSld>
     <p:spTree>
       <p:nvGrpSpPr>
-        <p:cNvPr id="1" name="">
-          <a:extLst>
-            <a:ext uri="{FF2B5EF4-FFF2-40B4-BE49-F238E27FC236}">
-              <a16:creationId xmlns:a16="http://schemas.microsoft.com/office/drawing/2014/main" id="{2E557E86-F0CD-95DC-95D0-8C87805B0EA1}"/>
-            </a:ext>
-          </a:extLst>
-        </p:cNvPr>
+        <p:cNvPr id="1" name=""/>
         <p:cNvGrpSpPr/>
         <p:nvPr/>
       </p:nvGrpSpPr>
@@ -41939,7 +40529,7 @@
           <p:cNvPr id="2" name="Title 1">
             <a:extLst>
               <a:ext uri="{FF2B5EF4-FFF2-40B4-BE49-F238E27FC236}">
-                <a16:creationId xmlns:a16="http://schemas.microsoft.com/office/drawing/2014/main" id="{9DE2716E-62FE-889D-36A0-488FE686063C}"/>
+                <a16:creationId xmlns:a16="http://schemas.microsoft.com/office/drawing/2014/main" id="{FAADA8EF-698C-04CF-D04C-52686C4BA54A}"/>
               </a:ext>
             </a:extLst>
           </p:cNvPr>
@@ -41956,50 +40546,38 @@
           <a:lstStyle/>
           <a:p>
             <a:r>
-              <a:rPr lang="en-US">
-                <a:ea typeface="+mj-lt"/>
-                <a:cs typeface="+mj-lt"/>
-              </a:rPr>
+              <a:rPr lang="en-US" sz="2800"/>
               <a:t>Power BI – </a:t>
             </a:r>
             <a:r>
-              <a:rPr lang="en-US" err="1">
-                <a:ea typeface="+mj-lt"/>
-                <a:cs typeface="+mj-lt"/>
-              </a:rPr>
-              <a:t>andmed</a:t>
-            </a:r>
-            <a:r>
-              <a:rPr lang="en-US">
-                <a:ea typeface="+mj-lt"/>
-                <a:cs typeface="+mj-lt"/>
-              </a:rPr>
+              <a:rPr lang="en-US" sz="2800" err="1"/>
+              <a:t>andmete</a:t>
+            </a:r>
+            <a:r>
+              <a:rPr lang="en-US" sz="2800"/>
               <a:t> </a:t>
             </a:r>
             <a:r>
-              <a:rPr lang="en-US" err="1">
-                <a:ea typeface="+mj-lt"/>
-                <a:cs typeface="+mj-lt"/>
-              </a:rPr>
-              <a:t>sisse</a:t>
-            </a:r>
-            <a:r>
-              <a:rPr lang="en-US">
-                <a:ea typeface="+mj-lt"/>
-                <a:cs typeface="+mj-lt"/>
-              </a:rPr>
+              <a:rPr lang="en-US" sz="2800" err="1"/>
+              <a:t>profileerimine</a:t>
+            </a:r>
+            <a:r>
+              <a:rPr lang="en-US" sz="2800"/>
+              <a:t> – </a:t>
+            </a:r>
+            <a:r>
+              <a:rPr lang="en-US" sz="2800" err="1"/>
+              <a:t>kirjeldav</a:t>
+            </a:r>
+            <a:r>
+              <a:rPr lang="en-US" sz="2800"/>
               <a:t> </a:t>
             </a:r>
             <a:r>
-              <a:rPr lang="en-US" err="1">
-                <a:ea typeface="+mj-lt"/>
-                <a:cs typeface="+mj-lt"/>
-              </a:rPr>
-              <a:t>lugeda</a:t>
-            </a:r>
-            <a:endParaRPr lang="en-US" err="1">
-              <a:ea typeface="Inter Bold"/>
-            </a:endParaRPr>
+              <a:rPr lang="en-US" sz="2800" err="1"/>
+              <a:t>statistika</a:t>
+            </a:r>
+            <a:endParaRPr lang="en-US" sz="2800"/>
           </a:p>
         </p:txBody>
       </p:sp>
@@ -42008,7 +40586,7 @@
           <p:cNvPr id="3" name="Content Placeholder 2">
             <a:extLst>
               <a:ext uri="{FF2B5EF4-FFF2-40B4-BE49-F238E27FC236}">
-                <a16:creationId xmlns:a16="http://schemas.microsoft.com/office/drawing/2014/main" id="{880528B4-6D3A-26AC-5F90-5FEC55219D50}"/>
+                <a16:creationId xmlns:a16="http://schemas.microsoft.com/office/drawing/2014/main" id="{80CE708D-24EA-EFA6-0635-D22EE046AC14}"/>
               </a:ext>
             </a:extLst>
           </p:cNvPr>
@@ -42024,380 +40602,150 @@
           <a:bodyPr/>
           <a:lstStyle/>
           <a:p>
-            <a:pPr marL="514350">
+            <a:pPr>
               <a:lnSpc>
                 <a:spcPct val="150000"/>
               </a:lnSpc>
-              <a:buFont typeface="Inter,Sans-Serif" panose="020B0502030000000004" pitchFamily="34" charset="0"/>
             </a:pPr>
             <a:r>
+              <a:rPr lang="en-US" sz="2400">
+                <a:ea typeface="Inter"/>
+              </a:rPr>
+              <a:t>Power Query </a:t>
+            </a:r>
+            <a:r>
               <a:rPr lang="en-US" sz="2400" err="1">
                 <a:ea typeface="Inter"/>
               </a:rPr>
-              <a:t>Võtame</a:t>
+              <a:t>vaade</a:t>
             </a:r>
             <a:r>
               <a:rPr lang="en-US" sz="2400">
                 <a:ea typeface="Inter"/>
               </a:rPr>
-              <a:t> </a:t>
-            </a:r>
-            <a:r>
-              <a:rPr lang="en-US" sz="2400" err="1">
-                <a:ea typeface="Inter"/>
-              </a:rPr>
-              <a:t>alla</a:t>
-            </a:r>
-            <a:r>
-              <a:rPr lang="en-US" sz="2400">
-                <a:ea typeface="Inter"/>
-              </a:rPr>
-              <a:t> </a:t>
-            </a:r>
-            <a:r>
-              <a:rPr lang="en-US" sz="2400" err="1">
-                <a:ea typeface="Inter"/>
-              </a:rPr>
-              <a:t>uued</a:t>
-            </a:r>
-            <a:r>
-              <a:rPr lang="en-US" sz="2400">
-                <a:ea typeface="Inter"/>
-              </a:rPr>
-              <a:t> </a:t>
-            </a:r>
-            <a:r>
-              <a:rPr lang="en-US" sz="2400" err="1">
-                <a:ea typeface="Inter"/>
-              </a:rPr>
-              <a:t>andmed</a:t>
-            </a:r>
-            <a:r>
-              <a:rPr lang="en-US" sz="2400">
-                <a:ea typeface="Inter"/>
-              </a:rPr>
-              <a:t> </a:t>
-            </a:r>
-            <a:r>
-              <a:rPr lang="en-US" sz="2400" err="1">
-                <a:ea typeface="Inter"/>
-              </a:rPr>
-              <a:t>müügiraporti</a:t>
-            </a:r>
-            <a:r>
-              <a:rPr lang="en-US" sz="2400">
-                <a:ea typeface="Inter"/>
-              </a:rPr>
-              <a:t> </a:t>
-            </a:r>
-            <a:r>
-              <a:rPr lang="en-US" sz="2400" err="1">
-                <a:ea typeface="Inter"/>
-              </a:rPr>
-              <a:t>jaoks</a:t>
-            </a:r>
-            <a:r>
-              <a:rPr lang="en-US" sz="2400">
-                <a:ea typeface="Inter"/>
-              </a:rPr>
-              <a:t> </a:t>
-            </a:r>
+              <a:t> --&gt; View:</a:t>
+            </a:r>
+            <a:endParaRPr lang="en-US" sz="2400"/>
           </a:p>
           <a:p>
-            <a:pPr marL="1028700" lvl="1">
+            <a:pPr lvl="1" indent="-342900">
               <a:lnSpc>
                 <a:spcPct val="150000"/>
               </a:lnSpc>
-              <a:buFont typeface="Courier New,monospace" panose="020B0502030000000004" pitchFamily="34" charset="0"/>
+              <a:buFont typeface="Courier New" panose="020B0502030000000004" pitchFamily="34" charset="0"/>
               <a:buChar char="o"/>
             </a:pPr>
             <a:r>
-              <a:rPr lang="en-US" sz="2000">
-                <a:ea typeface="Inter"/>
-              </a:rPr>
-              <a:t>Lae </a:t>
-            </a:r>
-            <a:r>
-              <a:rPr lang="en-US" sz="2000" err="1">
-                <a:ea typeface="Inter"/>
-              </a:rPr>
-              <a:t>alla</a:t>
-            </a:r>
-            <a:r>
-              <a:rPr lang="en-US" sz="2000">
-                <a:ea typeface="Inter"/>
-              </a:rPr>
-              <a:t> ZIP fail </a:t>
-            </a:r>
-            <a:r>
-              <a:rPr lang="en-US" sz="2000" err="1">
-                <a:ea typeface="Inter"/>
-              </a:rPr>
-              <a:t>alliktabelitega</a:t>
-            </a:r>
-            <a:r>
-              <a:rPr lang="en-US" sz="2000">
-                <a:ea typeface="Inter"/>
-              </a:rPr>
-              <a:t> </a:t>
-            </a:r>
-            <a:r>
-              <a:rPr lang="en-US" sz="2000" err="1">
-                <a:ea typeface="Inter"/>
-              </a:rPr>
-              <a:t>GitHubist</a:t>
-            </a:r>
-            <a:r>
-              <a:rPr lang="en-US" sz="2000">
-                <a:ea typeface="Inter"/>
-              </a:rPr>
-              <a:t>: </a:t>
-            </a:r>
-            <a:r>
-              <a:rPr lang="en-US" sz="2000" b="1">
-                <a:ea typeface="Inter"/>
-              </a:rPr>
-              <a:t>Day2 </a:t>
-            </a:r>
-            <a:r>
-              <a:rPr lang="en-US" sz="2000">
-                <a:ea typeface="Inter"/>
-              </a:rPr>
-              <a:t>--&gt; DataSources.zip</a:t>
-            </a:r>
+              <a:rPr lang="en-US" sz="2400">
+                <a:ea typeface="Inter"/>
+              </a:rPr>
+              <a:t>Column Distribution </a:t>
+            </a:r>
+            <a:endParaRPr lang="en-US" sz="2400"/>
           </a:p>
           <a:p>
-            <a:pPr marL="1028700" lvl="1">
+            <a:pPr lvl="1" indent="-342900">
               <a:lnSpc>
                 <a:spcPct val="150000"/>
               </a:lnSpc>
-              <a:buFont typeface="Courier New,monospace" panose="020B0502030000000004" pitchFamily="34" charset="0"/>
+              <a:buFont typeface="Courier New" panose="020B0502030000000004" pitchFamily="34" charset="0"/>
               <a:buChar char="o"/>
             </a:pPr>
             <a:r>
-              <a:rPr lang="en-US" sz="2000">
-                <a:ea typeface="Inter"/>
-              </a:rPr>
-              <a:t>Unzip</a:t>
-            </a:r>
+              <a:rPr lang="en-US" sz="2400">
+                <a:ea typeface="Inter"/>
+              </a:rPr>
+              <a:t>Column Profile</a:t>
+            </a:r>
+            <a:endParaRPr lang="en-US" sz="2400"/>
           </a:p>
           <a:p>
-            <a:pPr marL="1028700" lvl="1">
+            <a:pPr lvl="1" indent="-342900">
               <a:lnSpc>
                 <a:spcPct val="150000"/>
               </a:lnSpc>
-              <a:buFont typeface="Courier New,monospace" panose="020B0502030000000004" pitchFamily="34" charset="0"/>
+              <a:buFont typeface="Courier New" panose="020B0502030000000004" pitchFamily="34" charset="0"/>
               <a:buChar char="o"/>
             </a:pPr>
             <a:r>
-              <a:rPr lang="en-US" sz="2000">
-                <a:ea typeface="Inter"/>
-              </a:rPr>
-              <a:t>Ava </a:t>
-            </a:r>
-            <a:r>
-              <a:rPr lang="en-US" sz="2000" err="1">
-                <a:ea typeface="Inter"/>
-              </a:rPr>
-              <a:t>eile</a:t>
-            </a:r>
-            <a:r>
-              <a:rPr lang="en-US" sz="2000">
-                <a:ea typeface="Inter"/>
-              </a:rPr>
-              <a:t> </a:t>
-            </a:r>
-            <a:r>
-              <a:rPr lang="en-US" sz="2000" err="1">
-                <a:ea typeface="Inter"/>
-              </a:rPr>
-              <a:t>tehtud</a:t>
-            </a:r>
-            <a:r>
-              <a:rPr lang="en-US" sz="2000">
-                <a:ea typeface="Inter"/>
-              </a:rPr>
-              <a:t> </a:t>
-            </a:r>
-            <a:r>
-              <a:rPr lang="en-US" sz="2000" err="1">
-                <a:ea typeface="Inter"/>
-              </a:rPr>
-              <a:t>PowerBI</a:t>
-            </a:r>
-            <a:r>
-              <a:rPr lang="en-US" sz="2000">
-                <a:ea typeface="Inter"/>
-              </a:rPr>
-              <a:t> fail --&gt; Transform Data --&gt; Change data source</a:t>
+              <a:rPr lang="en-US" sz="2400">
+                <a:ea typeface="Inter"/>
+              </a:rPr>
+              <a:t>Column Quality</a:t>
             </a:r>
           </a:p>
           <a:p>
-            <a:pPr marL="1428750" lvl="2">
+            <a:pPr>
               <a:lnSpc>
                 <a:spcPct val="150000"/>
               </a:lnSpc>
-              <a:buFont typeface="Wingdings,Sans-Serif" panose="020B0502030000000004" pitchFamily="34" charset="0"/>
-              <a:buChar char="§"/>
+              <a:buClr>
+                <a:srgbClr val="121212"/>
+              </a:buClr>
             </a:pPr>
             <a:r>
-              <a:rPr lang="en-US" sz="2000" err="1">
-                <a:ea typeface="Inter"/>
-              </a:rPr>
-              <a:t>Vaata</a:t>
-            </a:r>
-            <a:r>
-              <a:rPr lang="en-US" sz="2000">
+              <a:rPr lang="en-US" sz="2400" err="1">
+                <a:ea typeface="Inter"/>
+              </a:rPr>
+              <a:t>Vaikimisi</a:t>
+            </a:r>
+            <a:r>
+              <a:rPr lang="en-US" sz="2400">
                 <a:ea typeface="Inter"/>
               </a:rPr>
               <a:t> </a:t>
             </a:r>
             <a:r>
-              <a:rPr lang="en-US" sz="2000" err="1">
-                <a:ea typeface="Inter"/>
-              </a:rPr>
-              <a:t>üle</a:t>
-            </a:r>
-            <a:r>
-              <a:rPr lang="en-US" sz="2000">
+              <a:rPr lang="en-US" sz="2400" err="1">
+                <a:ea typeface="Inter"/>
+              </a:rPr>
+              <a:t>esimesed</a:t>
+            </a:r>
+            <a:r>
+              <a:rPr lang="en-US" sz="2400">
+                <a:ea typeface="Inter"/>
+              </a:rPr>
+              <a:t> 1000 </a:t>
+            </a:r>
+            <a:r>
+              <a:rPr lang="en-US" sz="2400" err="1">
+                <a:ea typeface="Inter"/>
+              </a:rPr>
+              <a:t>kirjet</a:t>
+            </a:r>
+            <a:r>
+              <a:rPr lang="en-US" sz="2400">
+                <a:ea typeface="Inter"/>
+              </a:rPr>
+              <a:t>, </a:t>
+            </a:r>
+            <a:r>
+              <a:rPr lang="en-US" sz="2400" err="1">
+                <a:ea typeface="Inter"/>
+              </a:rPr>
+              <a:t>vaja</a:t>
+            </a:r>
+            <a:r>
+              <a:rPr lang="en-US" sz="2400">
                 <a:ea typeface="Inter"/>
               </a:rPr>
               <a:t> </a:t>
             </a:r>
             <a:r>
-              <a:rPr lang="en-US" sz="2000" err="1">
-                <a:ea typeface="Inter"/>
-              </a:rPr>
-              <a:t>tulpade</a:t>
-            </a:r>
-            <a:r>
-              <a:rPr lang="en-US" sz="2000">
-                <a:ea typeface="Inter"/>
-              </a:rPr>
-              <a:t> sisu ja </a:t>
-            </a:r>
-            <a:r>
-              <a:rPr lang="en-US" sz="2000" err="1">
-                <a:ea typeface="Inter"/>
-              </a:rPr>
-              <a:t>vorm</a:t>
-            </a:r>
-            <a:endParaRPr lang="en-US" sz="2000"/>
+              <a:rPr lang="en-US" sz="2400" err="1">
+                <a:ea typeface="Inter"/>
+              </a:rPr>
+              <a:t>valida</a:t>
+            </a:r>
+            <a:r>
+              <a:rPr lang="en-US" sz="2400">
+                <a:ea typeface="Inter"/>
+              </a:rPr>
+              <a:t>  "Column profiling based on entire data set"</a:t>
+            </a:r>
           </a:p>
           <a:p>
-            <a:pPr marL="1028700" lvl="1">
-              <a:lnSpc>
-                <a:spcPct val="150000"/>
-              </a:lnSpc>
-              <a:buFont typeface="Courier New,monospace" panose="020B0502030000000004" pitchFamily="34" charset="0"/>
-              <a:buChar char="o"/>
-            </a:pPr>
-            <a:r>
-              <a:rPr lang="en-US" sz="2000" err="1">
-                <a:ea typeface="Inter"/>
-              </a:rPr>
-              <a:t>Vaata</a:t>
-            </a:r>
-            <a:r>
-              <a:rPr lang="en-US" sz="2000">
-                <a:ea typeface="Inter"/>
-              </a:rPr>
-              <a:t> </a:t>
-            </a:r>
-            <a:r>
-              <a:rPr lang="en-US" sz="2000" err="1">
-                <a:ea typeface="Inter"/>
-              </a:rPr>
-              <a:t>üle</a:t>
-            </a:r>
-            <a:r>
-              <a:rPr lang="en-US" sz="2000">
-                <a:ea typeface="Inter"/>
-              </a:rPr>
-              <a:t> </a:t>
-            </a:r>
-            <a:r>
-              <a:rPr lang="en-US" sz="2000" err="1">
-                <a:ea typeface="Inter"/>
-              </a:rPr>
-              <a:t>tabelite</a:t>
-            </a:r>
-            <a:r>
-              <a:rPr lang="en-US" sz="2000">
-                <a:ea typeface="Inter"/>
-              </a:rPr>
-              <a:t> </a:t>
-            </a:r>
-            <a:r>
-              <a:rPr lang="en-US" sz="2000" err="1">
-                <a:ea typeface="Inter"/>
-              </a:rPr>
-              <a:t>vahelised</a:t>
-            </a:r>
-            <a:r>
-              <a:rPr lang="en-US" sz="2000">
-                <a:ea typeface="Inter"/>
-              </a:rPr>
-              <a:t> </a:t>
-            </a:r>
-            <a:r>
-              <a:rPr lang="en-US" sz="2000" err="1">
-                <a:ea typeface="Inter"/>
-              </a:rPr>
-              <a:t>suhted</a:t>
-            </a:r>
-            <a:r>
-              <a:rPr lang="en-US" sz="2000">
-                <a:ea typeface="Inter"/>
-              </a:rPr>
-              <a:t> – 1:* ja </a:t>
-            </a:r>
-            <a:r>
-              <a:rPr lang="en-US" sz="2000" err="1">
-                <a:ea typeface="Inter"/>
-              </a:rPr>
-              <a:t>filtreerimise</a:t>
-            </a:r>
-            <a:r>
-              <a:rPr lang="en-US" sz="2000">
-                <a:ea typeface="Inter"/>
-              </a:rPr>
-              <a:t> </a:t>
-            </a:r>
-            <a:r>
-              <a:rPr lang="en-US" sz="2000" err="1">
-                <a:ea typeface="Inter"/>
-              </a:rPr>
-              <a:t>suund</a:t>
-            </a:r>
-            <a:endParaRPr lang="en-US" sz="2000">
-              <a:ea typeface="Inter"/>
-            </a:endParaRPr>
-          </a:p>
-          <a:p>
-            <a:pPr marL="1028700" lvl="1">
-              <a:lnSpc>
-                <a:spcPct val="150000"/>
-              </a:lnSpc>
-              <a:buFont typeface="Courier New,monospace" panose="020B0502030000000004" pitchFamily="34" charset="0"/>
-              <a:buChar char="o"/>
-            </a:pPr>
-            <a:r>
-              <a:rPr lang="en-US" sz="2000" err="1">
-                <a:ea typeface="Inter"/>
-              </a:rPr>
-              <a:t>Salvesta</a:t>
-            </a:r>
-            <a:r>
-              <a:rPr lang="en-US" sz="2000">
-                <a:ea typeface="Inter"/>
-              </a:rPr>
-              <a:t> fail</a:t>
-            </a:r>
-            <a:endParaRPr lang="en-US" sz="2000"/>
-          </a:p>
-          <a:p>
-            <a:pPr marL="285750" indent="0">
+            <a:pPr marL="0" indent="0">
               <a:lnSpc>
                 <a:spcPct val="150000"/>
               </a:lnSpc>
@@ -42406,33 +40754,16 @@
               </a:buClr>
               <a:buNone/>
             </a:pPr>
-            <a:endParaRPr lang="en-US" sz="2400"/>
-          </a:p>
-          <a:p>
-            <a:pPr marL="514350">
-              <a:lnSpc>
-                <a:spcPct val="150000"/>
-              </a:lnSpc>
-              <a:buFont typeface="Inter"/>
-              <a:buChar char="‣"/>
-            </a:pPr>
-            <a:endParaRPr lang="en-US" sz="2800"/>
-          </a:p>
-          <a:p>
-            <a:pPr marL="0" indent="0">
-              <a:lnSpc>
-                <a:spcPct val="150000"/>
-              </a:lnSpc>
-              <a:buNone/>
-            </a:pPr>
-            <a:endParaRPr lang="en-US" sz="2800"/>
+            <a:endParaRPr lang="en-US" sz="2400">
+              <a:ea typeface="Inter"/>
+            </a:endParaRPr>
           </a:p>
         </p:txBody>
       </p:sp>
     </p:spTree>
     <p:extLst>
       <p:ext uri="{BB962C8B-B14F-4D97-AF65-F5344CB8AC3E}">
-        <p14:creationId xmlns:p14="http://schemas.microsoft.com/office/powerpoint/2010/main" val="2908858834"/>
+        <p14:creationId xmlns:p14="http://schemas.microsoft.com/office/powerpoint/2010/main" val="394666795"/>
       </p:ext>
     </p:extLst>
   </p:cSld>
@@ -43234,18 +41565,18 @@
 </file>
 
 <file path=customXml/item1.xml><?xml version="1.0" encoding="utf-8"?>
+<p:properties xmlns:p="http://schemas.microsoft.com/office/2006/metadata/properties" xmlns:xsi="http://www.w3.org/2001/XMLSchema-instance" xmlns:pc="http://schemas.microsoft.com/office/infopath/2007/PartnerControls">
+  <documentManagement/>
+</p:properties>
+</file>
+
+<file path=customXml/item2.xml><?xml version="1.0" encoding="utf-8"?>
 <?mso-contentType ?>
 <FormTemplates xmlns="http://schemas.microsoft.com/sharepoint/v3/contenttype/forms">
   <Display>DocumentLibraryForm</Display>
   <Edit>DocumentLibraryForm</Edit>
   <New>DocumentLibraryForm</New>
 </FormTemplates>
-</file>
-
-<file path=customXml/item2.xml><?xml version="1.0" encoding="utf-8"?>
-<p:properties xmlns:p="http://schemas.microsoft.com/office/2006/metadata/properties" xmlns:xsi="http://www.w3.org/2001/XMLSchema-instance" xmlns:pc="http://schemas.microsoft.com/office/infopath/2007/PartnerControls">
-  <documentManagement/>
-</p:properties>
 </file>
 
 <file path=customXml/item3.xml><?xml version="1.0" encoding="utf-8"?>
@@ -43417,18 +41748,18 @@
 </file>
 
 <file path=customXml/itemProps1.xml><?xml version="1.0" encoding="utf-8"?>
-<ds:datastoreItem xmlns:ds="http://schemas.openxmlformats.org/officeDocument/2006/customXml" ds:itemID="{9DC439CA-6F1C-4005-ACA6-A52E04DEE0A7}">
+<ds:datastoreItem xmlns:ds="http://schemas.openxmlformats.org/officeDocument/2006/customXml" ds:itemID="{5BDF4908-A52A-47DD-A794-6E02D71942FC}">
   <ds:schemaRefs>
-    <ds:schemaRef ds:uri="http://schemas.microsoft.com/sharepoint/v3/contenttype/forms"/>
+    <ds:schemaRef ds:uri="http://schemas.microsoft.com/office/2006/metadata/properties"/>
+    <ds:schemaRef ds:uri="http://schemas.microsoft.com/office/infopath/2007/PartnerControls"/>
   </ds:schemaRefs>
 </ds:datastoreItem>
 </file>
 
 <file path=customXml/itemProps2.xml><?xml version="1.0" encoding="utf-8"?>
-<ds:datastoreItem xmlns:ds="http://schemas.openxmlformats.org/officeDocument/2006/customXml" ds:itemID="{5BDF4908-A52A-47DD-A794-6E02D71942FC}">
+<ds:datastoreItem xmlns:ds="http://schemas.openxmlformats.org/officeDocument/2006/customXml" ds:itemID="{9DC439CA-6F1C-4005-ACA6-A52E04DEE0A7}">
   <ds:schemaRefs>
-    <ds:schemaRef ds:uri="http://schemas.microsoft.com/office/2006/metadata/properties"/>
-    <ds:schemaRef ds:uri="http://schemas.microsoft.com/office/infopath/2007/PartnerControls"/>
+    <ds:schemaRef ds:uri="http://schemas.microsoft.com/sharepoint/v3/contenttype/forms"/>
   </ds:schemaRefs>
 </ds:datastoreItem>
 </file>
